--- a/documentation/website  run though.pptx
+++ b/documentation/website  run though.pptx
@@ -7,31 +7,23 @@
   <p:sldIdLst>
     <p:sldId id="256" r:id="rId2"/>
     <p:sldId id="273" r:id="rId3"/>
-    <p:sldId id="274" r:id="rId4"/>
-    <p:sldId id="275" r:id="rId5"/>
-    <p:sldId id="276" r:id="rId6"/>
-    <p:sldId id="277" r:id="rId7"/>
-    <p:sldId id="278" r:id="rId8"/>
-    <p:sldId id="279" r:id="rId9"/>
-    <p:sldId id="280" r:id="rId10"/>
-    <p:sldId id="281" r:id="rId11"/>
-    <p:sldId id="267" r:id="rId12"/>
-    <p:sldId id="257" r:id="rId13"/>
-    <p:sldId id="258" r:id="rId14"/>
-    <p:sldId id="264" r:id="rId15"/>
-    <p:sldId id="266" r:id="rId16"/>
-    <p:sldId id="259" r:id="rId17"/>
-    <p:sldId id="260" r:id="rId18"/>
-    <p:sldId id="261" r:id="rId19"/>
-    <p:sldId id="269" r:id="rId20"/>
-    <p:sldId id="268" r:id="rId21"/>
-    <p:sldId id="262" r:id="rId22"/>
-    <p:sldId id="263" r:id="rId23"/>
-    <p:sldId id="270" r:id="rId24"/>
-    <p:sldId id="271" r:id="rId25"/>
-    <p:sldId id="272" r:id="rId26"/>
-    <p:sldId id="283" r:id="rId27"/>
-    <p:sldId id="282" r:id="rId28"/>
+    <p:sldId id="267" r:id="rId4"/>
+    <p:sldId id="257" r:id="rId5"/>
+    <p:sldId id="258" r:id="rId6"/>
+    <p:sldId id="264" r:id="rId7"/>
+    <p:sldId id="266" r:id="rId8"/>
+    <p:sldId id="259" r:id="rId9"/>
+    <p:sldId id="260" r:id="rId10"/>
+    <p:sldId id="261" r:id="rId11"/>
+    <p:sldId id="269" r:id="rId12"/>
+    <p:sldId id="268" r:id="rId13"/>
+    <p:sldId id="262" r:id="rId14"/>
+    <p:sldId id="263" r:id="rId15"/>
+    <p:sldId id="270" r:id="rId16"/>
+    <p:sldId id="271" r:id="rId17"/>
+    <p:sldId id="272" r:id="rId18"/>
+    <p:sldId id="283" r:id="rId19"/>
+    <p:sldId id="282" r:id="rId20"/>
   </p:sldIdLst>
   <p:sldSz cx="12192000" cy="6858000"/>
   <p:notesSz cx="6858000" cy="9144000"/>
@@ -141,14 +133,6 @@
         <p14:section name="website use" id="{9327A0C2-9709-4946-ACF3-CC65825D556C}">
           <p14:sldIdLst>
             <p14:sldId id="273"/>
-            <p14:sldId id="274"/>
-            <p14:sldId id="275"/>
-            <p14:sldId id="276"/>
-            <p14:sldId id="277"/>
-            <p14:sldId id="278"/>
-            <p14:sldId id="279"/>
-            <p14:sldId id="280"/>
-            <p14:sldId id="281"/>
           </p14:sldIdLst>
         </p14:section>
         <p14:section name="coding" id="{5772E863-368A-4ED6-92FD-789D5DA21F15}">
@@ -3482,3362 +3466,6 @@
 <file path=ppt/slides/slide10.xml><?xml version="1.0" encoding="utf-8"?>
 <p:sld xmlns:a="http://schemas.openxmlformats.org/drawingml/2006/main" xmlns:r="http://schemas.openxmlformats.org/officeDocument/2006/relationships" xmlns:p="http://schemas.openxmlformats.org/presentationml/2006/main">
   <p:cSld>
-    <p:spTree>
-      <p:nvGrpSpPr>
-        <p:cNvPr id="1" name="">
-          <a:extLst>
-            <a:ext uri="{FF2B5EF4-FFF2-40B4-BE49-F238E27FC236}">
-              <a16:creationId xmlns:a16="http://schemas.microsoft.com/office/drawing/2014/main" id="{D2338277-A13E-23C1-46D7-C4754E7609C2}"/>
-            </a:ext>
-          </a:extLst>
-        </p:cNvPr>
-        <p:cNvGrpSpPr/>
-        <p:nvPr/>
-      </p:nvGrpSpPr>
-      <p:grpSpPr>
-        <a:xfrm>
-          <a:off x="0" y="0"/>
-          <a:ext cx="0" cy="0"/>
-          <a:chOff x="0" y="0"/>
-          <a:chExt cx="0" cy="0"/>
-        </a:xfrm>
-      </p:grpSpPr>
-      <p:sp>
-        <p:nvSpPr>
-          <p:cNvPr id="2" name="Title 1">
-            <a:extLst>
-              <a:ext uri="{FF2B5EF4-FFF2-40B4-BE49-F238E27FC236}">
-                <a16:creationId xmlns:a16="http://schemas.microsoft.com/office/drawing/2014/main" id="{8E8F822B-53D5-134E-3FDB-689D96B5277F}"/>
-              </a:ext>
-            </a:extLst>
-          </p:cNvPr>
-          <p:cNvSpPr>
-            <a:spLocks noGrp="1"/>
-          </p:cNvSpPr>
-          <p:nvPr>
-            <p:ph type="title"/>
-          </p:nvPr>
-        </p:nvSpPr>
-        <p:spPr>
-          <a:xfrm>
-            <a:off x="640080" y="329184"/>
-            <a:ext cx="6894576" cy="1783080"/>
-          </a:xfrm>
-        </p:spPr>
-        <p:txBody>
-          <a:bodyPr anchor="b">
-            <a:normAutofit/>
-          </a:bodyPr>
-          <a:lstStyle/>
-          <a:p>
-            <a:r>
-              <a:rPr lang="en-GB" sz="5400"/>
-              <a:t>Organised into functions/classes</a:t>
-            </a:r>
-          </a:p>
-        </p:txBody>
-      </p:sp>
-      <p:sp>
-        <p:nvSpPr>
-          <p:cNvPr id="3" name="Content Placeholder 2">
-            <a:extLst>
-              <a:ext uri="{FF2B5EF4-FFF2-40B4-BE49-F238E27FC236}">
-                <a16:creationId xmlns:a16="http://schemas.microsoft.com/office/drawing/2014/main" id="{34A1E998-863D-3E5F-0C28-BB57612DE565}"/>
-              </a:ext>
-            </a:extLst>
-          </p:cNvPr>
-          <p:cNvSpPr>
-            <a:spLocks noGrp="1"/>
-          </p:cNvSpPr>
-          <p:nvPr>
-            <p:ph idx="1"/>
-          </p:nvPr>
-        </p:nvSpPr>
-        <p:spPr>
-          <a:xfrm>
-            <a:off x="640080" y="2706624"/>
-            <a:ext cx="4554220" cy="3483864"/>
-          </a:xfrm>
-        </p:spPr>
-        <p:txBody>
-          <a:bodyPr>
-            <a:normAutofit/>
-          </a:bodyPr>
-          <a:lstStyle/>
-          <a:p>
-            <a:r>
-              <a:rPr lang="en-GB" sz="2200" dirty="0"/>
-              <a:t>Each core feature is organised and named into a individual class and whether they are functional or nonfunctional </a:t>
-            </a:r>
-            <a:r>
-              <a:rPr lang="en-GB" sz="2200" b="1" dirty="0"/>
-              <a:t>( example on the right)</a:t>
-            </a:r>
-          </a:p>
-        </p:txBody>
-      </p:sp>
-      <p:pic>
-        <p:nvPicPr>
-          <p:cNvPr id="8" name="Picture 7">
-            <a:extLst>
-              <a:ext uri="{FF2B5EF4-FFF2-40B4-BE49-F238E27FC236}">
-                <a16:creationId xmlns:a16="http://schemas.microsoft.com/office/drawing/2014/main" id="{E46D21A8-B42A-7510-682B-46C3ED17CCB4}"/>
-              </a:ext>
-            </a:extLst>
-          </p:cNvPr>
-          <p:cNvPicPr>
-            <a:picLocks noChangeAspect="1"/>
-          </p:cNvPicPr>
-          <p:nvPr/>
-        </p:nvPicPr>
-        <p:blipFill>
-          <a:blip r:embed="rId2"/>
-          <a:stretch>
-            <a:fillRect/>
-          </a:stretch>
-        </p:blipFill>
-        <p:spPr>
-          <a:xfrm>
-            <a:off x="6260456" y="329184"/>
-            <a:ext cx="5617600" cy="2668359"/>
-          </a:xfrm>
-          <a:prstGeom prst="rect">
-            <a:avLst/>
-          </a:prstGeom>
-        </p:spPr>
-      </p:pic>
-      <p:pic>
-        <p:nvPicPr>
-          <p:cNvPr id="6" name="Picture 5">
-            <a:extLst>
-              <a:ext uri="{FF2B5EF4-FFF2-40B4-BE49-F238E27FC236}">
-                <a16:creationId xmlns:a16="http://schemas.microsoft.com/office/drawing/2014/main" id="{E8D72234-1C78-3837-0300-E6FE7CEA6D97}"/>
-              </a:ext>
-            </a:extLst>
-          </p:cNvPr>
-          <p:cNvPicPr>
-            <a:picLocks noChangeAspect="1"/>
-          </p:cNvPicPr>
-          <p:nvPr/>
-        </p:nvPicPr>
-        <p:blipFill>
-          <a:blip r:embed="rId3"/>
-          <a:srcRect r="19618"/>
-          <a:stretch/>
-        </p:blipFill>
-        <p:spPr>
-          <a:xfrm>
-            <a:off x="6260456" y="3326726"/>
-            <a:ext cx="5571116" cy="2668359"/>
-          </a:xfrm>
-          <a:prstGeom prst="rect">
-            <a:avLst/>
-          </a:prstGeom>
-        </p:spPr>
-      </p:pic>
-    </p:spTree>
-    <p:extLst>
-      <p:ext uri="{BB962C8B-B14F-4D97-AF65-F5344CB8AC3E}">
-        <p14:creationId xmlns:p14="http://schemas.microsoft.com/office/powerpoint/2010/main" val="948491127"/>
-      </p:ext>
-    </p:extLst>
-  </p:cSld>
-  <p:clrMapOvr>
-    <a:masterClrMapping/>
-  </p:clrMapOvr>
-</p:sld>
-</file>
-
-<file path=ppt/slides/slide11.xml><?xml version="1.0" encoding="utf-8"?>
-<p:sld xmlns:a="http://schemas.openxmlformats.org/drawingml/2006/main" xmlns:r="http://schemas.openxmlformats.org/officeDocument/2006/relationships" xmlns:p="http://schemas.openxmlformats.org/presentationml/2006/main">
-  <p:cSld>
-    <p:bg>
-      <p:bgPr>
-        <a:solidFill>
-          <a:schemeClr val="bg1"/>
-        </a:solidFill>
-        <a:effectLst/>
-      </p:bgPr>
-    </p:bg>
-    <p:spTree>
-      <p:nvGrpSpPr>
-        <p:cNvPr id="1" name=""/>
-        <p:cNvGrpSpPr/>
-        <p:nvPr/>
-      </p:nvGrpSpPr>
-      <p:grpSpPr>
-        <a:xfrm>
-          <a:off x="0" y="0"/>
-          <a:ext cx="0" cy="0"/>
-          <a:chOff x="0" y="0"/>
-          <a:chExt cx="0" cy="0"/>
-        </a:xfrm>
-      </p:grpSpPr>
-      <p:sp useBgFill="1">
-        <p:nvSpPr>
-          <p:cNvPr id="8" name="Rectangle 7">
-            <a:extLst>
-              <a:ext uri="{FF2B5EF4-FFF2-40B4-BE49-F238E27FC236}">
-                <a16:creationId xmlns:a16="http://schemas.microsoft.com/office/drawing/2014/main" id="{943CAA20-3569-4189-9E48-239A229A86CA}"/>
-              </a:ext>
-              <a:ext uri="{C183D7F6-B498-43B3-948B-1728B52AA6E4}">
-                <adec:decorative xmlns:adec="http://schemas.microsoft.com/office/drawing/2017/decorative" val="1"/>
-              </a:ext>
-            </a:extLst>
-          </p:cNvPr>
-          <p:cNvSpPr>
-            <a:spLocks noGrp="1" noRot="1" noChangeAspect="1" noMove="1" noResize="1" noEditPoints="1" noAdjustHandles="1" noChangeArrowheads="1" noChangeShapeType="1" noTextEdit="1"/>
-          </p:cNvSpPr>
-          <p:nvPr>
-            <p:extLst>
-              <p:ext uri="{386F3935-93C4-4BCD-93E2-E3B085C9AB24}">
-                <p16:designElem xmlns:p16="http://schemas.microsoft.com/office/powerpoint/2015/main" val="1"/>
-              </p:ext>
-            </p:extLst>
-          </p:nvPr>
-        </p:nvSpPr>
-        <p:spPr>
-          <a:xfrm>
-            <a:off x="0" y="0"/>
-            <a:ext cx="12188952" cy="6858000"/>
-          </a:xfrm>
-          <a:prstGeom prst="rect">
-            <a:avLst/>
-          </a:prstGeom>
-          <a:ln>
-            <a:noFill/>
-          </a:ln>
-        </p:spPr>
-        <p:style>
-          <a:lnRef idx="2">
-            <a:schemeClr val="accent1">
-              <a:shade val="50000"/>
-            </a:schemeClr>
-          </a:lnRef>
-          <a:fillRef idx="1">
-            <a:schemeClr val="accent1"/>
-          </a:fillRef>
-          <a:effectRef idx="0">
-            <a:schemeClr val="accent1"/>
-          </a:effectRef>
-          <a:fontRef idx="minor">
-            <a:schemeClr val="lt1"/>
-          </a:fontRef>
-        </p:style>
-        <p:txBody>
-          <a:bodyPr rtlCol="0" anchor="ctr"/>
-          <a:lstStyle/>
-          <a:p>
-            <a:pPr algn="ctr"/>
-            <a:endParaRPr lang="en-US"/>
-          </a:p>
-        </p:txBody>
-      </p:sp>
-      <p:sp>
-        <p:nvSpPr>
-          <p:cNvPr id="2" name="Title 1">
-            <a:extLst>
-              <a:ext uri="{FF2B5EF4-FFF2-40B4-BE49-F238E27FC236}">
-                <a16:creationId xmlns:a16="http://schemas.microsoft.com/office/drawing/2014/main" id="{A01EFF67-C608-A661-E5FC-D997913114A2}"/>
-              </a:ext>
-            </a:extLst>
-          </p:cNvPr>
-          <p:cNvSpPr>
-            <a:spLocks noGrp="1"/>
-          </p:cNvSpPr>
-          <p:nvPr>
-            <p:ph type="ctrTitle"/>
-          </p:nvPr>
-        </p:nvSpPr>
-        <p:spPr>
-          <a:xfrm>
-            <a:off x="838200" y="451381"/>
-            <a:ext cx="10512552" cy="4066540"/>
-          </a:xfrm>
-        </p:spPr>
-        <p:txBody>
-          <a:bodyPr anchor="b">
-            <a:normAutofit/>
-          </a:bodyPr>
-          <a:lstStyle/>
-          <a:p>
-            <a:pPr algn="l"/>
-            <a:r>
-              <a:rPr lang="en-GB" sz="6600"/>
-              <a:t>Functionality</a:t>
-            </a:r>
-            <a:endParaRPr lang="en-GB" sz="6600" dirty="0"/>
-          </a:p>
-        </p:txBody>
-      </p:sp>
-      <p:sp>
-        <p:nvSpPr>
-          <p:cNvPr id="3" name="Subtitle 2">
-            <a:extLst>
-              <a:ext uri="{FF2B5EF4-FFF2-40B4-BE49-F238E27FC236}">
-                <a16:creationId xmlns:a16="http://schemas.microsoft.com/office/drawing/2014/main" id="{58337BB5-8CC9-E68E-BA23-DC96A633E804}"/>
-              </a:ext>
-            </a:extLst>
-          </p:cNvPr>
-          <p:cNvSpPr>
-            <a:spLocks noGrp="1"/>
-          </p:cNvSpPr>
-          <p:nvPr>
-            <p:ph type="subTitle" idx="1"/>
-          </p:nvPr>
-        </p:nvSpPr>
-        <p:spPr>
-          <a:xfrm>
-            <a:off x="838199" y="4983276"/>
-            <a:ext cx="10512552" cy="1126680"/>
-          </a:xfrm>
-        </p:spPr>
-        <p:txBody>
-          <a:bodyPr>
-            <a:normAutofit/>
-          </a:bodyPr>
-          <a:lstStyle/>
-          <a:p>
-            <a:pPr algn="l"/>
-            <a:endParaRPr lang="en-GB"/>
-          </a:p>
-        </p:txBody>
-      </p:sp>
-      <p:sp>
-        <p:nvSpPr>
-          <p:cNvPr id="10" name="sketch line">
-            <a:extLst>
-              <a:ext uri="{FF2B5EF4-FFF2-40B4-BE49-F238E27FC236}">
-                <a16:creationId xmlns:a16="http://schemas.microsoft.com/office/drawing/2014/main" id="{DA542B6D-E775-4832-91DC-2D20F857813A}"/>
-              </a:ext>
-              <a:ext uri="{C183D7F6-B498-43B3-948B-1728B52AA6E4}">
-                <adec:decorative xmlns:adec="http://schemas.microsoft.com/office/drawing/2017/decorative" val="1"/>
-              </a:ext>
-            </a:extLst>
-          </p:cNvPr>
-          <p:cNvSpPr>
-            <a:spLocks noGrp="1" noRot="1" noChangeAspect="1" noMove="1" noResize="1" noEditPoints="1" noAdjustHandles="1" noChangeArrowheads="1" noChangeShapeType="1" noTextEdit="1"/>
-          </p:cNvSpPr>
-          <p:nvPr>
-            <p:extLst>
-              <p:ext uri="{386F3935-93C4-4BCD-93E2-E3B085C9AB24}">
-                <p16:designElem xmlns:p16="http://schemas.microsoft.com/office/powerpoint/2015/main" val="1"/>
-              </p:ext>
-            </p:extLst>
-          </p:nvPr>
-        </p:nvSpPr>
-        <p:spPr>
-          <a:xfrm>
-            <a:off x="838200" y="4718595"/>
-            <a:ext cx="5410200" cy="18288"/>
-          </a:xfrm>
-          <a:custGeom>
-            <a:avLst/>
-            <a:gdLst>
-              <a:gd name="connsiteX0" fmla="*/ 0 w 5410200"/>
-              <a:gd name="connsiteY0" fmla="*/ 0 h 18288"/>
-              <a:gd name="connsiteX1" fmla="*/ 568071 w 5410200"/>
-              <a:gd name="connsiteY1" fmla="*/ 0 h 18288"/>
-              <a:gd name="connsiteX2" fmla="*/ 1298448 w 5410200"/>
-              <a:gd name="connsiteY2" fmla="*/ 0 h 18288"/>
-              <a:gd name="connsiteX3" fmla="*/ 1920621 w 5410200"/>
-              <a:gd name="connsiteY3" fmla="*/ 0 h 18288"/>
-              <a:gd name="connsiteX4" fmla="*/ 2488692 w 5410200"/>
-              <a:gd name="connsiteY4" fmla="*/ 0 h 18288"/>
-              <a:gd name="connsiteX5" fmla="*/ 3219069 w 5410200"/>
-              <a:gd name="connsiteY5" fmla="*/ 0 h 18288"/>
-              <a:gd name="connsiteX6" fmla="*/ 3895344 w 5410200"/>
-              <a:gd name="connsiteY6" fmla="*/ 0 h 18288"/>
-              <a:gd name="connsiteX7" fmla="*/ 4571619 w 5410200"/>
-              <a:gd name="connsiteY7" fmla="*/ 0 h 18288"/>
-              <a:gd name="connsiteX8" fmla="*/ 5410200 w 5410200"/>
-              <a:gd name="connsiteY8" fmla="*/ 0 h 18288"/>
-              <a:gd name="connsiteX9" fmla="*/ 5410200 w 5410200"/>
-              <a:gd name="connsiteY9" fmla="*/ 18288 h 18288"/>
-              <a:gd name="connsiteX10" fmla="*/ 4842129 w 5410200"/>
-              <a:gd name="connsiteY10" fmla="*/ 18288 h 18288"/>
-              <a:gd name="connsiteX11" fmla="*/ 4328160 w 5410200"/>
-              <a:gd name="connsiteY11" fmla="*/ 18288 h 18288"/>
-              <a:gd name="connsiteX12" fmla="*/ 3597783 w 5410200"/>
-              <a:gd name="connsiteY12" fmla="*/ 18288 h 18288"/>
-              <a:gd name="connsiteX13" fmla="*/ 3029712 w 5410200"/>
-              <a:gd name="connsiteY13" fmla="*/ 18288 h 18288"/>
-              <a:gd name="connsiteX14" fmla="*/ 2299335 w 5410200"/>
-              <a:gd name="connsiteY14" fmla="*/ 18288 h 18288"/>
-              <a:gd name="connsiteX15" fmla="*/ 1514856 w 5410200"/>
-              <a:gd name="connsiteY15" fmla="*/ 18288 h 18288"/>
-              <a:gd name="connsiteX16" fmla="*/ 892683 w 5410200"/>
-              <a:gd name="connsiteY16" fmla="*/ 18288 h 18288"/>
-              <a:gd name="connsiteX17" fmla="*/ 0 w 5410200"/>
-              <a:gd name="connsiteY17" fmla="*/ 18288 h 18288"/>
-              <a:gd name="connsiteX18" fmla="*/ 0 w 5410200"/>
-              <a:gd name="connsiteY18" fmla="*/ 0 h 18288"/>
-            </a:gdLst>
-            <a:ahLst/>
-            <a:cxnLst>
-              <a:cxn ang="0">
-                <a:pos x="connsiteX0" y="connsiteY0"/>
-              </a:cxn>
-              <a:cxn ang="0">
-                <a:pos x="connsiteX1" y="connsiteY1"/>
-              </a:cxn>
-              <a:cxn ang="0">
-                <a:pos x="connsiteX2" y="connsiteY2"/>
-              </a:cxn>
-              <a:cxn ang="0">
-                <a:pos x="connsiteX3" y="connsiteY3"/>
-              </a:cxn>
-              <a:cxn ang="0">
-                <a:pos x="connsiteX4" y="connsiteY4"/>
-              </a:cxn>
-              <a:cxn ang="0">
-                <a:pos x="connsiteX5" y="connsiteY5"/>
-              </a:cxn>
-              <a:cxn ang="0">
-                <a:pos x="connsiteX6" y="connsiteY6"/>
-              </a:cxn>
-              <a:cxn ang="0">
-                <a:pos x="connsiteX7" y="connsiteY7"/>
-              </a:cxn>
-              <a:cxn ang="0">
-                <a:pos x="connsiteX8" y="connsiteY8"/>
-              </a:cxn>
-              <a:cxn ang="0">
-                <a:pos x="connsiteX9" y="connsiteY9"/>
-              </a:cxn>
-              <a:cxn ang="0">
-                <a:pos x="connsiteX10" y="connsiteY10"/>
-              </a:cxn>
-              <a:cxn ang="0">
-                <a:pos x="connsiteX11" y="connsiteY11"/>
-              </a:cxn>
-              <a:cxn ang="0">
-                <a:pos x="connsiteX12" y="connsiteY12"/>
-              </a:cxn>
-              <a:cxn ang="0">
-                <a:pos x="connsiteX13" y="connsiteY13"/>
-              </a:cxn>
-              <a:cxn ang="0">
-                <a:pos x="connsiteX14" y="connsiteY14"/>
-              </a:cxn>
-              <a:cxn ang="0">
-                <a:pos x="connsiteX15" y="connsiteY15"/>
-              </a:cxn>
-              <a:cxn ang="0">
-                <a:pos x="connsiteX16" y="connsiteY16"/>
-              </a:cxn>
-              <a:cxn ang="0">
-                <a:pos x="connsiteX17" y="connsiteY17"/>
-              </a:cxn>
-              <a:cxn ang="0">
-                <a:pos x="connsiteX18" y="connsiteY18"/>
-              </a:cxn>
-            </a:cxnLst>
-            <a:rect l="l" t="t" r="r" b="b"/>
-            <a:pathLst>
-              <a:path w="5410200" h="18288" fill="none" extrusionOk="0">
-                <a:moveTo>
-                  <a:pt x="0" y="0"/>
-                </a:moveTo>
-                <a:cubicBezTo>
-                  <a:pt x="163050" y="-18707"/>
-                  <a:pt x="319321" y="-16364"/>
-                  <a:pt x="568071" y="0"/>
-                </a:cubicBezTo>
-                <a:cubicBezTo>
-                  <a:pt x="816821" y="16364"/>
-                  <a:pt x="1013224" y="-7268"/>
-                  <a:pt x="1298448" y="0"/>
-                </a:cubicBezTo>
-                <a:cubicBezTo>
-                  <a:pt x="1583672" y="7268"/>
-                  <a:pt x="1631711" y="-3367"/>
-                  <a:pt x="1920621" y="0"/>
-                </a:cubicBezTo>
-                <a:cubicBezTo>
-                  <a:pt x="2209531" y="3367"/>
-                  <a:pt x="2364420" y="-19184"/>
-                  <a:pt x="2488692" y="0"/>
-                </a:cubicBezTo>
-                <a:cubicBezTo>
-                  <a:pt x="2612964" y="19184"/>
-                  <a:pt x="3023298" y="-34627"/>
-                  <a:pt x="3219069" y="0"/>
-                </a:cubicBezTo>
-                <a:cubicBezTo>
-                  <a:pt x="3414840" y="34627"/>
-                  <a:pt x="3656810" y="24043"/>
-                  <a:pt x="3895344" y="0"/>
-                </a:cubicBezTo>
-                <a:cubicBezTo>
-                  <a:pt x="4133879" y="-24043"/>
-                  <a:pt x="4393984" y="-19577"/>
-                  <a:pt x="4571619" y="0"/>
-                </a:cubicBezTo>
-                <a:cubicBezTo>
-                  <a:pt x="4749255" y="19577"/>
-                  <a:pt x="5179928" y="-6281"/>
-                  <a:pt x="5410200" y="0"/>
-                </a:cubicBezTo>
-                <a:cubicBezTo>
-                  <a:pt x="5410730" y="6954"/>
-                  <a:pt x="5410934" y="12839"/>
-                  <a:pt x="5410200" y="18288"/>
-                </a:cubicBezTo>
-                <a:cubicBezTo>
-                  <a:pt x="5139060" y="6751"/>
-                  <a:pt x="5121593" y="31035"/>
-                  <a:pt x="4842129" y="18288"/>
-                </a:cubicBezTo>
-                <a:cubicBezTo>
-                  <a:pt x="4562665" y="5541"/>
-                  <a:pt x="4448273" y="9487"/>
-                  <a:pt x="4328160" y="18288"/>
-                </a:cubicBezTo>
-                <a:cubicBezTo>
-                  <a:pt x="4208047" y="27089"/>
-                  <a:pt x="3760936" y="22567"/>
-                  <a:pt x="3597783" y="18288"/>
-                </a:cubicBezTo>
-                <a:cubicBezTo>
-                  <a:pt x="3434630" y="14009"/>
-                  <a:pt x="3299718" y="33213"/>
-                  <a:pt x="3029712" y="18288"/>
-                </a:cubicBezTo>
-                <a:cubicBezTo>
-                  <a:pt x="2759706" y="3363"/>
-                  <a:pt x="2640159" y="27394"/>
-                  <a:pt x="2299335" y="18288"/>
-                </a:cubicBezTo>
-                <a:cubicBezTo>
-                  <a:pt x="1958511" y="9182"/>
-                  <a:pt x="1801186" y="28985"/>
-                  <a:pt x="1514856" y="18288"/>
-                </a:cubicBezTo>
-                <a:cubicBezTo>
-                  <a:pt x="1228526" y="7591"/>
-                  <a:pt x="1063509" y="-5305"/>
-                  <a:pt x="892683" y="18288"/>
-                </a:cubicBezTo>
-                <a:cubicBezTo>
-                  <a:pt x="721857" y="41881"/>
-                  <a:pt x="186945" y="-20897"/>
-                  <a:pt x="0" y="18288"/>
-                </a:cubicBezTo>
-                <a:cubicBezTo>
-                  <a:pt x="-570" y="9279"/>
-                  <a:pt x="132" y="5100"/>
-                  <a:pt x="0" y="0"/>
-                </a:cubicBezTo>
-                <a:close/>
-              </a:path>
-              <a:path w="5410200" h="18288" stroke="0" extrusionOk="0">
-                <a:moveTo>
-                  <a:pt x="0" y="0"/>
-                </a:moveTo>
-                <a:cubicBezTo>
-                  <a:pt x="285096" y="-4925"/>
-                  <a:pt x="376456" y="22268"/>
-                  <a:pt x="622173" y="0"/>
-                </a:cubicBezTo>
-                <a:cubicBezTo>
-                  <a:pt x="867890" y="-22268"/>
-                  <a:pt x="1031392" y="7228"/>
-                  <a:pt x="1136142" y="0"/>
-                </a:cubicBezTo>
-                <a:cubicBezTo>
-                  <a:pt x="1240892" y="-7228"/>
-                  <a:pt x="1561853" y="9877"/>
-                  <a:pt x="1920621" y="0"/>
-                </a:cubicBezTo>
-                <a:cubicBezTo>
-                  <a:pt x="2279389" y="-9877"/>
-                  <a:pt x="2367255" y="19546"/>
-                  <a:pt x="2542794" y="0"/>
-                </a:cubicBezTo>
-                <a:cubicBezTo>
-                  <a:pt x="2718333" y="-19546"/>
-                  <a:pt x="2866732" y="-22226"/>
-                  <a:pt x="3164967" y="0"/>
-                </a:cubicBezTo>
-                <a:cubicBezTo>
-                  <a:pt x="3463202" y="22226"/>
-                  <a:pt x="3568055" y="-2765"/>
-                  <a:pt x="3949446" y="0"/>
-                </a:cubicBezTo>
-                <a:cubicBezTo>
-                  <a:pt x="4330837" y="2765"/>
-                  <a:pt x="4287895" y="10557"/>
-                  <a:pt x="4517517" y="0"/>
-                </a:cubicBezTo>
-                <a:cubicBezTo>
-                  <a:pt x="4747139" y="-10557"/>
-                  <a:pt x="5149588" y="8716"/>
-                  <a:pt x="5410200" y="0"/>
-                </a:cubicBezTo>
-                <a:cubicBezTo>
-                  <a:pt x="5409517" y="5414"/>
-                  <a:pt x="5409480" y="12510"/>
-                  <a:pt x="5410200" y="18288"/>
-                </a:cubicBezTo>
-                <a:cubicBezTo>
-                  <a:pt x="5163327" y="41494"/>
-                  <a:pt x="5008749" y="10693"/>
-                  <a:pt x="4842129" y="18288"/>
-                </a:cubicBezTo>
-                <a:cubicBezTo>
-                  <a:pt x="4675509" y="25883"/>
-                  <a:pt x="4433401" y="-615"/>
-                  <a:pt x="4165854" y="18288"/>
-                </a:cubicBezTo>
-                <a:cubicBezTo>
-                  <a:pt x="3898308" y="37191"/>
-                  <a:pt x="3809032" y="-8710"/>
-                  <a:pt x="3543681" y="18288"/>
-                </a:cubicBezTo>
-                <a:cubicBezTo>
-                  <a:pt x="3278330" y="45286"/>
-                  <a:pt x="3073876" y="-15917"/>
-                  <a:pt x="2759202" y="18288"/>
-                </a:cubicBezTo>
-                <a:cubicBezTo>
-                  <a:pt x="2444528" y="52493"/>
-                  <a:pt x="2204144" y="3372"/>
-                  <a:pt x="1974723" y="18288"/>
-                </a:cubicBezTo>
-                <a:cubicBezTo>
-                  <a:pt x="1745302" y="33204"/>
-                  <a:pt x="1602335" y="31490"/>
-                  <a:pt x="1406652" y="18288"/>
-                </a:cubicBezTo>
-                <a:cubicBezTo>
-                  <a:pt x="1210969" y="5086"/>
-                  <a:pt x="923948" y="3161"/>
-                  <a:pt x="730377" y="18288"/>
-                </a:cubicBezTo>
-                <a:cubicBezTo>
-                  <a:pt x="536806" y="33415"/>
-                  <a:pt x="336496" y="-141"/>
-                  <a:pt x="0" y="18288"/>
-                </a:cubicBezTo>
-                <a:cubicBezTo>
-                  <a:pt x="-306" y="11061"/>
-                  <a:pt x="-655" y="7751"/>
-                  <a:pt x="0" y="0"/>
-                </a:cubicBezTo>
-                <a:close/>
-              </a:path>
-            </a:pathLst>
-          </a:custGeom>
-          <a:solidFill>
-            <a:schemeClr val="accent2"/>
-          </a:solidFill>
-          <a:ln w="41275" cap="rnd">
-            <a:solidFill>
-              <a:schemeClr val="accent2"/>
-            </a:solidFill>
-            <a:round/>
-            <a:extLst>
-              <a:ext uri="{C807C97D-BFC1-408E-A445-0C87EB9F89A2}">
-                <ask:lineSketchStyleProps xmlns:ask="http://schemas.microsoft.com/office/drawing/2018/sketchyshapes" sd="1219033472">
-                  <a:prstGeom prst="rect">
-                    <a:avLst/>
-                  </a:prstGeom>
-                  <ask:type>
-                    <ask:lineSketchFreehand/>
-                  </ask:type>
-                </ask:lineSketchStyleProps>
-              </a:ext>
-            </a:extLst>
-          </a:ln>
-        </p:spPr>
-        <p:style>
-          <a:lnRef idx="2">
-            <a:schemeClr val="accent1">
-              <a:shade val="50000"/>
-            </a:schemeClr>
-          </a:lnRef>
-          <a:fillRef idx="1">
-            <a:schemeClr val="accent1"/>
-          </a:fillRef>
-          <a:effectRef idx="0">
-            <a:schemeClr val="accent1"/>
-          </a:effectRef>
-          <a:fontRef idx="minor">
-            <a:schemeClr val="lt1"/>
-          </a:fontRef>
-        </p:style>
-        <p:txBody>
-          <a:bodyPr rtlCol="0" anchor="ctr"/>
-          <a:lstStyle/>
-          <a:p>
-            <a:pPr algn="ctr"/>
-            <a:endParaRPr lang="en-US"/>
-          </a:p>
-        </p:txBody>
-      </p:sp>
-    </p:spTree>
-    <p:extLst>
-      <p:ext uri="{BB962C8B-B14F-4D97-AF65-F5344CB8AC3E}">
-        <p14:creationId xmlns:p14="http://schemas.microsoft.com/office/powerpoint/2010/main" val="2291715726"/>
-      </p:ext>
-    </p:extLst>
-  </p:cSld>
-  <p:clrMapOvr>
-    <a:masterClrMapping/>
-  </p:clrMapOvr>
-</p:sld>
-</file>
-
-<file path=ppt/slides/slide12.xml><?xml version="1.0" encoding="utf-8"?>
-<p:sld xmlns:a="http://schemas.openxmlformats.org/drawingml/2006/main" xmlns:r="http://schemas.openxmlformats.org/officeDocument/2006/relationships" xmlns:p="http://schemas.openxmlformats.org/presentationml/2006/main">
-  <p:cSld>
-    <p:bg>
-      <p:bgPr>
-        <a:solidFill>
-          <a:schemeClr val="bg1"/>
-        </a:solidFill>
-        <a:effectLst/>
-      </p:bgPr>
-    </p:bg>
-    <p:spTree>
-      <p:nvGrpSpPr>
-        <p:cNvPr id="1" name=""/>
-        <p:cNvGrpSpPr/>
-        <p:nvPr/>
-      </p:nvGrpSpPr>
-      <p:grpSpPr>
-        <a:xfrm>
-          <a:off x="0" y="0"/>
-          <a:ext cx="0" cy="0"/>
-          <a:chOff x="0" y="0"/>
-          <a:chExt cx="0" cy="0"/>
-        </a:xfrm>
-      </p:grpSpPr>
-      <p:sp useBgFill="1">
-        <p:nvSpPr>
-          <p:cNvPr id="17" name="Rectangle 16">
-            <a:extLst>
-              <a:ext uri="{FF2B5EF4-FFF2-40B4-BE49-F238E27FC236}">
-                <a16:creationId xmlns:a16="http://schemas.microsoft.com/office/drawing/2014/main" id="{743AA782-23D1-4521-8CAD-47662984AA08}"/>
-              </a:ext>
-              <a:ext uri="{C183D7F6-B498-43B3-948B-1728B52AA6E4}">
-                <adec:decorative xmlns:adec="http://schemas.microsoft.com/office/drawing/2017/decorative" val="1"/>
-              </a:ext>
-            </a:extLst>
-          </p:cNvPr>
-          <p:cNvSpPr>
-            <a:spLocks noGrp="1" noRot="1" noChangeAspect="1" noMove="1" noResize="1" noEditPoints="1" noAdjustHandles="1" noChangeArrowheads="1" noChangeShapeType="1" noTextEdit="1"/>
-          </p:cNvSpPr>
-          <p:nvPr>
-            <p:extLst>
-              <p:ext uri="{386F3935-93C4-4BCD-93E2-E3B085C9AB24}">
-                <p16:designElem xmlns:p16="http://schemas.microsoft.com/office/powerpoint/2015/main" val="1"/>
-              </p:ext>
-            </p:extLst>
-          </p:nvPr>
-        </p:nvSpPr>
-        <p:spPr>
-          <a:xfrm>
-            <a:off x="0" y="0"/>
-            <a:ext cx="12192000" cy="6858000"/>
-          </a:xfrm>
-          <a:prstGeom prst="rect">
-            <a:avLst/>
-          </a:prstGeom>
-          <a:ln>
-            <a:noFill/>
-          </a:ln>
-        </p:spPr>
-        <p:style>
-          <a:lnRef idx="2">
-            <a:schemeClr val="accent1">
-              <a:shade val="50000"/>
-            </a:schemeClr>
-          </a:lnRef>
-          <a:fillRef idx="1">
-            <a:schemeClr val="accent1"/>
-          </a:fillRef>
-          <a:effectRef idx="0">
-            <a:schemeClr val="accent1"/>
-          </a:effectRef>
-          <a:fontRef idx="minor">
-            <a:schemeClr val="lt1"/>
-          </a:fontRef>
-        </p:style>
-        <p:txBody>
-          <a:bodyPr rtlCol="0" anchor="ctr"/>
-          <a:lstStyle/>
-          <a:p>
-            <a:pPr algn="ctr"/>
-            <a:endParaRPr lang="en-US"/>
-          </a:p>
-        </p:txBody>
-      </p:sp>
-      <p:sp>
-        <p:nvSpPr>
-          <p:cNvPr id="2" name="Title 1">
-            <a:extLst>
-              <a:ext uri="{FF2B5EF4-FFF2-40B4-BE49-F238E27FC236}">
-                <a16:creationId xmlns:a16="http://schemas.microsoft.com/office/drawing/2014/main" id="{EA9C18A6-E59B-45E5-1E6A-DB5EC373EDE2}"/>
-              </a:ext>
-            </a:extLst>
-          </p:cNvPr>
-          <p:cNvSpPr>
-            <a:spLocks noGrp="1"/>
-          </p:cNvSpPr>
-          <p:nvPr>
-            <p:ph type="title"/>
-          </p:nvPr>
-        </p:nvSpPr>
-        <p:spPr>
-          <a:xfrm>
-            <a:off x="630936" y="640080"/>
-            <a:ext cx="4818888" cy="1481328"/>
-          </a:xfrm>
-        </p:spPr>
-        <p:txBody>
-          <a:bodyPr anchor="b">
-            <a:normAutofit/>
-          </a:bodyPr>
-          <a:lstStyle/>
-          <a:p>
-            <a:r>
-              <a:rPr lang="en-GB" sz="5000" dirty="0"/>
-              <a:t>Functionality- languages</a:t>
-            </a:r>
-          </a:p>
-        </p:txBody>
-      </p:sp>
-      <p:sp>
-        <p:nvSpPr>
-          <p:cNvPr id="19" name="sketch line">
-            <a:extLst>
-              <a:ext uri="{FF2B5EF4-FFF2-40B4-BE49-F238E27FC236}">
-                <a16:creationId xmlns:a16="http://schemas.microsoft.com/office/drawing/2014/main" id="{71877DBC-BB60-40F0-AC93-2ACDBAAE60CE}"/>
-              </a:ext>
-              <a:ext uri="{C183D7F6-B498-43B3-948B-1728B52AA6E4}">
-                <adec:decorative xmlns:adec="http://schemas.microsoft.com/office/drawing/2017/decorative" val="1"/>
-              </a:ext>
-            </a:extLst>
-          </p:cNvPr>
-          <p:cNvSpPr>
-            <a:spLocks noGrp="1" noRot="1" noChangeAspect="1" noMove="1" noResize="1" noEditPoints="1" noAdjustHandles="1" noChangeArrowheads="1" noChangeShapeType="1" noTextEdit="1"/>
-          </p:cNvSpPr>
-          <p:nvPr>
-            <p:extLst>
-              <p:ext uri="{386F3935-93C4-4BCD-93E2-E3B085C9AB24}">
-                <p16:designElem xmlns:p16="http://schemas.microsoft.com/office/powerpoint/2015/main" val="1"/>
-              </p:ext>
-            </p:extLst>
-          </p:nvPr>
-        </p:nvSpPr>
-        <p:spPr>
-          <a:xfrm>
-            <a:off x="643278" y="2372868"/>
-            <a:ext cx="3255095" cy="18288"/>
-          </a:xfrm>
-          <a:custGeom>
-            <a:avLst/>
-            <a:gdLst>
-              <a:gd name="connsiteX0" fmla="*/ 0 w 3255095"/>
-              <a:gd name="connsiteY0" fmla="*/ 0 h 18288"/>
-              <a:gd name="connsiteX1" fmla="*/ 618468 w 3255095"/>
-              <a:gd name="connsiteY1" fmla="*/ 0 h 18288"/>
-              <a:gd name="connsiteX2" fmla="*/ 1269487 w 3255095"/>
-              <a:gd name="connsiteY2" fmla="*/ 0 h 18288"/>
-              <a:gd name="connsiteX3" fmla="*/ 1953057 w 3255095"/>
-              <a:gd name="connsiteY3" fmla="*/ 0 h 18288"/>
-              <a:gd name="connsiteX4" fmla="*/ 2636627 w 3255095"/>
-              <a:gd name="connsiteY4" fmla="*/ 0 h 18288"/>
-              <a:gd name="connsiteX5" fmla="*/ 3255095 w 3255095"/>
-              <a:gd name="connsiteY5" fmla="*/ 0 h 18288"/>
-              <a:gd name="connsiteX6" fmla="*/ 3255095 w 3255095"/>
-              <a:gd name="connsiteY6" fmla="*/ 18288 h 18288"/>
-              <a:gd name="connsiteX7" fmla="*/ 2538974 w 3255095"/>
-              <a:gd name="connsiteY7" fmla="*/ 18288 h 18288"/>
-              <a:gd name="connsiteX8" fmla="*/ 1822853 w 3255095"/>
-              <a:gd name="connsiteY8" fmla="*/ 18288 h 18288"/>
-              <a:gd name="connsiteX9" fmla="*/ 1171834 w 3255095"/>
-              <a:gd name="connsiteY9" fmla="*/ 18288 h 18288"/>
-              <a:gd name="connsiteX10" fmla="*/ 0 w 3255095"/>
-              <a:gd name="connsiteY10" fmla="*/ 18288 h 18288"/>
-              <a:gd name="connsiteX11" fmla="*/ 0 w 3255095"/>
-              <a:gd name="connsiteY11" fmla="*/ 0 h 18288"/>
-            </a:gdLst>
-            <a:ahLst/>
-            <a:cxnLst>
-              <a:cxn ang="0">
-                <a:pos x="connsiteX0" y="connsiteY0"/>
-              </a:cxn>
-              <a:cxn ang="0">
-                <a:pos x="connsiteX1" y="connsiteY1"/>
-              </a:cxn>
-              <a:cxn ang="0">
-                <a:pos x="connsiteX2" y="connsiteY2"/>
-              </a:cxn>
-              <a:cxn ang="0">
-                <a:pos x="connsiteX3" y="connsiteY3"/>
-              </a:cxn>
-              <a:cxn ang="0">
-                <a:pos x="connsiteX4" y="connsiteY4"/>
-              </a:cxn>
-              <a:cxn ang="0">
-                <a:pos x="connsiteX5" y="connsiteY5"/>
-              </a:cxn>
-              <a:cxn ang="0">
-                <a:pos x="connsiteX6" y="connsiteY6"/>
-              </a:cxn>
-              <a:cxn ang="0">
-                <a:pos x="connsiteX7" y="connsiteY7"/>
-              </a:cxn>
-              <a:cxn ang="0">
-                <a:pos x="connsiteX8" y="connsiteY8"/>
-              </a:cxn>
-              <a:cxn ang="0">
-                <a:pos x="connsiteX9" y="connsiteY9"/>
-              </a:cxn>
-              <a:cxn ang="0">
-                <a:pos x="connsiteX10" y="connsiteY10"/>
-              </a:cxn>
-              <a:cxn ang="0">
-                <a:pos x="connsiteX11" y="connsiteY11"/>
-              </a:cxn>
-            </a:cxnLst>
-            <a:rect l="l" t="t" r="r" b="b"/>
-            <a:pathLst>
-              <a:path w="3255095" h="18288" fill="none" extrusionOk="0">
-                <a:moveTo>
-                  <a:pt x="0" y="0"/>
-                </a:moveTo>
-                <a:cubicBezTo>
-                  <a:pt x="240201" y="-22123"/>
-                  <a:pt x="462021" y="-19623"/>
-                  <a:pt x="618468" y="0"/>
-                </a:cubicBezTo>
-                <a:cubicBezTo>
-                  <a:pt x="774915" y="19623"/>
-                  <a:pt x="974734" y="2035"/>
-                  <a:pt x="1269487" y="0"/>
-                </a:cubicBezTo>
-                <a:cubicBezTo>
-                  <a:pt x="1564240" y="-2035"/>
-                  <a:pt x="1733579" y="10639"/>
-                  <a:pt x="1953057" y="0"/>
-                </a:cubicBezTo>
-                <a:cubicBezTo>
-                  <a:pt x="2172535" y="-10639"/>
-                  <a:pt x="2453962" y="14018"/>
-                  <a:pt x="2636627" y="0"/>
-                </a:cubicBezTo>
-                <a:cubicBezTo>
-                  <a:pt x="2819292" y="-14018"/>
-                  <a:pt x="3121375" y="5399"/>
-                  <a:pt x="3255095" y="0"/>
-                </a:cubicBezTo>
-                <a:cubicBezTo>
-                  <a:pt x="3254386" y="8157"/>
-                  <a:pt x="3254682" y="12125"/>
-                  <a:pt x="3255095" y="18288"/>
-                </a:cubicBezTo>
-                <a:cubicBezTo>
-                  <a:pt x="3088545" y="23203"/>
-                  <a:pt x="2687475" y="7419"/>
-                  <a:pt x="2538974" y="18288"/>
-                </a:cubicBezTo>
-                <a:cubicBezTo>
-                  <a:pt x="2390473" y="29157"/>
-                  <a:pt x="2137381" y="-8959"/>
-                  <a:pt x="1822853" y="18288"/>
-                </a:cubicBezTo>
-                <a:cubicBezTo>
-                  <a:pt x="1508325" y="45535"/>
-                  <a:pt x="1466437" y="20385"/>
-                  <a:pt x="1171834" y="18288"/>
-                </a:cubicBezTo>
-                <a:cubicBezTo>
-                  <a:pt x="877231" y="16191"/>
-                  <a:pt x="561097" y="37643"/>
-                  <a:pt x="0" y="18288"/>
-                </a:cubicBezTo>
-                <a:cubicBezTo>
-                  <a:pt x="-46" y="12483"/>
-                  <a:pt x="-203" y="6491"/>
-                  <a:pt x="0" y="0"/>
-                </a:cubicBezTo>
-                <a:close/>
-              </a:path>
-              <a:path w="3255095" h="18288" stroke="0" extrusionOk="0">
-                <a:moveTo>
-                  <a:pt x="0" y="0"/>
-                </a:moveTo>
-                <a:cubicBezTo>
-                  <a:pt x="291965" y="19429"/>
-                  <a:pt x="363155" y="8568"/>
-                  <a:pt x="618468" y="0"/>
-                </a:cubicBezTo>
-                <a:cubicBezTo>
-                  <a:pt x="873781" y="-8568"/>
-                  <a:pt x="904459" y="-19505"/>
-                  <a:pt x="1171834" y="0"/>
-                </a:cubicBezTo>
-                <a:cubicBezTo>
-                  <a:pt x="1439209" y="19505"/>
-                  <a:pt x="1744369" y="9790"/>
-                  <a:pt x="1887955" y="0"/>
-                </a:cubicBezTo>
-                <a:cubicBezTo>
-                  <a:pt x="2031541" y="-9790"/>
-                  <a:pt x="2346378" y="21240"/>
-                  <a:pt x="2506423" y="0"/>
-                </a:cubicBezTo>
-                <a:cubicBezTo>
-                  <a:pt x="2666468" y="-21240"/>
-                  <a:pt x="2990257" y="30414"/>
-                  <a:pt x="3255095" y="0"/>
-                </a:cubicBezTo>
-                <a:cubicBezTo>
-                  <a:pt x="3254831" y="4493"/>
-                  <a:pt x="3255479" y="9472"/>
-                  <a:pt x="3255095" y="18288"/>
-                </a:cubicBezTo>
-                <a:cubicBezTo>
-                  <a:pt x="3120743" y="16690"/>
-                  <a:pt x="2759628" y="42462"/>
-                  <a:pt x="2604076" y="18288"/>
-                </a:cubicBezTo>
-                <a:cubicBezTo>
-                  <a:pt x="2448524" y="-5886"/>
-                  <a:pt x="2184336" y="19599"/>
-                  <a:pt x="1887955" y="18288"/>
-                </a:cubicBezTo>
-                <a:cubicBezTo>
-                  <a:pt x="1591574" y="16977"/>
-                  <a:pt x="1548845" y="6870"/>
-                  <a:pt x="1334589" y="18288"/>
-                </a:cubicBezTo>
-                <a:cubicBezTo>
-                  <a:pt x="1120333" y="29706"/>
-                  <a:pt x="996014" y="9662"/>
-                  <a:pt x="683570" y="18288"/>
-                </a:cubicBezTo>
-                <a:cubicBezTo>
-                  <a:pt x="371126" y="26914"/>
-                  <a:pt x="198687" y="16167"/>
-                  <a:pt x="0" y="18288"/>
-                </a:cubicBezTo>
-                <a:cubicBezTo>
-                  <a:pt x="843" y="9577"/>
-                  <a:pt x="371" y="6900"/>
-                  <a:pt x="0" y="0"/>
-                </a:cubicBezTo>
-                <a:close/>
-              </a:path>
-            </a:pathLst>
-          </a:custGeom>
-          <a:solidFill>
-            <a:schemeClr val="accent2"/>
-          </a:solidFill>
-          <a:ln w="38100" cap="rnd">
-            <a:solidFill>
-              <a:schemeClr val="accent2"/>
-            </a:solidFill>
-            <a:round/>
-            <a:extLst>
-              <a:ext uri="{C807C97D-BFC1-408E-A445-0C87EB9F89A2}">
-                <ask:lineSketchStyleProps xmlns:ask="http://schemas.microsoft.com/office/drawing/2018/sketchyshapes" sd="1219033472">
-                  <a:prstGeom prst="rect">
-                    <a:avLst/>
-                  </a:prstGeom>
-                  <ask:type>
-                    <ask:lineSketchFreehand/>
-                  </ask:type>
-                </ask:lineSketchStyleProps>
-              </a:ext>
-            </a:extLst>
-          </a:ln>
-        </p:spPr>
-        <p:style>
-          <a:lnRef idx="2">
-            <a:schemeClr val="accent1">
-              <a:shade val="50000"/>
-            </a:schemeClr>
-          </a:lnRef>
-          <a:fillRef idx="1">
-            <a:schemeClr val="accent1"/>
-          </a:fillRef>
-          <a:effectRef idx="0">
-            <a:schemeClr val="accent1"/>
-          </a:effectRef>
-          <a:fontRef idx="minor">
-            <a:schemeClr val="lt1"/>
-          </a:fontRef>
-        </p:style>
-        <p:txBody>
-          <a:bodyPr rtlCol="0" anchor="ctr"/>
-          <a:lstStyle/>
-          <a:p>
-            <a:pPr algn="ctr"/>
-            <a:endParaRPr lang="en-US"/>
-          </a:p>
-        </p:txBody>
-      </p:sp>
-      <p:sp>
-        <p:nvSpPr>
-          <p:cNvPr id="3" name="Content Placeholder 2">
-            <a:extLst>
-              <a:ext uri="{FF2B5EF4-FFF2-40B4-BE49-F238E27FC236}">
-                <a16:creationId xmlns:a16="http://schemas.microsoft.com/office/drawing/2014/main" id="{E4A01276-0890-3F4A-437A-85C3D6C51386}"/>
-              </a:ext>
-            </a:extLst>
-          </p:cNvPr>
-          <p:cNvSpPr>
-            <a:spLocks noGrp="1"/>
-          </p:cNvSpPr>
-          <p:nvPr>
-            <p:ph idx="1"/>
-          </p:nvPr>
-        </p:nvSpPr>
-        <p:spPr>
-          <a:xfrm>
-            <a:off x="630936" y="2660904"/>
-            <a:ext cx="4818888" cy="3547872"/>
-          </a:xfrm>
-        </p:spPr>
-        <p:txBody>
-          <a:bodyPr anchor="t">
-            <a:normAutofit/>
-          </a:bodyPr>
-          <a:lstStyle/>
-          <a:p>
-            <a:r>
-              <a:rPr lang="en-GB" sz="2200" dirty="0"/>
-              <a:t>Use of more than 1 coding language:</a:t>
-            </a:r>
-          </a:p>
-          <a:p>
-            <a:pPr lvl="1"/>
-            <a:r>
-              <a:rPr lang="en-GB" sz="2200" dirty="0"/>
-              <a:t>Used python for the backend data handling of the systems and SQLite 3 for creation of the database </a:t>
-            </a:r>
-            <a:r>
-              <a:rPr lang="en-GB" sz="2200" b="1" dirty="0"/>
-              <a:t>(example to the right)</a:t>
-            </a:r>
-          </a:p>
-          <a:p>
-            <a:pPr lvl="1"/>
-            <a:endParaRPr lang="en-GB" sz="2200" dirty="0"/>
-          </a:p>
-        </p:txBody>
-      </p:sp>
-      <p:pic>
-        <p:nvPicPr>
-          <p:cNvPr id="5" name="Picture 4">
-            <a:extLst>
-              <a:ext uri="{FF2B5EF4-FFF2-40B4-BE49-F238E27FC236}">
-                <a16:creationId xmlns:a16="http://schemas.microsoft.com/office/drawing/2014/main" id="{ED2218CC-AF9C-9FBD-7823-57911EFB90F7}"/>
-              </a:ext>
-            </a:extLst>
-          </p:cNvPr>
-          <p:cNvPicPr>
-            <a:picLocks noChangeAspect="1"/>
-          </p:cNvPicPr>
-          <p:nvPr/>
-        </p:nvPicPr>
-        <p:blipFill>
-          <a:blip r:embed="rId2"/>
-          <a:stretch>
-            <a:fillRect/>
-          </a:stretch>
-        </p:blipFill>
-        <p:spPr>
-          <a:xfrm>
-            <a:off x="5513853" y="917936"/>
-            <a:ext cx="6548314" cy="5290840"/>
-          </a:xfrm>
-          <a:prstGeom prst="rect">
-            <a:avLst/>
-          </a:prstGeom>
-        </p:spPr>
-      </p:pic>
-    </p:spTree>
-    <p:extLst>
-      <p:ext uri="{BB962C8B-B14F-4D97-AF65-F5344CB8AC3E}">
-        <p14:creationId xmlns:p14="http://schemas.microsoft.com/office/powerpoint/2010/main" val="3683785424"/>
-      </p:ext>
-    </p:extLst>
-  </p:cSld>
-  <p:clrMapOvr>
-    <a:masterClrMapping/>
-  </p:clrMapOvr>
-</p:sld>
-</file>
-
-<file path=ppt/slides/slide13.xml><?xml version="1.0" encoding="utf-8"?>
-<p:sld xmlns:a="http://schemas.openxmlformats.org/drawingml/2006/main" xmlns:r="http://schemas.openxmlformats.org/officeDocument/2006/relationships" xmlns:p="http://schemas.openxmlformats.org/presentationml/2006/main">
-  <p:cSld>
-    <p:bg>
-      <p:bgPr>
-        <a:solidFill>
-          <a:schemeClr val="bg1"/>
-        </a:solidFill>
-        <a:effectLst/>
-      </p:bgPr>
-    </p:bg>
-    <p:spTree>
-      <p:nvGrpSpPr>
-        <p:cNvPr id="1" name="">
-          <a:extLst>
-            <a:ext uri="{FF2B5EF4-FFF2-40B4-BE49-F238E27FC236}">
-              <a16:creationId xmlns:a16="http://schemas.microsoft.com/office/drawing/2014/main" id="{3BCA0FE0-3E87-DF80-81AA-B58DD9EBEE8B}"/>
-            </a:ext>
-          </a:extLst>
-        </p:cNvPr>
-        <p:cNvGrpSpPr/>
-        <p:nvPr/>
-      </p:nvGrpSpPr>
-      <p:grpSpPr>
-        <a:xfrm>
-          <a:off x="0" y="0"/>
-          <a:ext cx="0" cy="0"/>
-          <a:chOff x="0" y="0"/>
-          <a:chExt cx="0" cy="0"/>
-        </a:xfrm>
-      </p:grpSpPr>
-      <p:sp useBgFill="1">
-        <p:nvSpPr>
-          <p:cNvPr id="13" name="Rectangle 12">
-            <a:extLst>
-              <a:ext uri="{FF2B5EF4-FFF2-40B4-BE49-F238E27FC236}">
-                <a16:creationId xmlns:a16="http://schemas.microsoft.com/office/drawing/2014/main" id="{352BEC0E-22F8-46D0-9632-375DB541B06C}"/>
-              </a:ext>
-              <a:ext uri="{C183D7F6-B498-43B3-948B-1728B52AA6E4}">
-                <adec:decorative xmlns:adec="http://schemas.microsoft.com/office/drawing/2017/decorative" val="1"/>
-              </a:ext>
-            </a:extLst>
-          </p:cNvPr>
-          <p:cNvSpPr>
-            <a:spLocks noGrp="1" noRot="1" noChangeAspect="1" noMove="1" noResize="1" noEditPoints="1" noAdjustHandles="1" noChangeArrowheads="1" noChangeShapeType="1" noTextEdit="1"/>
-          </p:cNvSpPr>
-          <p:nvPr>
-            <p:extLst>
-              <p:ext uri="{386F3935-93C4-4BCD-93E2-E3B085C9AB24}">
-                <p16:designElem xmlns:p16="http://schemas.microsoft.com/office/powerpoint/2015/main" val="1"/>
-              </p:ext>
-            </p:extLst>
-          </p:nvPr>
-        </p:nvSpPr>
-        <p:spPr>
-          <a:xfrm>
-            <a:off x="0" y="0"/>
-            <a:ext cx="12188952" cy="6858000"/>
-          </a:xfrm>
-          <a:prstGeom prst="rect">
-            <a:avLst/>
-          </a:prstGeom>
-          <a:ln>
-            <a:noFill/>
-          </a:ln>
-        </p:spPr>
-        <p:style>
-          <a:lnRef idx="2">
-            <a:schemeClr val="accent1">
-              <a:shade val="50000"/>
-            </a:schemeClr>
-          </a:lnRef>
-          <a:fillRef idx="1">
-            <a:schemeClr val="accent1"/>
-          </a:fillRef>
-          <a:effectRef idx="0">
-            <a:schemeClr val="accent1"/>
-          </a:effectRef>
-          <a:fontRef idx="minor">
-            <a:schemeClr val="lt1"/>
-          </a:fontRef>
-        </p:style>
-        <p:txBody>
-          <a:bodyPr rtlCol="0" anchor="ctr"/>
-          <a:lstStyle/>
-          <a:p>
-            <a:pPr algn="ctr"/>
-            <a:endParaRPr lang="en-US"/>
-          </a:p>
-        </p:txBody>
-      </p:sp>
-      <p:sp>
-        <p:nvSpPr>
-          <p:cNvPr id="2" name="Title 1">
-            <a:extLst>
-              <a:ext uri="{FF2B5EF4-FFF2-40B4-BE49-F238E27FC236}">
-                <a16:creationId xmlns:a16="http://schemas.microsoft.com/office/drawing/2014/main" id="{411D0D81-BB80-A4CD-A652-EE88E71CFAB3}"/>
-              </a:ext>
-            </a:extLst>
-          </p:cNvPr>
-          <p:cNvSpPr>
-            <a:spLocks noGrp="1"/>
-          </p:cNvSpPr>
-          <p:nvPr>
-            <p:ph type="title"/>
-          </p:nvPr>
-        </p:nvSpPr>
-        <p:spPr>
-          <a:xfrm>
-            <a:off x="640080" y="329184"/>
-            <a:ext cx="6894576" cy="1783080"/>
-          </a:xfrm>
-        </p:spPr>
-        <p:txBody>
-          <a:bodyPr anchor="b">
-            <a:normAutofit/>
-          </a:bodyPr>
-          <a:lstStyle/>
-          <a:p>
-            <a:r>
-              <a:rPr lang="en-GB" sz="5400"/>
-              <a:t>Functionality- user accounts</a:t>
-            </a:r>
-          </a:p>
-        </p:txBody>
-      </p:sp>
-      <p:sp>
-        <p:nvSpPr>
-          <p:cNvPr id="15" name="sketch line">
-            <a:extLst>
-              <a:ext uri="{FF2B5EF4-FFF2-40B4-BE49-F238E27FC236}">
-                <a16:creationId xmlns:a16="http://schemas.microsoft.com/office/drawing/2014/main" id="{3FCFB1DE-0B7E-48CC-BA90-B2AB0889F9D6}"/>
-              </a:ext>
-              <a:ext uri="{C183D7F6-B498-43B3-948B-1728B52AA6E4}">
-                <adec:decorative xmlns:adec="http://schemas.microsoft.com/office/drawing/2017/decorative" val="1"/>
-              </a:ext>
-            </a:extLst>
-          </p:cNvPr>
-          <p:cNvSpPr>
-            <a:spLocks noGrp="1" noRot="1" noChangeAspect="1" noMove="1" noResize="1" noEditPoints="1" noAdjustHandles="1" noChangeArrowheads="1" noChangeShapeType="1" noTextEdit="1"/>
-          </p:cNvSpPr>
-          <p:nvPr>
-            <p:extLst>
-              <p:ext uri="{386F3935-93C4-4BCD-93E2-E3B085C9AB24}">
-                <p16:designElem xmlns:p16="http://schemas.microsoft.com/office/powerpoint/2015/main" val="1"/>
-              </p:ext>
-            </p:extLst>
-          </p:nvPr>
-        </p:nvSpPr>
-        <p:spPr>
-          <a:xfrm>
-            <a:off x="758952" y="2395728"/>
-            <a:ext cx="4243589" cy="18288"/>
-          </a:xfrm>
-          <a:custGeom>
-            <a:avLst/>
-            <a:gdLst>
-              <a:gd name="connsiteX0" fmla="*/ 0 w 4243589"/>
-              <a:gd name="connsiteY0" fmla="*/ 0 h 18288"/>
-              <a:gd name="connsiteX1" fmla="*/ 478919 w 4243589"/>
-              <a:gd name="connsiteY1" fmla="*/ 0 h 18288"/>
-              <a:gd name="connsiteX2" fmla="*/ 957839 w 4243589"/>
-              <a:gd name="connsiteY2" fmla="*/ 0 h 18288"/>
-              <a:gd name="connsiteX3" fmla="*/ 1521630 w 4243589"/>
-              <a:gd name="connsiteY3" fmla="*/ 0 h 18288"/>
-              <a:gd name="connsiteX4" fmla="*/ 2212729 w 4243589"/>
-              <a:gd name="connsiteY4" fmla="*/ 0 h 18288"/>
-              <a:gd name="connsiteX5" fmla="*/ 2734084 w 4243589"/>
-              <a:gd name="connsiteY5" fmla="*/ 0 h 18288"/>
-              <a:gd name="connsiteX6" fmla="*/ 3255439 w 4243589"/>
-              <a:gd name="connsiteY6" fmla="*/ 0 h 18288"/>
-              <a:gd name="connsiteX7" fmla="*/ 4243589 w 4243589"/>
-              <a:gd name="connsiteY7" fmla="*/ 0 h 18288"/>
-              <a:gd name="connsiteX8" fmla="*/ 4243589 w 4243589"/>
-              <a:gd name="connsiteY8" fmla="*/ 18288 h 18288"/>
-              <a:gd name="connsiteX9" fmla="*/ 3594926 w 4243589"/>
-              <a:gd name="connsiteY9" fmla="*/ 18288 h 18288"/>
-              <a:gd name="connsiteX10" fmla="*/ 3073571 w 4243589"/>
-              <a:gd name="connsiteY10" fmla="*/ 18288 h 18288"/>
-              <a:gd name="connsiteX11" fmla="*/ 2552216 w 4243589"/>
-              <a:gd name="connsiteY11" fmla="*/ 18288 h 18288"/>
-              <a:gd name="connsiteX12" fmla="*/ 1903553 w 4243589"/>
-              <a:gd name="connsiteY12" fmla="*/ 18288 h 18288"/>
-              <a:gd name="connsiteX13" fmla="*/ 1212454 w 4243589"/>
-              <a:gd name="connsiteY13" fmla="*/ 18288 h 18288"/>
-              <a:gd name="connsiteX14" fmla="*/ 733535 w 4243589"/>
-              <a:gd name="connsiteY14" fmla="*/ 18288 h 18288"/>
-              <a:gd name="connsiteX15" fmla="*/ 0 w 4243589"/>
-              <a:gd name="connsiteY15" fmla="*/ 18288 h 18288"/>
-              <a:gd name="connsiteX16" fmla="*/ 0 w 4243589"/>
-              <a:gd name="connsiteY16" fmla="*/ 0 h 18288"/>
-            </a:gdLst>
-            <a:ahLst/>
-            <a:cxnLst>
-              <a:cxn ang="0">
-                <a:pos x="connsiteX0" y="connsiteY0"/>
-              </a:cxn>
-              <a:cxn ang="0">
-                <a:pos x="connsiteX1" y="connsiteY1"/>
-              </a:cxn>
-              <a:cxn ang="0">
-                <a:pos x="connsiteX2" y="connsiteY2"/>
-              </a:cxn>
-              <a:cxn ang="0">
-                <a:pos x="connsiteX3" y="connsiteY3"/>
-              </a:cxn>
-              <a:cxn ang="0">
-                <a:pos x="connsiteX4" y="connsiteY4"/>
-              </a:cxn>
-              <a:cxn ang="0">
-                <a:pos x="connsiteX5" y="connsiteY5"/>
-              </a:cxn>
-              <a:cxn ang="0">
-                <a:pos x="connsiteX6" y="connsiteY6"/>
-              </a:cxn>
-              <a:cxn ang="0">
-                <a:pos x="connsiteX7" y="connsiteY7"/>
-              </a:cxn>
-              <a:cxn ang="0">
-                <a:pos x="connsiteX8" y="connsiteY8"/>
-              </a:cxn>
-              <a:cxn ang="0">
-                <a:pos x="connsiteX9" y="connsiteY9"/>
-              </a:cxn>
-              <a:cxn ang="0">
-                <a:pos x="connsiteX10" y="connsiteY10"/>
-              </a:cxn>
-              <a:cxn ang="0">
-                <a:pos x="connsiteX11" y="connsiteY11"/>
-              </a:cxn>
-              <a:cxn ang="0">
-                <a:pos x="connsiteX12" y="connsiteY12"/>
-              </a:cxn>
-              <a:cxn ang="0">
-                <a:pos x="connsiteX13" y="connsiteY13"/>
-              </a:cxn>
-              <a:cxn ang="0">
-                <a:pos x="connsiteX14" y="connsiteY14"/>
-              </a:cxn>
-              <a:cxn ang="0">
-                <a:pos x="connsiteX15" y="connsiteY15"/>
-              </a:cxn>
-              <a:cxn ang="0">
-                <a:pos x="connsiteX16" y="connsiteY16"/>
-              </a:cxn>
-            </a:cxnLst>
-            <a:rect l="l" t="t" r="r" b="b"/>
-            <a:pathLst>
-              <a:path w="4243589" h="18288" fill="none" extrusionOk="0">
-                <a:moveTo>
-                  <a:pt x="0" y="0"/>
-                </a:moveTo>
-                <a:cubicBezTo>
-                  <a:pt x="213395" y="-21006"/>
-                  <a:pt x="307421" y="-18116"/>
-                  <a:pt x="478919" y="0"/>
-                </a:cubicBezTo>
-                <a:cubicBezTo>
-                  <a:pt x="650417" y="18116"/>
-                  <a:pt x="831092" y="-21237"/>
-                  <a:pt x="957839" y="0"/>
-                </a:cubicBezTo>
-                <a:cubicBezTo>
-                  <a:pt x="1084586" y="21237"/>
-                  <a:pt x="1301682" y="25124"/>
-                  <a:pt x="1521630" y="0"/>
-                </a:cubicBezTo>
-                <a:cubicBezTo>
-                  <a:pt x="1741578" y="-25124"/>
-                  <a:pt x="1970269" y="-29139"/>
-                  <a:pt x="2212729" y="0"/>
-                </a:cubicBezTo>
-                <a:cubicBezTo>
-                  <a:pt x="2455189" y="29139"/>
-                  <a:pt x="2558847" y="-4796"/>
-                  <a:pt x="2734084" y="0"/>
-                </a:cubicBezTo>
-                <a:cubicBezTo>
-                  <a:pt x="2909321" y="4796"/>
-                  <a:pt x="3097217" y="-13409"/>
-                  <a:pt x="3255439" y="0"/>
-                </a:cubicBezTo>
-                <a:cubicBezTo>
-                  <a:pt x="3413662" y="13409"/>
-                  <a:pt x="3979999" y="-10121"/>
-                  <a:pt x="4243589" y="0"/>
-                </a:cubicBezTo>
-                <a:cubicBezTo>
-                  <a:pt x="4244484" y="8974"/>
-                  <a:pt x="4243043" y="9359"/>
-                  <a:pt x="4243589" y="18288"/>
-                </a:cubicBezTo>
-                <a:cubicBezTo>
-                  <a:pt x="4058777" y="31246"/>
-                  <a:pt x="3910348" y="3158"/>
-                  <a:pt x="3594926" y="18288"/>
-                </a:cubicBezTo>
-                <a:cubicBezTo>
-                  <a:pt x="3279504" y="33418"/>
-                  <a:pt x="3319955" y="-3977"/>
-                  <a:pt x="3073571" y="18288"/>
-                </a:cubicBezTo>
-                <a:cubicBezTo>
-                  <a:pt x="2827187" y="40553"/>
-                  <a:pt x="2767387" y="1863"/>
-                  <a:pt x="2552216" y="18288"/>
-                </a:cubicBezTo>
-                <a:cubicBezTo>
-                  <a:pt x="2337046" y="34713"/>
-                  <a:pt x="2181871" y="19527"/>
-                  <a:pt x="1903553" y="18288"/>
-                </a:cubicBezTo>
-                <a:cubicBezTo>
-                  <a:pt x="1625235" y="17049"/>
-                  <a:pt x="1557672" y="24174"/>
-                  <a:pt x="1212454" y="18288"/>
-                </a:cubicBezTo>
-                <a:cubicBezTo>
-                  <a:pt x="867236" y="12402"/>
-                  <a:pt x="874382" y="15627"/>
-                  <a:pt x="733535" y="18288"/>
-                </a:cubicBezTo>
-                <a:cubicBezTo>
-                  <a:pt x="592688" y="20949"/>
-                  <a:pt x="183477" y="14753"/>
-                  <a:pt x="0" y="18288"/>
-                </a:cubicBezTo>
-                <a:cubicBezTo>
-                  <a:pt x="-229" y="14222"/>
-                  <a:pt x="509" y="5816"/>
-                  <a:pt x="0" y="0"/>
-                </a:cubicBezTo>
-                <a:close/>
-              </a:path>
-              <a:path w="4243589" h="18288" stroke="0" extrusionOk="0">
-                <a:moveTo>
-                  <a:pt x="0" y="0"/>
-                </a:moveTo>
-                <a:cubicBezTo>
-                  <a:pt x="143690" y="16630"/>
-                  <a:pt x="266667" y="14847"/>
-                  <a:pt x="521355" y="0"/>
-                </a:cubicBezTo>
-                <a:cubicBezTo>
-                  <a:pt x="776043" y="-14847"/>
-                  <a:pt x="814491" y="-17363"/>
-                  <a:pt x="1000275" y="0"/>
-                </a:cubicBezTo>
-                <a:cubicBezTo>
-                  <a:pt x="1186059" y="17363"/>
-                  <a:pt x="1352504" y="-23507"/>
-                  <a:pt x="1521630" y="0"/>
-                </a:cubicBezTo>
-                <a:cubicBezTo>
-                  <a:pt x="1690756" y="23507"/>
-                  <a:pt x="1889525" y="5871"/>
-                  <a:pt x="2127857" y="0"/>
-                </a:cubicBezTo>
-                <a:cubicBezTo>
-                  <a:pt x="2366189" y="-5871"/>
-                  <a:pt x="2620628" y="-27997"/>
-                  <a:pt x="2776520" y="0"/>
-                </a:cubicBezTo>
-                <a:cubicBezTo>
-                  <a:pt x="2932412" y="27997"/>
-                  <a:pt x="3131683" y="-25073"/>
-                  <a:pt x="3467618" y="0"/>
-                </a:cubicBezTo>
-                <a:cubicBezTo>
-                  <a:pt x="3803553" y="25073"/>
-                  <a:pt x="4017371" y="3071"/>
-                  <a:pt x="4243589" y="0"/>
-                </a:cubicBezTo>
-                <a:cubicBezTo>
-                  <a:pt x="4243134" y="6162"/>
-                  <a:pt x="4243492" y="11775"/>
-                  <a:pt x="4243589" y="18288"/>
-                </a:cubicBezTo>
-                <a:cubicBezTo>
-                  <a:pt x="4017834" y="-5779"/>
-                  <a:pt x="3834586" y="13376"/>
-                  <a:pt x="3594926" y="18288"/>
-                </a:cubicBezTo>
-                <a:cubicBezTo>
-                  <a:pt x="3355266" y="23200"/>
-                  <a:pt x="3204179" y="2869"/>
-                  <a:pt x="2903827" y="18288"/>
-                </a:cubicBezTo>
-                <a:cubicBezTo>
-                  <a:pt x="2603475" y="33707"/>
-                  <a:pt x="2526187" y="46187"/>
-                  <a:pt x="2212729" y="18288"/>
-                </a:cubicBezTo>
-                <a:cubicBezTo>
-                  <a:pt x="1899271" y="-9611"/>
-                  <a:pt x="1966289" y="29692"/>
-                  <a:pt x="1733809" y="18288"/>
-                </a:cubicBezTo>
-                <a:cubicBezTo>
-                  <a:pt x="1501329" y="6884"/>
-                  <a:pt x="1343612" y="12492"/>
-                  <a:pt x="1085146" y="18288"/>
-                </a:cubicBezTo>
-                <a:cubicBezTo>
-                  <a:pt x="826680" y="24084"/>
-                  <a:pt x="778184" y="35607"/>
-                  <a:pt x="521355" y="18288"/>
-                </a:cubicBezTo>
-                <a:cubicBezTo>
-                  <a:pt x="264526" y="969"/>
-                  <a:pt x="120277" y="4268"/>
-                  <a:pt x="0" y="18288"/>
-                </a:cubicBezTo>
-                <a:cubicBezTo>
-                  <a:pt x="766" y="10800"/>
-                  <a:pt x="-457" y="8180"/>
-                  <a:pt x="0" y="0"/>
-                </a:cubicBezTo>
-                <a:close/>
-              </a:path>
-            </a:pathLst>
-          </a:custGeom>
-          <a:solidFill>
-            <a:schemeClr val="accent2"/>
-          </a:solidFill>
-          <a:ln w="41275" cap="rnd">
-            <a:solidFill>
-              <a:schemeClr val="accent2"/>
-            </a:solidFill>
-            <a:round/>
-            <a:extLst>
-              <a:ext uri="{C807C97D-BFC1-408E-A445-0C87EB9F89A2}">
-                <ask:lineSketchStyleProps xmlns:ask="http://schemas.microsoft.com/office/drawing/2018/sketchyshapes" sd="2727557108">
-                  <a:prstGeom prst="rect">
-                    <a:avLst/>
-                  </a:prstGeom>
-                  <ask:type>
-                    <ask:lineSketchFreehand/>
-                  </ask:type>
-                </ask:lineSketchStyleProps>
-              </a:ext>
-            </a:extLst>
-          </a:ln>
-        </p:spPr>
-        <p:style>
-          <a:lnRef idx="2">
-            <a:schemeClr val="accent1">
-              <a:shade val="50000"/>
-            </a:schemeClr>
-          </a:lnRef>
-          <a:fillRef idx="1">
-            <a:schemeClr val="accent1"/>
-          </a:fillRef>
-          <a:effectRef idx="0">
-            <a:schemeClr val="accent1"/>
-          </a:effectRef>
-          <a:fontRef idx="minor">
-            <a:schemeClr val="lt1"/>
-          </a:fontRef>
-        </p:style>
-        <p:txBody>
-          <a:bodyPr rtlCol="0" anchor="ctr"/>
-          <a:lstStyle/>
-          <a:p>
-            <a:pPr algn="ctr"/>
-            <a:endParaRPr lang="en-US"/>
-          </a:p>
-        </p:txBody>
-      </p:sp>
-      <p:sp>
-        <p:nvSpPr>
-          <p:cNvPr id="3" name="Content Placeholder 2">
-            <a:extLst>
-              <a:ext uri="{FF2B5EF4-FFF2-40B4-BE49-F238E27FC236}">
-                <a16:creationId xmlns:a16="http://schemas.microsoft.com/office/drawing/2014/main" id="{DA9126C6-6F92-F09C-57AD-DFF627A73D44}"/>
-              </a:ext>
-            </a:extLst>
-          </p:cNvPr>
-          <p:cNvSpPr>
-            <a:spLocks noGrp="1"/>
-          </p:cNvSpPr>
-          <p:nvPr>
-            <p:ph idx="1"/>
-          </p:nvPr>
-        </p:nvSpPr>
-        <p:spPr>
-          <a:xfrm>
-            <a:off x="640080" y="2706624"/>
-            <a:ext cx="6894576" cy="3483864"/>
-          </a:xfrm>
-        </p:spPr>
-        <p:txBody>
-          <a:bodyPr>
-            <a:normAutofit/>
-          </a:bodyPr>
-          <a:lstStyle/>
-          <a:p>
-            <a:r>
-              <a:rPr lang="en-GB" sz="2200" dirty="0"/>
-              <a:t>A functional user account creation and login system:</a:t>
-            </a:r>
-          </a:p>
-          <a:p>
-            <a:pPr lvl="1"/>
-            <a:r>
-              <a:rPr lang="en-GB" sz="2200" dirty="0"/>
-              <a:t>Implemented a system for users to enter details into a html form that is sent to a  backend that encrypts and saves the user newly created account</a:t>
-            </a:r>
-          </a:p>
-          <a:p>
-            <a:pPr lvl="1"/>
-            <a:r>
-              <a:rPr lang="en-GB" sz="2200" dirty="0"/>
-              <a:t>Created a system that was able to allow users to log into the accounts using python</a:t>
-            </a:r>
-          </a:p>
-          <a:p>
-            <a:pPr lvl="1"/>
-            <a:r>
-              <a:rPr lang="en-GB" sz="2200" dirty="0"/>
-              <a:t>(code snippets on the next slide with annotation)</a:t>
-            </a:r>
-          </a:p>
-        </p:txBody>
-      </p:sp>
-      <p:pic>
-        <p:nvPicPr>
-          <p:cNvPr id="8" name="Picture 7">
-            <a:extLst>
-              <a:ext uri="{FF2B5EF4-FFF2-40B4-BE49-F238E27FC236}">
-                <a16:creationId xmlns:a16="http://schemas.microsoft.com/office/drawing/2014/main" id="{F1951334-046D-211F-5B3C-6BA8D4DCF574}"/>
-              </a:ext>
-            </a:extLst>
-          </p:cNvPr>
-          <p:cNvPicPr>
-            <a:picLocks noChangeAspect="1"/>
-          </p:cNvPicPr>
-          <p:nvPr/>
-        </p:nvPicPr>
-        <p:blipFill>
-          <a:blip r:embed="rId2"/>
-          <a:stretch>
-            <a:fillRect/>
-          </a:stretch>
-        </p:blipFill>
-        <p:spPr>
-          <a:xfrm>
-            <a:off x="8571847" y="329183"/>
-            <a:ext cx="2598201" cy="3429969"/>
-          </a:xfrm>
-          <a:prstGeom prst="rect">
-            <a:avLst/>
-          </a:prstGeom>
-        </p:spPr>
-      </p:pic>
-      <p:pic>
-        <p:nvPicPr>
-          <p:cNvPr id="6" name="Picture 5">
-            <a:extLst>
-              <a:ext uri="{FF2B5EF4-FFF2-40B4-BE49-F238E27FC236}">
-                <a16:creationId xmlns:a16="http://schemas.microsoft.com/office/drawing/2014/main" id="{5E97F700-6F59-10D4-A076-F8E75B048C78}"/>
-              </a:ext>
-            </a:extLst>
-          </p:cNvPr>
-          <p:cNvPicPr>
-            <a:picLocks noChangeAspect="1"/>
-          </p:cNvPicPr>
-          <p:nvPr/>
-        </p:nvPicPr>
-        <p:blipFill>
-          <a:blip r:embed="rId3"/>
-          <a:stretch>
-            <a:fillRect/>
-          </a:stretch>
-        </p:blipFill>
-        <p:spPr>
-          <a:xfrm>
-            <a:off x="8688611" y="4079193"/>
-            <a:ext cx="2346385" cy="2176272"/>
-          </a:xfrm>
-          <a:prstGeom prst="rect">
-            <a:avLst/>
-          </a:prstGeom>
-        </p:spPr>
-      </p:pic>
-    </p:spTree>
-    <p:extLst>
-      <p:ext uri="{BB962C8B-B14F-4D97-AF65-F5344CB8AC3E}">
-        <p14:creationId xmlns:p14="http://schemas.microsoft.com/office/powerpoint/2010/main" val="3098818615"/>
-      </p:ext>
-    </p:extLst>
-  </p:cSld>
-  <p:clrMapOvr>
-    <a:masterClrMapping/>
-  </p:clrMapOvr>
-</p:sld>
-</file>
-
-<file path=ppt/slides/slide14.xml><?xml version="1.0" encoding="utf-8"?>
-<p:sld xmlns:a="http://schemas.openxmlformats.org/drawingml/2006/main" xmlns:r="http://schemas.openxmlformats.org/officeDocument/2006/relationships" xmlns:p="http://schemas.openxmlformats.org/presentationml/2006/main">
-  <p:cSld>
-    <p:spTree>
-      <p:nvGrpSpPr>
-        <p:cNvPr id="1" name=""/>
-        <p:cNvGrpSpPr/>
-        <p:nvPr/>
-      </p:nvGrpSpPr>
-      <p:grpSpPr>
-        <a:xfrm>
-          <a:off x="0" y="0"/>
-          <a:ext cx="0" cy="0"/>
-          <a:chOff x="0" y="0"/>
-          <a:chExt cx="0" cy="0"/>
-        </a:xfrm>
-      </p:grpSpPr>
-      <p:sp>
-        <p:nvSpPr>
-          <p:cNvPr id="3" name="Content Placeholder 2">
-            <a:extLst>
-              <a:ext uri="{FF2B5EF4-FFF2-40B4-BE49-F238E27FC236}">
-                <a16:creationId xmlns:a16="http://schemas.microsoft.com/office/drawing/2014/main" id="{E48F44F5-9149-7384-52C8-91FC27F6E673}"/>
-              </a:ext>
-            </a:extLst>
-          </p:cNvPr>
-          <p:cNvSpPr>
-            <a:spLocks noGrp="1"/>
-          </p:cNvSpPr>
-          <p:nvPr>
-            <p:ph idx="1"/>
-          </p:nvPr>
-        </p:nvSpPr>
-        <p:spPr>
-          <a:xfrm>
-            <a:off x="3498939" y="656570"/>
-            <a:ext cx="3343275" cy="5544251"/>
-          </a:xfrm>
-        </p:spPr>
-        <p:txBody>
-          <a:bodyPr>
-            <a:normAutofit/>
-          </a:bodyPr>
-          <a:lstStyle/>
-          <a:p>
-            <a:pPr marL="0" indent="0">
-              <a:buNone/>
-            </a:pPr>
-            <a:r>
-              <a:rPr lang="en-GB" sz="1600" dirty="0"/>
-              <a:t>After the user sends in their data from the front end  (on the left) the data is sent the /register function(seen on the right ) which first checks the presence and validity of the inputted data.</a:t>
-            </a:r>
-          </a:p>
-          <a:p>
-            <a:pPr marL="0" indent="0">
-              <a:buNone/>
-            </a:pPr>
-            <a:r>
-              <a:rPr lang="en-GB" sz="1600" dirty="0"/>
-              <a:t> After the validation of the user's data is confirmed the user’s password is hashed by the werkzeug.security library into 220-character hash  to protect the users data, after that a connection to the database is made in which the function checks that the users </a:t>
-            </a:r>
-            <a:r>
-              <a:rPr lang="en-GB" sz="1600" dirty="0" err="1"/>
-              <a:t>inputed</a:t>
-            </a:r>
-            <a:r>
-              <a:rPr lang="en-GB" sz="1600" dirty="0"/>
-              <a:t> username and email don’t match a pre-existing one.</a:t>
-            </a:r>
-          </a:p>
-          <a:p>
-            <a:pPr marL="0" indent="0">
-              <a:buNone/>
-            </a:pPr>
-            <a:r>
-              <a:rPr lang="en-GB" sz="1600" dirty="0"/>
-              <a:t>If that check is past then the users details are sent to the database, a final check makes sure that the information has been sent correctly and then the users are redirected back to the home page</a:t>
-            </a:r>
-          </a:p>
-        </p:txBody>
-      </p:sp>
-      <p:pic>
-        <p:nvPicPr>
-          <p:cNvPr id="4" name="Picture 3">
-            <a:extLst>
-              <a:ext uri="{FF2B5EF4-FFF2-40B4-BE49-F238E27FC236}">
-                <a16:creationId xmlns:a16="http://schemas.microsoft.com/office/drawing/2014/main" id="{6315EDF7-B062-892C-573A-CB7E0797F093}"/>
-              </a:ext>
-            </a:extLst>
-          </p:cNvPr>
-          <p:cNvPicPr>
-            <a:picLocks noChangeAspect="1"/>
-          </p:cNvPicPr>
-          <p:nvPr/>
-        </p:nvPicPr>
-        <p:blipFill>
-          <a:blip r:embed="rId2"/>
-          <a:stretch>
-            <a:fillRect/>
-          </a:stretch>
-        </p:blipFill>
-        <p:spPr>
-          <a:xfrm>
-            <a:off x="7181851" y="243258"/>
-            <a:ext cx="4826398" cy="6371484"/>
-          </a:xfrm>
-          <a:prstGeom prst="rect">
-            <a:avLst/>
-          </a:prstGeom>
-        </p:spPr>
-      </p:pic>
-      <p:pic>
-        <p:nvPicPr>
-          <p:cNvPr id="6" name="Picture 5">
-            <a:extLst>
-              <a:ext uri="{FF2B5EF4-FFF2-40B4-BE49-F238E27FC236}">
-                <a16:creationId xmlns:a16="http://schemas.microsoft.com/office/drawing/2014/main" id="{7710C290-3283-66F4-0C7D-BED7AE04D5BB}"/>
-              </a:ext>
-            </a:extLst>
-          </p:cNvPr>
-          <p:cNvPicPr>
-            <a:picLocks noChangeAspect="1"/>
-          </p:cNvPicPr>
-          <p:nvPr/>
-        </p:nvPicPr>
-        <p:blipFill>
-          <a:blip r:embed="rId3"/>
-          <a:stretch>
-            <a:fillRect/>
-          </a:stretch>
-        </p:blipFill>
-        <p:spPr>
-          <a:xfrm>
-            <a:off x="0" y="906979"/>
-            <a:ext cx="3447051" cy="4133850"/>
-          </a:xfrm>
-          <a:prstGeom prst="rect">
-            <a:avLst/>
-          </a:prstGeom>
-        </p:spPr>
-      </p:pic>
-      <p:sp>
-        <p:nvSpPr>
-          <p:cNvPr id="7" name="TextBox 6">
-            <a:extLst>
-              <a:ext uri="{FF2B5EF4-FFF2-40B4-BE49-F238E27FC236}">
-                <a16:creationId xmlns:a16="http://schemas.microsoft.com/office/drawing/2014/main" id="{970D024F-CF3D-BBCC-A5DF-246DD865675A}"/>
-              </a:ext>
-            </a:extLst>
-          </p:cNvPr>
-          <p:cNvSpPr txBox="1"/>
-          <p:nvPr/>
-        </p:nvSpPr>
-        <p:spPr>
-          <a:xfrm>
-            <a:off x="285750" y="133350"/>
-            <a:ext cx="3500938" cy="523220"/>
-          </a:xfrm>
-          <a:prstGeom prst="rect">
-            <a:avLst/>
-          </a:prstGeom>
-          <a:noFill/>
-        </p:spPr>
-        <p:txBody>
-          <a:bodyPr wrap="square" rtlCol="0">
-            <a:spAutoFit/>
-          </a:bodyPr>
-          <a:lstStyle/>
-          <a:p>
-            <a:r>
-              <a:rPr lang="en-GB" sz="2800" u="sng" dirty="0"/>
-              <a:t>Registration</a:t>
-            </a:r>
-          </a:p>
-        </p:txBody>
-      </p:sp>
-    </p:spTree>
-    <p:extLst>
-      <p:ext uri="{BB962C8B-B14F-4D97-AF65-F5344CB8AC3E}">
-        <p14:creationId xmlns:p14="http://schemas.microsoft.com/office/powerpoint/2010/main" val="2334595281"/>
-      </p:ext>
-    </p:extLst>
-  </p:cSld>
-  <p:clrMapOvr>
-    <a:masterClrMapping/>
-  </p:clrMapOvr>
-</p:sld>
-</file>
-
-<file path=ppt/slides/slide15.xml><?xml version="1.0" encoding="utf-8"?>
-<p:sld xmlns:a="http://schemas.openxmlformats.org/drawingml/2006/main" xmlns:r="http://schemas.openxmlformats.org/officeDocument/2006/relationships" xmlns:p="http://schemas.openxmlformats.org/presentationml/2006/main">
-  <p:cSld>
-    <p:spTree>
-      <p:nvGrpSpPr>
-        <p:cNvPr id="1" name="">
-          <a:extLst>
-            <a:ext uri="{FF2B5EF4-FFF2-40B4-BE49-F238E27FC236}">
-              <a16:creationId xmlns:a16="http://schemas.microsoft.com/office/drawing/2014/main" id="{8D022FE6-A73B-DBE2-9AE3-0A40E9FF824A}"/>
-            </a:ext>
-          </a:extLst>
-        </p:cNvPr>
-        <p:cNvGrpSpPr/>
-        <p:nvPr/>
-      </p:nvGrpSpPr>
-      <p:grpSpPr>
-        <a:xfrm>
-          <a:off x="0" y="0"/>
-          <a:ext cx="0" cy="0"/>
-          <a:chOff x="0" y="0"/>
-          <a:chExt cx="0" cy="0"/>
-        </a:xfrm>
-      </p:grpSpPr>
-      <p:sp>
-        <p:nvSpPr>
-          <p:cNvPr id="3" name="Content Placeholder 2">
-            <a:extLst>
-              <a:ext uri="{FF2B5EF4-FFF2-40B4-BE49-F238E27FC236}">
-                <a16:creationId xmlns:a16="http://schemas.microsoft.com/office/drawing/2014/main" id="{E33CAC1D-897B-FEC3-37B6-B9F5FB42E4EE}"/>
-              </a:ext>
-            </a:extLst>
-          </p:cNvPr>
-          <p:cNvSpPr>
-            <a:spLocks noGrp="1"/>
-          </p:cNvSpPr>
-          <p:nvPr>
-            <p:ph idx="1"/>
-          </p:nvPr>
-        </p:nvSpPr>
-        <p:spPr>
-          <a:xfrm>
-            <a:off x="3498939" y="656570"/>
-            <a:ext cx="3343275" cy="5544251"/>
-          </a:xfrm>
-        </p:spPr>
-        <p:txBody>
-          <a:bodyPr>
-            <a:normAutofit/>
-          </a:bodyPr>
-          <a:lstStyle/>
-          <a:p>
-            <a:pPr marL="0" indent="0">
-              <a:buNone/>
-            </a:pPr>
-            <a:r>
-              <a:rPr lang="en-GB" sz="1600" dirty="0"/>
-              <a:t>When the user inputs their account information in their data is sent form the front end  (on the left) to  the /login function(seen on the right ) which first checks the presence and validity of the inputted data.</a:t>
-            </a:r>
-          </a:p>
-          <a:p>
-            <a:pPr marL="0" indent="0">
-              <a:buNone/>
-            </a:pPr>
-            <a:r>
-              <a:rPr lang="en-GB" sz="1600" dirty="0"/>
-              <a:t> After the validation of the user's data a connection is made to the database in which the function checks that the users inputted details match a pre-existing one in the database.</a:t>
-            </a:r>
-          </a:p>
-          <a:p>
-            <a:pPr marL="0" indent="0">
-              <a:buNone/>
-            </a:pPr>
-            <a:r>
-              <a:rPr lang="en-GB" sz="1600" dirty="0"/>
-              <a:t>For debugging purposes, I had implemented a debug message that sends in the terminal that fetches the username for who just tried to login to make sure that the communication was successful.</a:t>
-            </a:r>
-          </a:p>
-          <a:p>
-            <a:pPr marL="0" indent="0">
-              <a:buNone/>
-            </a:pPr>
-            <a:r>
-              <a:rPr lang="en-GB" sz="1600" dirty="0"/>
-              <a:t>Then there is a check against the data in the database against the users' inputted details, if they pass this final check the user Is redirected to their profile.</a:t>
-            </a:r>
-          </a:p>
-        </p:txBody>
-      </p:sp>
-      <p:sp>
-        <p:nvSpPr>
-          <p:cNvPr id="7" name="TextBox 6">
-            <a:extLst>
-              <a:ext uri="{FF2B5EF4-FFF2-40B4-BE49-F238E27FC236}">
-                <a16:creationId xmlns:a16="http://schemas.microsoft.com/office/drawing/2014/main" id="{6D50F58C-FB20-FB9E-43D9-85D6A4798DAB}"/>
-              </a:ext>
-            </a:extLst>
-          </p:cNvPr>
-          <p:cNvSpPr txBox="1"/>
-          <p:nvPr/>
-        </p:nvSpPr>
-        <p:spPr>
-          <a:xfrm>
-            <a:off x="285750" y="133350"/>
-            <a:ext cx="3500938" cy="523220"/>
-          </a:xfrm>
-          <a:prstGeom prst="rect">
-            <a:avLst/>
-          </a:prstGeom>
-          <a:noFill/>
-        </p:spPr>
-        <p:txBody>
-          <a:bodyPr wrap="square" rtlCol="0">
-            <a:spAutoFit/>
-          </a:bodyPr>
-          <a:lstStyle/>
-          <a:p>
-            <a:r>
-              <a:rPr lang="en-GB" sz="2800" u="sng" dirty="0"/>
-              <a:t>Login</a:t>
-            </a:r>
-          </a:p>
-        </p:txBody>
-      </p:sp>
-      <p:pic>
-        <p:nvPicPr>
-          <p:cNvPr id="2" name="Picture 1">
-            <a:extLst>
-              <a:ext uri="{FF2B5EF4-FFF2-40B4-BE49-F238E27FC236}">
-                <a16:creationId xmlns:a16="http://schemas.microsoft.com/office/drawing/2014/main" id="{D3210642-62A4-7BAD-2220-173080DFC7FD}"/>
-              </a:ext>
-            </a:extLst>
-          </p:cNvPr>
-          <p:cNvPicPr>
-            <a:picLocks noChangeAspect="1"/>
-          </p:cNvPicPr>
-          <p:nvPr/>
-        </p:nvPicPr>
-        <p:blipFill>
-          <a:blip r:embed="rId2"/>
-          <a:stretch>
-            <a:fillRect/>
-          </a:stretch>
-        </p:blipFill>
-        <p:spPr>
-          <a:xfrm>
-            <a:off x="6999877" y="656570"/>
-            <a:ext cx="5049248" cy="5060119"/>
-          </a:xfrm>
-          <a:prstGeom prst="rect">
-            <a:avLst/>
-          </a:prstGeom>
-        </p:spPr>
-      </p:pic>
-      <p:pic>
-        <p:nvPicPr>
-          <p:cNvPr id="8" name="Picture 7">
-            <a:extLst>
-              <a:ext uri="{FF2B5EF4-FFF2-40B4-BE49-F238E27FC236}">
-                <a16:creationId xmlns:a16="http://schemas.microsoft.com/office/drawing/2014/main" id="{5F87AA19-FC34-6FC9-DEF8-880DEF52070F}"/>
-              </a:ext>
-            </a:extLst>
-          </p:cNvPr>
-          <p:cNvPicPr>
-            <a:picLocks noChangeAspect="1"/>
-          </p:cNvPicPr>
-          <p:nvPr/>
-        </p:nvPicPr>
-        <p:blipFill>
-          <a:blip r:embed="rId3"/>
-          <a:srcRect l="5328" r="3607"/>
-          <a:stretch/>
-        </p:blipFill>
-        <p:spPr>
-          <a:xfrm>
-            <a:off x="285750" y="1150165"/>
-            <a:ext cx="2971800" cy="2834677"/>
-          </a:xfrm>
-          <a:prstGeom prst="rect">
-            <a:avLst/>
-          </a:prstGeom>
-        </p:spPr>
-      </p:pic>
-    </p:spTree>
-    <p:extLst>
-      <p:ext uri="{BB962C8B-B14F-4D97-AF65-F5344CB8AC3E}">
-        <p14:creationId xmlns:p14="http://schemas.microsoft.com/office/powerpoint/2010/main" val="1940113368"/>
-      </p:ext>
-    </p:extLst>
-  </p:cSld>
-  <p:clrMapOvr>
-    <a:masterClrMapping/>
-  </p:clrMapOvr>
-</p:sld>
-</file>
-
-<file path=ppt/slides/slide16.xml><?xml version="1.0" encoding="utf-8"?>
-<p:sld xmlns:a="http://schemas.openxmlformats.org/drawingml/2006/main" xmlns:r="http://schemas.openxmlformats.org/officeDocument/2006/relationships" xmlns:p="http://schemas.openxmlformats.org/presentationml/2006/main">
-  <p:cSld>
-    <p:bg>
-      <p:bgPr>
-        <a:solidFill>
-          <a:schemeClr val="bg1"/>
-        </a:solidFill>
-        <a:effectLst/>
-      </p:bgPr>
-    </p:bg>
-    <p:spTree>
-      <p:nvGrpSpPr>
-        <p:cNvPr id="1" name="">
-          <a:extLst>
-            <a:ext uri="{FF2B5EF4-FFF2-40B4-BE49-F238E27FC236}">
-              <a16:creationId xmlns:a16="http://schemas.microsoft.com/office/drawing/2014/main" id="{F9558F44-77FF-BA35-F4B8-67CB1056AEB4}"/>
-            </a:ext>
-          </a:extLst>
-        </p:cNvPr>
-        <p:cNvGrpSpPr/>
-        <p:nvPr/>
-      </p:nvGrpSpPr>
-      <p:grpSpPr>
-        <a:xfrm>
-          <a:off x="0" y="0"/>
-          <a:ext cx="0" cy="0"/>
-          <a:chOff x="0" y="0"/>
-          <a:chExt cx="0" cy="0"/>
-        </a:xfrm>
-      </p:grpSpPr>
-      <p:sp useBgFill="1">
-        <p:nvSpPr>
-          <p:cNvPr id="17" name="Rectangle 16">
-            <a:extLst>
-              <a:ext uri="{FF2B5EF4-FFF2-40B4-BE49-F238E27FC236}">
-                <a16:creationId xmlns:a16="http://schemas.microsoft.com/office/drawing/2014/main" id="{352BEC0E-22F8-46D0-9632-375DB541B06C}"/>
-              </a:ext>
-              <a:ext uri="{C183D7F6-B498-43B3-948B-1728B52AA6E4}">
-                <adec:decorative xmlns:adec="http://schemas.microsoft.com/office/drawing/2017/decorative" val="1"/>
-              </a:ext>
-            </a:extLst>
-          </p:cNvPr>
-          <p:cNvSpPr>
-            <a:spLocks noGrp="1" noRot="1" noChangeAspect="1" noMove="1" noResize="1" noEditPoints="1" noAdjustHandles="1" noChangeArrowheads="1" noChangeShapeType="1" noTextEdit="1"/>
-          </p:cNvSpPr>
-          <p:nvPr>
-            <p:extLst>
-              <p:ext uri="{386F3935-93C4-4BCD-93E2-E3B085C9AB24}">
-                <p16:designElem xmlns:p16="http://schemas.microsoft.com/office/powerpoint/2015/main" val="1"/>
-              </p:ext>
-            </p:extLst>
-          </p:nvPr>
-        </p:nvSpPr>
-        <p:spPr>
-          <a:xfrm>
-            <a:off x="0" y="0"/>
-            <a:ext cx="12188952" cy="6858000"/>
-          </a:xfrm>
-          <a:prstGeom prst="rect">
-            <a:avLst/>
-          </a:prstGeom>
-          <a:ln>
-            <a:noFill/>
-          </a:ln>
-        </p:spPr>
-        <p:style>
-          <a:lnRef idx="2">
-            <a:schemeClr val="accent1">
-              <a:shade val="50000"/>
-            </a:schemeClr>
-          </a:lnRef>
-          <a:fillRef idx="1">
-            <a:schemeClr val="accent1"/>
-          </a:fillRef>
-          <a:effectRef idx="0">
-            <a:schemeClr val="accent1"/>
-          </a:effectRef>
-          <a:fontRef idx="minor">
-            <a:schemeClr val="lt1"/>
-          </a:fontRef>
-        </p:style>
-        <p:txBody>
-          <a:bodyPr rtlCol="0" anchor="ctr"/>
-          <a:lstStyle/>
-          <a:p>
-            <a:pPr algn="ctr"/>
-            <a:endParaRPr lang="en-US"/>
-          </a:p>
-        </p:txBody>
-      </p:sp>
-      <p:sp>
-        <p:nvSpPr>
-          <p:cNvPr id="2" name="Title 1">
-            <a:extLst>
-              <a:ext uri="{FF2B5EF4-FFF2-40B4-BE49-F238E27FC236}">
-                <a16:creationId xmlns:a16="http://schemas.microsoft.com/office/drawing/2014/main" id="{426DD5AE-8FD0-30A0-8449-55191F0B9A06}"/>
-              </a:ext>
-            </a:extLst>
-          </p:cNvPr>
-          <p:cNvSpPr>
-            <a:spLocks noGrp="1"/>
-          </p:cNvSpPr>
-          <p:nvPr>
-            <p:ph type="title"/>
-          </p:nvPr>
-        </p:nvSpPr>
-        <p:spPr>
-          <a:xfrm>
-            <a:off x="640080" y="329184"/>
-            <a:ext cx="6894576" cy="1783080"/>
-          </a:xfrm>
-        </p:spPr>
-        <p:txBody>
-          <a:bodyPr anchor="b">
-            <a:normAutofit/>
-          </a:bodyPr>
-          <a:lstStyle/>
-          <a:p>
-            <a:r>
-              <a:rPr lang="en-GB" sz="5400" dirty="0"/>
-              <a:t>Functionality- organised code</a:t>
-            </a:r>
-          </a:p>
-        </p:txBody>
-      </p:sp>
-      <p:sp>
-        <p:nvSpPr>
-          <p:cNvPr id="19" name="sketch line">
-            <a:extLst>
-              <a:ext uri="{FF2B5EF4-FFF2-40B4-BE49-F238E27FC236}">
-                <a16:creationId xmlns:a16="http://schemas.microsoft.com/office/drawing/2014/main" id="{3FCFB1DE-0B7E-48CC-BA90-B2AB0889F9D6}"/>
-              </a:ext>
-              <a:ext uri="{C183D7F6-B498-43B3-948B-1728B52AA6E4}">
-                <adec:decorative xmlns:adec="http://schemas.microsoft.com/office/drawing/2017/decorative" val="1"/>
-              </a:ext>
-            </a:extLst>
-          </p:cNvPr>
-          <p:cNvSpPr>
-            <a:spLocks noGrp="1" noRot="1" noChangeAspect="1" noMove="1" noResize="1" noEditPoints="1" noAdjustHandles="1" noChangeArrowheads="1" noChangeShapeType="1" noTextEdit="1"/>
-          </p:cNvSpPr>
-          <p:nvPr>
-            <p:extLst>
-              <p:ext uri="{386F3935-93C4-4BCD-93E2-E3B085C9AB24}">
-                <p16:designElem xmlns:p16="http://schemas.microsoft.com/office/powerpoint/2015/main" val="1"/>
-              </p:ext>
-            </p:extLst>
-          </p:nvPr>
-        </p:nvSpPr>
-        <p:spPr>
-          <a:xfrm>
-            <a:off x="758952" y="2395728"/>
-            <a:ext cx="4243589" cy="18288"/>
-          </a:xfrm>
-          <a:custGeom>
-            <a:avLst/>
-            <a:gdLst>
-              <a:gd name="connsiteX0" fmla="*/ 0 w 4243589"/>
-              <a:gd name="connsiteY0" fmla="*/ 0 h 18288"/>
-              <a:gd name="connsiteX1" fmla="*/ 478919 w 4243589"/>
-              <a:gd name="connsiteY1" fmla="*/ 0 h 18288"/>
-              <a:gd name="connsiteX2" fmla="*/ 957839 w 4243589"/>
-              <a:gd name="connsiteY2" fmla="*/ 0 h 18288"/>
-              <a:gd name="connsiteX3" fmla="*/ 1521630 w 4243589"/>
-              <a:gd name="connsiteY3" fmla="*/ 0 h 18288"/>
-              <a:gd name="connsiteX4" fmla="*/ 2212729 w 4243589"/>
-              <a:gd name="connsiteY4" fmla="*/ 0 h 18288"/>
-              <a:gd name="connsiteX5" fmla="*/ 2734084 w 4243589"/>
-              <a:gd name="connsiteY5" fmla="*/ 0 h 18288"/>
-              <a:gd name="connsiteX6" fmla="*/ 3255439 w 4243589"/>
-              <a:gd name="connsiteY6" fmla="*/ 0 h 18288"/>
-              <a:gd name="connsiteX7" fmla="*/ 4243589 w 4243589"/>
-              <a:gd name="connsiteY7" fmla="*/ 0 h 18288"/>
-              <a:gd name="connsiteX8" fmla="*/ 4243589 w 4243589"/>
-              <a:gd name="connsiteY8" fmla="*/ 18288 h 18288"/>
-              <a:gd name="connsiteX9" fmla="*/ 3594926 w 4243589"/>
-              <a:gd name="connsiteY9" fmla="*/ 18288 h 18288"/>
-              <a:gd name="connsiteX10" fmla="*/ 3073571 w 4243589"/>
-              <a:gd name="connsiteY10" fmla="*/ 18288 h 18288"/>
-              <a:gd name="connsiteX11" fmla="*/ 2552216 w 4243589"/>
-              <a:gd name="connsiteY11" fmla="*/ 18288 h 18288"/>
-              <a:gd name="connsiteX12" fmla="*/ 1903553 w 4243589"/>
-              <a:gd name="connsiteY12" fmla="*/ 18288 h 18288"/>
-              <a:gd name="connsiteX13" fmla="*/ 1212454 w 4243589"/>
-              <a:gd name="connsiteY13" fmla="*/ 18288 h 18288"/>
-              <a:gd name="connsiteX14" fmla="*/ 733535 w 4243589"/>
-              <a:gd name="connsiteY14" fmla="*/ 18288 h 18288"/>
-              <a:gd name="connsiteX15" fmla="*/ 0 w 4243589"/>
-              <a:gd name="connsiteY15" fmla="*/ 18288 h 18288"/>
-              <a:gd name="connsiteX16" fmla="*/ 0 w 4243589"/>
-              <a:gd name="connsiteY16" fmla="*/ 0 h 18288"/>
-            </a:gdLst>
-            <a:ahLst/>
-            <a:cxnLst>
-              <a:cxn ang="0">
-                <a:pos x="connsiteX0" y="connsiteY0"/>
-              </a:cxn>
-              <a:cxn ang="0">
-                <a:pos x="connsiteX1" y="connsiteY1"/>
-              </a:cxn>
-              <a:cxn ang="0">
-                <a:pos x="connsiteX2" y="connsiteY2"/>
-              </a:cxn>
-              <a:cxn ang="0">
-                <a:pos x="connsiteX3" y="connsiteY3"/>
-              </a:cxn>
-              <a:cxn ang="0">
-                <a:pos x="connsiteX4" y="connsiteY4"/>
-              </a:cxn>
-              <a:cxn ang="0">
-                <a:pos x="connsiteX5" y="connsiteY5"/>
-              </a:cxn>
-              <a:cxn ang="0">
-                <a:pos x="connsiteX6" y="connsiteY6"/>
-              </a:cxn>
-              <a:cxn ang="0">
-                <a:pos x="connsiteX7" y="connsiteY7"/>
-              </a:cxn>
-              <a:cxn ang="0">
-                <a:pos x="connsiteX8" y="connsiteY8"/>
-              </a:cxn>
-              <a:cxn ang="0">
-                <a:pos x="connsiteX9" y="connsiteY9"/>
-              </a:cxn>
-              <a:cxn ang="0">
-                <a:pos x="connsiteX10" y="connsiteY10"/>
-              </a:cxn>
-              <a:cxn ang="0">
-                <a:pos x="connsiteX11" y="connsiteY11"/>
-              </a:cxn>
-              <a:cxn ang="0">
-                <a:pos x="connsiteX12" y="connsiteY12"/>
-              </a:cxn>
-              <a:cxn ang="0">
-                <a:pos x="connsiteX13" y="connsiteY13"/>
-              </a:cxn>
-              <a:cxn ang="0">
-                <a:pos x="connsiteX14" y="connsiteY14"/>
-              </a:cxn>
-              <a:cxn ang="0">
-                <a:pos x="connsiteX15" y="connsiteY15"/>
-              </a:cxn>
-              <a:cxn ang="0">
-                <a:pos x="connsiteX16" y="connsiteY16"/>
-              </a:cxn>
-            </a:cxnLst>
-            <a:rect l="l" t="t" r="r" b="b"/>
-            <a:pathLst>
-              <a:path w="4243589" h="18288" fill="none" extrusionOk="0">
-                <a:moveTo>
-                  <a:pt x="0" y="0"/>
-                </a:moveTo>
-                <a:cubicBezTo>
-                  <a:pt x="213395" y="-21006"/>
-                  <a:pt x="307421" y="-18116"/>
-                  <a:pt x="478919" y="0"/>
-                </a:cubicBezTo>
-                <a:cubicBezTo>
-                  <a:pt x="650417" y="18116"/>
-                  <a:pt x="831092" y="-21237"/>
-                  <a:pt x="957839" y="0"/>
-                </a:cubicBezTo>
-                <a:cubicBezTo>
-                  <a:pt x="1084586" y="21237"/>
-                  <a:pt x="1301682" y="25124"/>
-                  <a:pt x="1521630" y="0"/>
-                </a:cubicBezTo>
-                <a:cubicBezTo>
-                  <a:pt x="1741578" y="-25124"/>
-                  <a:pt x="1970269" y="-29139"/>
-                  <a:pt x="2212729" y="0"/>
-                </a:cubicBezTo>
-                <a:cubicBezTo>
-                  <a:pt x="2455189" y="29139"/>
-                  <a:pt x="2558847" y="-4796"/>
-                  <a:pt x="2734084" y="0"/>
-                </a:cubicBezTo>
-                <a:cubicBezTo>
-                  <a:pt x="2909321" y="4796"/>
-                  <a:pt x="3097217" y="-13409"/>
-                  <a:pt x="3255439" y="0"/>
-                </a:cubicBezTo>
-                <a:cubicBezTo>
-                  <a:pt x="3413662" y="13409"/>
-                  <a:pt x="3979999" y="-10121"/>
-                  <a:pt x="4243589" y="0"/>
-                </a:cubicBezTo>
-                <a:cubicBezTo>
-                  <a:pt x="4244484" y="8974"/>
-                  <a:pt x="4243043" y="9359"/>
-                  <a:pt x="4243589" y="18288"/>
-                </a:cubicBezTo>
-                <a:cubicBezTo>
-                  <a:pt x="4058777" y="31246"/>
-                  <a:pt x="3910348" y="3158"/>
-                  <a:pt x="3594926" y="18288"/>
-                </a:cubicBezTo>
-                <a:cubicBezTo>
-                  <a:pt x="3279504" y="33418"/>
-                  <a:pt x="3319955" y="-3977"/>
-                  <a:pt x="3073571" y="18288"/>
-                </a:cubicBezTo>
-                <a:cubicBezTo>
-                  <a:pt x="2827187" y="40553"/>
-                  <a:pt x="2767387" y="1863"/>
-                  <a:pt x="2552216" y="18288"/>
-                </a:cubicBezTo>
-                <a:cubicBezTo>
-                  <a:pt x="2337046" y="34713"/>
-                  <a:pt x="2181871" y="19527"/>
-                  <a:pt x="1903553" y="18288"/>
-                </a:cubicBezTo>
-                <a:cubicBezTo>
-                  <a:pt x="1625235" y="17049"/>
-                  <a:pt x="1557672" y="24174"/>
-                  <a:pt x="1212454" y="18288"/>
-                </a:cubicBezTo>
-                <a:cubicBezTo>
-                  <a:pt x="867236" y="12402"/>
-                  <a:pt x="874382" y="15627"/>
-                  <a:pt x="733535" y="18288"/>
-                </a:cubicBezTo>
-                <a:cubicBezTo>
-                  <a:pt x="592688" y="20949"/>
-                  <a:pt x="183477" y="14753"/>
-                  <a:pt x="0" y="18288"/>
-                </a:cubicBezTo>
-                <a:cubicBezTo>
-                  <a:pt x="-229" y="14222"/>
-                  <a:pt x="509" y="5816"/>
-                  <a:pt x="0" y="0"/>
-                </a:cubicBezTo>
-                <a:close/>
-              </a:path>
-              <a:path w="4243589" h="18288" stroke="0" extrusionOk="0">
-                <a:moveTo>
-                  <a:pt x="0" y="0"/>
-                </a:moveTo>
-                <a:cubicBezTo>
-                  <a:pt x="143690" y="16630"/>
-                  <a:pt x="266667" y="14847"/>
-                  <a:pt x="521355" y="0"/>
-                </a:cubicBezTo>
-                <a:cubicBezTo>
-                  <a:pt x="776043" y="-14847"/>
-                  <a:pt x="814491" y="-17363"/>
-                  <a:pt x="1000275" y="0"/>
-                </a:cubicBezTo>
-                <a:cubicBezTo>
-                  <a:pt x="1186059" y="17363"/>
-                  <a:pt x="1352504" y="-23507"/>
-                  <a:pt x="1521630" y="0"/>
-                </a:cubicBezTo>
-                <a:cubicBezTo>
-                  <a:pt x="1690756" y="23507"/>
-                  <a:pt x="1889525" y="5871"/>
-                  <a:pt x="2127857" y="0"/>
-                </a:cubicBezTo>
-                <a:cubicBezTo>
-                  <a:pt x="2366189" y="-5871"/>
-                  <a:pt x="2620628" y="-27997"/>
-                  <a:pt x="2776520" y="0"/>
-                </a:cubicBezTo>
-                <a:cubicBezTo>
-                  <a:pt x="2932412" y="27997"/>
-                  <a:pt x="3131683" y="-25073"/>
-                  <a:pt x="3467618" y="0"/>
-                </a:cubicBezTo>
-                <a:cubicBezTo>
-                  <a:pt x="3803553" y="25073"/>
-                  <a:pt x="4017371" y="3071"/>
-                  <a:pt x="4243589" y="0"/>
-                </a:cubicBezTo>
-                <a:cubicBezTo>
-                  <a:pt x="4243134" y="6162"/>
-                  <a:pt x="4243492" y="11775"/>
-                  <a:pt x="4243589" y="18288"/>
-                </a:cubicBezTo>
-                <a:cubicBezTo>
-                  <a:pt x="4017834" y="-5779"/>
-                  <a:pt x="3834586" y="13376"/>
-                  <a:pt x="3594926" y="18288"/>
-                </a:cubicBezTo>
-                <a:cubicBezTo>
-                  <a:pt x="3355266" y="23200"/>
-                  <a:pt x="3204179" y="2869"/>
-                  <a:pt x="2903827" y="18288"/>
-                </a:cubicBezTo>
-                <a:cubicBezTo>
-                  <a:pt x="2603475" y="33707"/>
-                  <a:pt x="2526187" y="46187"/>
-                  <a:pt x="2212729" y="18288"/>
-                </a:cubicBezTo>
-                <a:cubicBezTo>
-                  <a:pt x="1899271" y="-9611"/>
-                  <a:pt x="1966289" y="29692"/>
-                  <a:pt x="1733809" y="18288"/>
-                </a:cubicBezTo>
-                <a:cubicBezTo>
-                  <a:pt x="1501329" y="6884"/>
-                  <a:pt x="1343612" y="12492"/>
-                  <a:pt x="1085146" y="18288"/>
-                </a:cubicBezTo>
-                <a:cubicBezTo>
-                  <a:pt x="826680" y="24084"/>
-                  <a:pt x="778184" y="35607"/>
-                  <a:pt x="521355" y="18288"/>
-                </a:cubicBezTo>
-                <a:cubicBezTo>
-                  <a:pt x="264526" y="969"/>
-                  <a:pt x="120277" y="4268"/>
-                  <a:pt x="0" y="18288"/>
-                </a:cubicBezTo>
-                <a:cubicBezTo>
-                  <a:pt x="766" y="10800"/>
-                  <a:pt x="-457" y="8180"/>
-                  <a:pt x="0" y="0"/>
-                </a:cubicBezTo>
-                <a:close/>
-              </a:path>
-            </a:pathLst>
-          </a:custGeom>
-          <a:solidFill>
-            <a:schemeClr val="accent2"/>
-          </a:solidFill>
-          <a:ln w="41275" cap="rnd">
-            <a:solidFill>
-              <a:schemeClr val="accent2"/>
-            </a:solidFill>
-            <a:round/>
-            <a:extLst>
-              <a:ext uri="{C807C97D-BFC1-408E-A445-0C87EB9F89A2}">
-                <ask:lineSketchStyleProps xmlns:ask="http://schemas.microsoft.com/office/drawing/2018/sketchyshapes" sd="2727557108">
-                  <a:prstGeom prst="rect">
-                    <a:avLst/>
-                  </a:prstGeom>
-                  <ask:type>
-                    <ask:lineSketchFreehand/>
-                  </ask:type>
-                </ask:lineSketchStyleProps>
-              </a:ext>
-            </a:extLst>
-          </a:ln>
-        </p:spPr>
-        <p:style>
-          <a:lnRef idx="2">
-            <a:schemeClr val="accent1">
-              <a:shade val="50000"/>
-            </a:schemeClr>
-          </a:lnRef>
-          <a:fillRef idx="1">
-            <a:schemeClr val="accent1"/>
-          </a:fillRef>
-          <a:effectRef idx="0">
-            <a:schemeClr val="accent1"/>
-          </a:effectRef>
-          <a:fontRef idx="minor">
-            <a:schemeClr val="lt1"/>
-          </a:fontRef>
-        </p:style>
-        <p:txBody>
-          <a:bodyPr rtlCol="0" anchor="ctr"/>
-          <a:lstStyle/>
-          <a:p>
-            <a:pPr algn="ctr"/>
-            <a:endParaRPr lang="en-US"/>
-          </a:p>
-        </p:txBody>
-      </p:sp>
-      <p:sp>
-        <p:nvSpPr>
-          <p:cNvPr id="3" name="Content Placeholder 2">
-            <a:extLst>
-              <a:ext uri="{FF2B5EF4-FFF2-40B4-BE49-F238E27FC236}">
-                <a16:creationId xmlns:a16="http://schemas.microsoft.com/office/drawing/2014/main" id="{643EA902-C72C-662E-F56E-3D8E0DF9F48E}"/>
-              </a:ext>
-            </a:extLst>
-          </p:cNvPr>
-          <p:cNvSpPr>
-            <a:spLocks noGrp="1"/>
-          </p:cNvSpPr>
-          <p:nvPr>
-            <p:ph idx="1"/>
-          </p:nvPr>
-        </p:nvSpPr>
-        <p:spPr>
-          <a:xfrm>
-            <a:off x="640080" y="2706624"/>
-            <a:ext cx="6894576" cy="3483864"/>
-          </a:xfrm>
-        </p:spPr>
-        <p:txBody>
-          <a:bodyPr>
-            <a:normAutofit/>
-          </a:bodyPr>
-          <a:lstStyle/>
-          <a:p>
-            <a:r>
-              <a:rPr lang="en-GB" dirty="0"/>
-              <a:t>Neatly organised code: separated Back-end and front-end logic for clarity.(</a:t>
-            </a:r>
-            <a:r>
-              <a:rPr lang="en-GB" b="1" dirty="0"/>
-              <a:t>shown on the right)</a:t>
-            </a:r>
-          </a:p>
-          <a:p>
-            <a:endParaRPr lang="en-GB" sz="2200" b="1" dirty="0"/>
-          </a:p>
-          <a:p>
-            <a:pPr marL="0" indent="0">
-              <a:buNone/>
-            </a:pPr>
-            <a:endParaRPr lang="en-GB" sz="2200" dirty="0"/>
-          </a:p>
-          <a:p>
-            <a:pPr lvl="1"/>
-            <a:endParaRPr lang="en-GB" sz="2200" dirty="0"/>
-          </a:p>
-        </p:txBody>
-      </p:sp>
-      <p:pic>
-        <p:nvPicPr>
-          <p:cNvPr id="8" name="Picture 7">
-            <a:extLst>
-              <a:ext uri="{FF2B5EF4-FFF2-40B4-BE49-F238E27FC236}">
-                <a16:creationId xmlns:a16="http://schemas.microsoft.com/office/drawing/2014/main" id="{88DE4DA1-AA8F-4923-6EC7-53CFB3C9EC5A}"/>
-              </a:ext>
-            </a:extLst>
-          </p:cNvPr>
-          <p:cNvPicPr>
-            <a:picLocks noChangeAspect="1"/>
-          </p:cNvPicPr>
-          <p:nvPr/>
-        </p:nvPicPr>
-        <p:blipFill>
-          <a:blip r:embed="rId2"/>
-          <a:stretch>
-            <a:fillRect/>
-          </a:stretch>
-        </p:blipFill>
-        <p:spPr>
-          <a:xfrm>
-            <a:off x="7863840" y="393321"/>
-            <a:ext cx="4014216" cy="3301692"/>
-          </a:xfrm>
-          <a:prstGeom prst="rect">
-            <a:avLst/>
-          </a:prstGeom>
-        </p:spPr>
-      </p:pic>
-      <p:pic>
-        <p:nvPicPr>
-          <p:cNvPr id="6" name="Picture 5">
-            <a:extLst>
-              <a:ext uri="{FF2B5EF4-FFF2-40B4-BE49-F238E27FC236}">
-                <a16:creationId xmlns:a16="http://schemas.microsoft.com/office/drawing/2014/main" id="{7050DB3F-AD9D-F8F6-2A48-5D11AFF81B8A}"/>
-              </a:ext>
-            </a:extLst>
-          </p:cNvPr>
-          <p:cNvPicPr>
-            <a:picLocks noChangeAspect="1"/>
-          </p:cNvPicPr>
-          <p:nvPr/>
-        </p:nvPicPr>
-        <p:blipFill>
-          <a:blip r:embed="rId3"/>
-          <a:stretch>
-            <a:fillRect/>
-          </a:stretch>
-        </p:blipFill>
-        <p:spPr>
-          <a:xfrm>
-            <a:off x="7863840" y="4373139"/>
-            <a:ext cx="3995928" cy="1588380"/>
-          </a:xfrm>
-          <a:prstGeom prst="rect">
-            <a:avLst/>
-          </a:prstGeom>
-        </p:spPr>
-      </p:pic>
-    </p:spTree>
-    <p:extLst>
-      <p:ext uri="{BB962C8B-B14F-4D97-AF65-F5344CB8AC3E}">
-        <p14:creationId xmlns:p14="http://schemas.microsoft.com/office/powerpoint/2010/main" val="1654054917"/>
-      </p:ext>
-    </p:extLst>
-  </p:cSld>
-  <p:clrMapOvr>
-    <a:masterClrMapping/>
-  </p:clrMapOvr>
-</p:sld>
-</file>
-
-<file path=ppt/slides/slide17.xml><?xml version="1.0" encoding="utf-8"?>
-<p:sld xmlns:a="http://schemas.openxmlformats.org/drawingml/2006/main" xmlns:r="http://schemas.openxmlformats.org/officeDocument/2006/relationships" xmlns:p="http://schemas.openxmlformats.org/presentationml/2006/main">
-  <p:cSld>
-    <p:bg>
-      <p:bgPr>
-        <a:solidFill>
-          <a:schemeClr val="bg1"/>
-        </a:solidFill>
-        <a:effectLst/>
-      </p:bgPr>
-    </p:bg>
-    <p:spTree>
-      <p:nvGrpSpPr>
-        <p:cNvPr id="1" name="">
-          <a:extLst>
-            <a:ext uri="{FF2B5EF4-FFF2-40B4-BE49-F238E27FC236}">
-              <a16:creationId xmlns:a16="http://schemas.microsoft.com/office/drawing/2014/main" id="{791DD22C-ABB5-28E6-66AA-D9FB7BBA0860}"/>
-            </a:ext>
-          </a:extLst>
-        </p:cNvPr>
-        <p:cNvGrpSpPr/>
-        <p:nvPr/>
-      </p:nvGrpSpPr>
-      <p:grpSpPr>
-        <a:xfrm>
-          <a:off x="0" y="0"/>
-          <a:ext cx="0" cy="0"/>
-          <a:chOff x="0" y="0"/>
-          <a:chExt cx="0" cy="0"/>
-        </a:xfrm>
-      </p:grpSpPr>
-      <p:sp useBgFill="1">
-        <p:nvSpPr>
-          <p:cNvPr id="26" name="Rectangle 25">
-            <a:extLst>
-              <a:ext uri="{FF2B5EF4-FFF2-40B4-BE49-F238E27FC236}">
-                <a16:creationId xmlns:a16="http://schemas.microsoft.com/office/drawing/2014/main" id="{352BEC0E-22F8-46D0-9632-375DB541B06C}"/>
-              </a:ext>
-              <a:ext uri="{C183D7F6-B498-43B3-948B-1728B52AA6E4}">
-                <adec:decorative xmlns:adec="http://schemas.microsoft.com/office/drawing/2017/decorative" val="1"/>
-              </a:ext>
-            </a:extLst>
-          </p:cNvPr>
-          <p:cNvSpPr>
-            <a:spLocks noGrp="1" noRot="1" noChangeAspect="1" noMove="1" noResize="1" noEditPoints="1" noAdjustHandles="1" noChangeArrowheads="1" noChangeShapeType="1" noTextEdit="1"/>
-          </p:cNvSpPr>
-          <p:nvPr>
-            <p:extLst>
-              <p:ext uri="{386F3935-93C4-4BCD-93E2-E3B085C9AB24}">
-                <p16:designElem xmlns:p16="http://schemas.microsoft.com/office/powerpoint/2015/main" val="1"/>
-              </p:ext>
-            </p:extLst>
-          </p:nvPr>
-        </p:nvSpPr>
-        <p:spPr>
-          <a:xfrm>
-            <a:off x="0" y="0"/>
-            <a:ext cx="12188952" cy="6858000"/>
-          </a:xfrm>
-          <a:prstGeom prst="rect">
-            <a:avLst/>
-          </a:prstGeom>
-          <a:ln>
-            <a:noFill/>
-          </a:ln>
-        </p:spPr>
-        <p:style>
-          <a:lnRef idx="2">
-            <a:schemeClr val="accent1">
-              <a:shade val="50000"/>
-            </a:schemeClr>
-          </a:lnRef>
-          <a:fillRef idx="1">
-            <a:schemeClr val="accent1"/>
-          </a:fillRef>
-          <a:effectRef idx="0">
-            <a:schemeClr val="accent1"/>
-          </a:effectRef>
-          <a:fontRef idx="minor">
-            <a:schemeClr val="lt1"/>
-          </a:fontRef>
-        </p:style>
-        <p:txBody>
-          <a:bodyPr rtlCol="0" anchor="ctr"/>
-          <a:lstStyle/>
-          <a:p>
-            <a:pPr algn="ctr"/>
-            <a:endParaRPr lang="en-US"/>
-          </a:p>
-        </p:txBody>
-      </p:sp>
-      <p:sp>
-        <p:nvSpPr>
-          <p:cNvPr id="2" name="Title 1">
-            <a:extLst>
-              <a:ext uri="{FF2B5EF4-FFF2-40B4-BE49-F238E27FC236}">
-                <a16:creationId xmlns:a16="http://schemas.microsoft.com/office/drawing/2014/main" id="{1B841E5B-52FA-E506-F325-CC3C660C985C}"/>
-              </a:ext>
-            </a:extLst>
-          </p:cNvPr>
-          <p:cNvSpPr>
-            <a:spLocks noGrp="1"/>
-          </p:cNvSpPr>
-          <p:nvPr>
-            <p:ph type="title"/>
-          </p:nvPr>
-        </p:nvSpPr>
-        <p:spPr>
-          <a:xfrm>
-            <a:off x="640080" y="329184"/>
-            <a:ext cx="6894576" cy="1783080"/>
-          </a:xfrm>
-        </p:spPr>
-        <p:txBody>
-          <a:bodyPr anchor="b">
-            <a:normAutofit/>
-          </a:bodyPr>
-          <a:lstStyle/>
-          <a:p>
-            <a:r>
-              <a:rPr lang="en-GB" sz="5400"/>
-              <a:t>Functionality- Comprehensive APIs</a:t>
-            </a:r>
-          </a:p>
-        </p:txBody>
-      </p:sp>
-      <p:sp>
-        <p:nvSpPr>
-          <p:cNvPr id="27" name="sketch line">
-            <a:extLst>
-              <a:ext uri="{FF2B5EF4-FFF2-40B4-BE49-F238E27FC236}">
-                <a16:creationId xmlns:a16="http://schemas.microsoft.com/office/drawing/2014/main" id="{3FCFB1DE-0B7E-48CC-BA90-B2AB0889F9D6}"/>
-              </a:ext>
-              <a:ext uri="{C183D7F6-B498-43B3-948B-1728B52AA6E4}">
-                <adec:decorative xmlns:adec="http://schemas.microsoft.com/office/drawing/2017/decorative" val="1"/>
-              </a:ext>
-            </a:extLst>
-          </p:cNvPr>
-          <p:cNvSpPr>
-            <a:spLocks noGrp="1" noRot="1" noChangeAspect="1" noMove="1" noResize="1" noEditPoints="1" noAdjustHandles="1" noChangeArrowheads="1" noChangeShapeType="1" noTextEdit="1"/>
-          </p:cNvSpPr>
-          <p:nvPr>
-            <p:extLst>
-              <p:ext uri="{386F3935-93C4-4BCD-93E2-E3B085C9AB24}">
-                <p16:designElem xmlns:p16="http://schemas.microsoft.com/office/powerpoint/2015/main" val="1"/>
-              </p:ext>
-            </p:extLst>
-          </p:nvPr>
-        </p:nvSpPr>
-        <p:spPr>
-          <a:xfrm>
-            <a:off x="758952" y="2395728"/>
-            <a:ext cx="4243589" cy="18288"/>
-          </a:xfrm>
-          <a:custGeom>
-            <a:avLst/>
-            <a:gdLst>
-              <a:gd name="connsiteX0" fmla="*/ 0 w 4243589"/>
-              <a:gd name="connsiteY0" fmla="*/ 0 h 18288"/>
-              <a:gd name="connsiteX1" fmla="*/ 478919 w 4243589"/>
-              <a:gd name="connsiteY1" fmla="*/ 0 h 18288"/>
-              <a:gd name="connsiteX2" fmla="*/ 957839 w 4243589"/>
-              <a:gd name="connsiteY2" fmla="*/ 0 h 18288"/>
-              <a:gd name="connsiteX3" fmla="*/ 1521630 w 4243589"/>
-              <a:gd name="connsiteY3" fmla="*/ 0 h 18288"/>
-              <a:gd name="connsiteX4" fmla="*/ 2212729 w 4243589"/>
-              <a:gd name="connsiteY4" fmla="*/ 0 h 18288"/>
-              <a:gd name="connsiteX5" fmla="*/ 2734084 w 4243589"/>
-              <a:gd name="connsiteY5" fmla="*/ 0 h 18288"/>
-              <a:gd name="connsiteX6" fmla="*/ 3255439 w 4243589"/>
-              <a:gd name="connsiteY6" fmla="*/ 0 h 18288"/>
-              <a:gd name="connsiteX7" fmla="*/ 4243589 w 4243589"/>
-              <a:gd name="connsiteY7" fmla="*/ 0 h 18288"/>
-              <a:gd name="connsiteX8" fmla="*/ 4243589 w 4243589"/>
-              <a:gd name="connsiteY8" fmla="*/ 18288 h 18288"/>
-              <a:gd name="connsiteX9" fmla="*/ 3594926 w 4243589"/>
-              <a:gd name="connsiteY9" fmla="*/ 18288 h 18288"/>
-              <a:gd name="connsiteX10" fmla="*/ 3073571 w 4243589"/>
-              <a:gd name="connsiteY10" fmla="*/ 18288 h 18288"/>
-              <a:gd name="connsiteX11" fmla="*/ 2552216 w 4243589"/>
-              <a:gd name="connsiteY11" fmla="*/ 18288 h 18288"/>
-              <a:gd name="connsiteX12" fmla="*/ 1903553 w 4243589"/>
-              <a:gd name="connsiteY12" fmla="*/ 18288 h 18288"/>
-              <a:gd name="connsiteX13" fmla="*/ 1212454 w 4243589"/>
-              <a:gd name="connsiteY13" fmla="*/ 18288 h 18288"/>
-              <a:gd name="connsiteX14" fmla="*/ 733535 w 4243589"/>
-              <a:gd name="connsiteY14" fmla="*/ 18288 h 18288"/>
-              <a:gd name="connsiteX15" fmla="*/ 0 w 4243589"/>
-              <a:gd name="connsiteY15" fmla="*/ 18288 h 18288"/>
-              <a:gd name="connsiteX16" fmla="*/ 0 w 4243589"/>
-              <a:gd name="connsiteY16" fmla="*/ 0 h 18288"/>
-            </a:gdLst>
-            <a:ahLst/>
-            <a:cxnLst>
-              <a:cxn ang="0">
-                <a:pos x="connsiteX0" y="connsiteY0"/>
-              </a:cxn>
-              <a:cxn ang="0">
-                <a:pos x="connsiteX1" y="connsiteY1"/>
-              </a:cxn>
-              <a:cxn ang="0">
-                <a:pos x="connsiteX2" y="connsiteY2"/>
-              </a:cxn>
-              <a:cxn ang="0">
-                <a:pos x="connsiteX3" y="connsiteY3"/>
-              </a:cxn>
-              <a:cxn ang="0">
-                <a:pos x="connsiteX4" y="connsiteY4"/>
-              </a:cxn>
-              <a:cxn ang="0">
-                <a:pos x="connsiteX5" y="connsiteY5"/>
-              </a:cxn>
-              <a:cxn ang="0">
-                <a:pos x="connsiteX6" y="connsiteY6"/>
-              </a:cxn>
-              <a:cxn ang="0">
-                <a:pos x="connsiteX7" y="connsiteY7"/>
-              </a:cxn>
-              <a:cxn ang="0">
-                <a:pos x="connsiteX8" y="connsiteY8"/>
-              </a:cxn>
-              <a:cxn ang="0">
-                <a:pos x="connsiteX9" y="connsiteY9"/>
-              </a:cxn>
-              <a:cxn ang="0">
-                <a:pos x="connsiteX10" y="connsiteY10"/>
-              </a:cxn>
-              <a:cxn ang="0">
-                <a:pos x="connsiteX11" y="connsiteY11"/>
-              </a:cxn>
-              <a:cxn ang="0">
-                <a:pos x="connsiteX12" y="connsiteY12"/>
-              </a:cxn>
-              <a:cxn ang="0">
-                <a:pos x="connsiteX13" y="connsiteY13"/>
-              </a:cxn>
-              <a:cxn ang="0">
-                <a:pos x="connsiteX14" y="connsiteY14"/>
-              </a:cxn>
-              <a:cxn ang="0">
-                <a:pos x="connsiteX15" y="connsiteY15"/>
-              </a:cxn>
-              <a:cxn ang="0">
-                <a:pos x="connsiteX16" y="connsiteY16"/>
-              </a:cxn>
-            </a:cxnLst>
-            <a:rect l="l" t="t" r="r" b="b"/>
-            <a:pathLst>
-              <a:path w="4243589" h="18288" fill="none" extrusionOk="0">
-                <a:moveTo>
-                  <a:pt x="0" y="0"/>
-                </a:moveTo>
-                <a:cubicBezTo>
-                  <a:pt x="213395" y="-21006"/>
-                  <a:pt x="307421" y="-18116"/>
-                  <a:pt x="478919" y="0"/>
-                </a:cubicBezTo>
-                <a:cubicBezTo>
-                  <a:pt x="650417" y="18116"/>
-                  <a:pt x="831092" y="-21237"/>
-                  <a:pt x="957839" y="0"/>
-                </a:cubicBezTo>
-                <a:cubicBezTo>
-                  <a:pt x="1084586" y="21237"/>
-                  <a:pt x="1301682" y="25124"/>
-                  <a:pt x="1521630" y="0"/>
-                </a:cubicBezTo>
-                <a:cubicBezTo>
-                  <a:pt x="1741578" y="-25124"/>
-                  <a:pt x="1970269" y="-29139"/>
-                  <a:pt x="2212729" y="0"/>
-                </a:cubicBezTo>
-                <a:cubicBezTo>
-                  <a:pt x="2455189" y="29139"/>
-                  <a:pt x="2558847" y="-4796"/>
-                  <a:pt x="2734084" y="0"/>
-                </a:cubicBezTo>
-                <a:cubicBezTo>
-                  <a:pt x="2909321" y="4796"/>
-                  <a:pt x="3097217" y="-13409"/>
-                  <a:pt x="3255439" y="0"/>
-                </a:cubicBezTo>
-                <a:cubicBezTo>
-                  <a:pt x="3413662" y="13409"/>
-                  <a:pt x="3979999" y="-10121"/>
-                  <a:pt x="4243589" y="0"/>
-                </a:cubicBezTo>
-                <a:cubicBezTo>
-                  <a:pt x="4244484" y="8974"/>
-                  <a:pt x="4243043" y="9359"/>
-                  <a:pt x="4243589" y="18288"/>
-                </a:cubicBezTo>
-                <a:cubicBezTo>
-                  <a:pt x="4058777" y="31246"/>
-                  <a:pt x="3910348" y="3158"/>
-                  <a:pt x="3594926" y="18288"/>
-                </a:cubicBezTo>
-                <a:cubicBezTo>
-                  <a:pt x="3279504" y="33418"/>
-                  <a:pt x="3319955" y="-3977"/>
-                  <a:pt x="3073571" y="18288"/>
-                </a:cubicBezTo>
-                <a:cubicBezTo>
-                  <a:pt x="2827187" y="40553"/>
-                  <a:pt x="2767387" y="1863"/>
-                  <a:pt x="2552216" y="18288"/>
-                </a:cubicBezTo>
-                <a:cubicBezTo>
-                  <a:pt x="2337046" y="34713"/>
-                  <a:pt x="2181871" y="19527"/>
-                  <a:pt x="1903553" y="18288"/>
-                </a:cubicBezTo>
-                <a:cubicBezTo>
-                  <a:pt x="1625235" y="17049"/>
-                  <a:pt x="1557672" y="24174"/>
-                  <a:pt x="1212454" y="18288"/>
-                </a:cubicBezTo>
-                <a:cubicBezTo>
-                  <a:pt x="867236" y="12402"/>
-                  <a:pt x="874382" y="15627"/>
-                  <a:pt x="733535" y="18288"/>
-                </a:cubicBezTo>
-                <a:cubicBezTo>
-                  <a:pt x="592688" y="20949"/>
-                  <a:pt x="183477" y="14753"/>
-                  <a:pt x="0" y="18288"/>
-                </a:cubicBezTo>
-                <a:cubicBezTo>
-                  <a:pt x="-229" y="14222"/>
-                  <a:pt x="509" y="5816"/>
-                  <a:pt x="0" y="0"/>
-                </a:cubicBezTo>
-                <a:close/>
-              </a:path>
-              <a:path w="4243589" h="18288" stroke="0" extrusionOk="0">
-                <a:moveTo>
-                  <a:pt x="0" y="0"/>
-                </a:moveTo>
-                <a:cubicBezTo>
-                  <a:pt x="143690" y="16630"/>
-                  <a:pt x="266667" y="14847"/>
-                  <a:pt x="521355" y="0"/>
-                </a:cubicBezTo>
-                <a:cubicBezTo>
-                  <a:pt x="776043" y="-14847"/>
-                  <a:pt x="814491" y="-17363"/>
-                  <a:pt x="1000275" y="0"/>
-                </a:cubicBezTo>
-                <a:cubicBezTo>
-                  <a:pt x="1186059" y="17363"/>
-                  <a:pt x="1352504" y="-23507"/>
-                  <a:pt x="1521630" y="0"/>
-                </a:cubicBezTo>
-                <a:cubicBezTo>
-                  <a:pt x="1690756" y="23507"/>
-                  <a:pt x="1889525" y="5871"/>
-                  <a:pt x="2127857" y="0"/>
-                </a:cubicBezTo>
-                <a:cubicBezTo>
-                  <a:pt x="2366189" y="-5871"/>
-                  <a:pt x="2620628" y="-27997"/>
-                  <a:pt x="2776520" y="0"/>
-                </a:cubicBezTo>
-                <a:cubicBezTo>
-                  <a:pt x="2932412" y="27997"/>
-                  <a:pt x="3131683" y="-25073"/>
-                  <a:pt x="3467618" y="0"/>
-                </a:cubicBezTo>
-                <a:cubicBezTo>
-                  <a:pt x="3803553" y="25073"/>
-                  <a:pt x="4017371" y="3071"/>
-                  <a:pt x="4243589" y="0"/>
-                </a:cubicBezTo>
-                <a:cubicBezTo>
-                  <a:pt x="4243134" y="6162"/>
-                  <a:pt x="4243492" y="11775"/>
-                  <a:pt x="4243589" y="18288"/>
-                </a:cubicBezTo>
-                <a:cubicBezTo>
-                  <a:pt x="4017834" y="-5779"/>
-                  <a:pt x="3834586" y="13376"/>
-                  <a:pt x="3594926" y="18288"/>
-                </a:cubicBezTo>
-                <a:cubicBezTo>
-                  <a:pt x="3355266" y="23200"/>
-                  <a:pt x="3204179" y="2869"/>
-                  <a:pt x="2903827" y="18288"/>
-                </a:cubicBezTo>
-                <a:cubicBezTo>
-                  <a:pt x="2603475" y="33707"/>
-                  <a:pt x="2526187" y="46187"/>
-                  <a:pt x="2212729" y="18288"/>
-                </a:cubicBezTo>
-                <a:cubicBezTo>
-                  <a:pt x="1899271" y="-9611"/>
-                  <a:pt x="1966289" y="29692"/>
-                  <a:pt x="1733809" y="18288"/>
-                </a:cubicBezTo>
-                <a:cubicBezTo>
-                  <a:pt x="1501329" y="6884"/>
-                  <a:pt x="1343612" y="12492"/>
-                  <a:pt x="1085146" y="18288"/>
-                </a:cubicBezTo>
-                <a:cubicBezTo>
-                  <a:pt x="826680" y="24084"/>
-                  <a:pt x="778184" y="35607"/>
-                  <a:pt x="521355" y="18288"/>
-                </a:cubicBezTo>
-                <a:cubicBezTo>
-                  <a:pt x="264526" y="969"/>
-                  <a:pt x="120277" y="4268"/>
-                  <a:pt x="0" y="18288"/>
-                </a:cubicBezTo>
-                <a:cubicBezTo>
-                  <a:pt x="766" y="10800"/>
-                  <a:pt x="-457" y="8180"/>
-                  <a:pt x="0" y="0"/>
-                </a:cubicBezTo>
-                <a:close/>
-              </a:path>
-            </a:pathLst>
-          </a:custGeom>
-          <a:solidFill>
-            <a:schemeClr val="accent2"/>
-          </a:solidFill>
-          <a:ln w="41275" cap="rnd">
-            <a:solidFill>
-              <a:schemeClr val="accent2"/>
-            </a:solidFill>
-            <a:round/>
-            <a:extLst>
-              <a:ext uri="{C807C97D-BFC1-408E-A445-0C87EB9F89A2}">
-                <ask:lineSketchStyleProps xmlns:ask="http://schemas.microsoft.com/office/drawing/2018/sketchyshapes" sd="2727557108">
-                  <a:prstGeom prst="rect">
-                    <a:avLst/>
-                  </a:prstGeom>
-                  <ask:type>
-                    <ask:lineSketchFreehand/>
-                  </ask:type>
-                </ask:lineSketchStyleProps>
-              </a:ext>
-            </a:extLst>
-          </a:ln>
-        </p:spPr>
-        <p:style>
-          <a:lnRef idx="2">
-            <a:schemeClr val="accent1">
-              <a:shade val="50000"/>
-            </a:schemeClr>
-          </a:lnRef>
-          <a:fillRef idx="1">
-            <a:schemeClr val="accent1"/>
-          </a:fillRef>
-          <a:effectRef idx="0">
-            <a:schemeClr val="accent1"/>
-          </a:effectRef>
-          <a:fontRef idx="minor">
-            <a:schemeClr val="lt1"/>
-          </a:fontRef>
-        </p:style>
-        <p:txBody>
-          <a:bodyPr rtlCol="0" anchor="ctr"/>
-          <a:lstStyle/>
-          <a:p>
-            <a:pPr algn="ctr"/>
-            <a:endParaRPr lang="en-US"/>
-          </a:p>
-        </p:txBody>
-      </p:sp>
-      <p:sp>
-        <p:nvSpPr>
-          <p:cNvPr id="3" name="Content Placeholder 2">
-            <a:extLst>
-              <a:ext uri="{FF2B5EF4-FFF2-40B4-BE49-F238E27FC236}">
-                <a16:creationId xmlns:a16="http://schemas.microsoft.com/office/drawing/2014/main" id="{765ADE50-96FC-02E2-9EB9-232B259EAF84}"/>
-              </a:ext>
-            </a:extLst>
-          </p:cNvPr>
-          <p:cNvSpPr>
-            <a:spLocks noGrp="1"/>
-          </p:cNvSpPr>
-          <p:nvPr>
-            <p:ph idx="1"/>
-          </p:nvPr>
-        </p:nvSpPr>
-        <p:spPr>
-          <a:xfrm>
-            <a:off x="640080" y="2706624"/>
-            <a:ext cx="6894576" cy="3483864"/>
-          </a:xfrm>
-        </p:spPr>
-        <p:txBody>
-          <a:bodyPr>
-            <a:normAutofit/>
-          </a:bodyPr>
-          <a:lstStyle/>
-          <a:p>
-            <a:r>
-              <a:rPr lang="en-GB" sz="2200" dirty="0"/>
-              <a:t>Gemini chatbot Api:</a:t>
-            </a:r>
-          </a:p>
-          <a:p>
-            <a:pPr lvl="1"/>
-            <a:r>
-              <a:rPr lang="en-GB" sz="2200" dirty="0"/>
-              <a:t>Used googles Gemini chatbot to answer any questions that a user may have on eco –friendly practices or information</a:t>
-            </a:r>
-          </a:p>
-        </p:txBody>
-      </p:sp>
-      <p:pic>
-        <p:nvPicPr>
-          <p:cNvPr id="11" name="Picture 10">
-            <a:extLst>
-              <a:ext uri="{FF2B5EF4-FFF2-40B4-BE49-F238E27FC236}">
-                <a16:creationId xmlns:a16="http://schemas.microsoft.com/office/drawing/2014/main" id="{C1C625DD-1F71-3E6C-58ED-F0A07ACCA5DD}"/>
-              </a:ext>
-            </a:extLst>
-          </p:cNvPr>
-          <p:cNvPicPr>
-            <a:picLocks noChangeAspect="1"/>
-          </p:cNvPicPr>
-          <p:nvPr/>
-        </p:nvPicPr>
-        <p:blipFill>
-          <a:blip r:embed="rId2"/>
-          <a:stretch>
-            <a:fillRect/>
-          </a:stretch>
-        </p:blipFill>
-        <p:spPr>
-          <a:xfrm>
-            <a:off x="7641164" y="1002283"/>
-            <a:ext cx="4414644" cy="5659800"/>
-          </a:xfrm>
-          <a:prstGeom prst="rect">
-            <a:avLst/>
-          </a:prstGeom>
-        </p:spPr>
-      </p:pic>
-      <p:pic>
-        <p:nvPicPr>
-          <p:cNvPr id="6" name="Picture 5">
-            <a:extLst>
-              <a:ext uri="{FF2B5EF4-FFF2-40B4-BE49-F238E27FC236}">
-                <a16:creationId xmlns:a16="http://schemas.microsoft.com/office/drawing/2014/main" id="{354B977D-7CD9-42F8-8E0C-0FBAA1E1C32B}"/>
-              </a:ext>
-            </a:extLst>
-          </p:cNvPr>
-          <p:cNvPicPr>
-            <a:picLocks noChangeAspect="1"/>
-          </p:cNvPicPr>
-          <p:nvPr/>
-        </p:nvPicPr>
-        <p:blipFill>
-          <a:blip r:embed="rId3"/>
-          <a:stretch>
-            <a:fillRect/>
-          </a:stretch>
-        </p:blipFill>
-        <p:spPr>
-          <a:xfrm>
-            <a:off x="303784" y="4245356"/>
-            <a:ext cx="7204236" cy="2539492"/>
-          </a:xfrm>
-          <a:prstGeom prst="rect">
-            <a:avLst/>
-          </a:prstGeom>
-        </p:spPr>
-      </p:pic>
-    </p:spTree>
-    <p:extLst>
-      <p:ext uri="{BB962C8B-B14F-4D97-AF65-F5344CB8AC3E}">
-        <p14:creationId xmlns:p14="http://schemas.microsoft.com/office/powerpoint/2010/main" val="3248953183"/>
-      </p:ext>
-    </p:extLst>
-  </p:cSld>
-  <p:clrMapOvr>
-    <a:masterClrMapping/>
-  </p:clrMapOvr>
-</p:sld>
-</file>
-
-<file path=ppt/slides/slide18.xml><?xml version="1.0" encoding="utf-8"?>
-<p:sld xmlns:a="http://schemas.openxmlformats.org/drawingml/2006/main" xmlns:r="http://schemas.openxmlformats.org/officeDocument/2006/relationships" xmlns:p="http://schemas.openxmlformats.org/presentationml/2006/main">
-  <p:cSld>
     <p:bg>
       <p:bgPr>
         <a:solidFill>
@@ -7363,7 +3991,7 @@
 </p:sld>
 </file>
 
-<file path=ppt/slides/slide19.xml><?xml version="1.0" encoding="utf-8"?>
+<file path=ppt/slides/slide11.xml><?xml version="1.0" encoding="utf-8"?>
 <p:sld xmlns:a="http://schemas.openxmlformats.org/drawingml/2006/main" xmlns:r="http://schemas.openxmlformats.org/officeDocument/2006/relationships" xmlns:p="http://schemas.openxmlformats.org/presentationml/2006/main">
   <p:cSld>
     <p:bg>
@@ -7880,78 +4508,7 @@
 </p:sld>
 </file>
 
-<file path=ppt/slides/slide2.xml><?xml version="1.0" encoding="utf-8"?>
-<p:sld xmlns:a="http://schemas.openxmlformats.org/drawingml/2006/main" xmlns:r="http://schemas.openxmlformats.org/officeDocument/2006/relationships" xmlns:p="http://schemas.openxmlformats.org/presentationml/2006/main">
-  <p:cSld>
-    <p:spTree>
-      <p:nvGrpSpPr>
-        <p:cNvPr id="1" name="">
-          <a:extLst>
-            <a:ext uri="{FF2B5EF4-FFF2-40B4-BE49-F238E27FC236}">
-              <a16:creationId xmlns:a16="http://schemas.microsoft.com/office/drawing/2014/main" id="{7C813103-ED5F-3EFB-E1C9-3CE0C2F1F12E}"/>
-            </a:ext>
-          </a:extLst>
-        </p:cNvPr>
-        <p:cNvGrpSpPr/>
-        <p:nvPr/>
-      </p:nvGrpSpPr>
-      <p:grpSpPr>
-        <a:xfrm>
-          <a:off x="0" y="0"/>
-          <a:ext cx="0" cy="0"/>
-          <a:chOff x="0" y="0"/>
-          <a:chExt cx="0" cy="0"/>
-        </a:xfrm>
-      </p:grpSpPr>
-      <p:sp>
-        <p:nvSpPr>
-          <p:cNvPr id="2" name="Title 1">
-            <a:extLst>
-              <a:ext uri="{FF2B5EF4-FFF2-40B4-BE49-F238E27FC236}">
-                <a16:creationId xmlns:a16="http://schemas.microsoft.com/office/drawing/2014/main" id="{CB4BE665-C299-3E7F-88AA-69313A02B2BD}"/>
-              </a:ext>
-            </a:extLst>
-          </p:cNvPr>
-          <p:cNvSpPr>
-            <a:spLocks noGrp="1"/>
-          </p:cNvSpPr>
-          <p:nvPr>
-            <p:ph type="title"/>
-          </p:nvPr>
-        </p:nvSpPr>
-        <p:spPr>
-          <a:xfrm>
-            <a:off x="313944" y="473533"/>
-            <a:ext cx="6894576" cy="778764"/>
-          </a:xfrm>
-        </p:spPr>
-        <p:txBody>
-          <a:bodyPr anchor="b">
-            <a:normAutofit fontScale="90000"/>
-          </a:bodyPr>
-          <a:lstStyle/>
-          <a:p>
-            <a:r>
-              <a:rPr lang="en-GB" sz="5400" dirty="0"/>
-              <a:t>Website run through</a:t>
-            </a:r>
-          </a:p>
-        </p:txBody>
-      </p:sp>
-    </p:spTree>
-    <p:extLst>
-      <p:ext uri="{BB962C8B-B14F-4D97-AF65-F5344CB8AC3E}">
-        <p14:creationId xmlns:p14="http://schemas.microsoft.com/office/powerpoint/2010/main" val="1449995653"/>
-      </p:ext>
-    </p:extLst>
-  </p:cSld>
-  <p:clrMapOvr>
-    <a:masterClrMapping/>
-  </p:clrMapOvr>
-</p:sld>
-</file>
-
-<file path=ppt/slides/slide20.xml><?xml version="1.0" encoding="utf-8"?>
+<file path=ppt/slides/slide12.xml><?xml version="1.0" encoding="utf-8"?>
 <p:sld xmlns:a="http://schemas.openxmlformats.org/drawingml/2006/main" xmlns:r="http://schemas.openxmlformats.org/officeDocument/2006/relationships" xmlns:p="http://schemas.openxmlformats.org/presentationml/2006/main">
   <p:cSld>
     <p:bg>
@@ -8589,7 +5146,7 @@
 </p:sld>
 </file>
 
-<file path=ppt/slides/slide21.xml><?xml version="1.0" encoding="utf-8"?>
+<file path=ppt/slides/slide13.xml><?xml version="1.0" encoding="utf-8"?>
 <p:sld xmlns:a="http://schemas.openxmlformats.org/drawingml/2006/main" xmlns:r="http://schemas.openxmlformats.org/officeDocument/2006/relationships" xmlns:p="http://schemas.openxmlformats.org/presentationml/2006/main">
   <p:cSld>
     <p:bg>
@@ -9191,7 +5748,7 @@
 </p:sld>
 </file>
 
-<file path=ppt/slides/slide22.xml><?xml version="1.0" encoding="utf-8"?>
+<file path=ppt/slides/slide14.xml><?xml version="1.0" encoding="utf-8"?>
 <p:sld xmlns:a="http://schemas.openxmlformats.org/drawingml/2006/main" xmlns:r="http://schemas.openxmlformats.org/officeDocument/2006/relationships" xmlns:p="http://schemas.openxmlformats.org/presentationml/2006/main">
   <p:cSld>
     <p:bg>
@@ -9783,7 +6340,7 @@
 </p:sld>
 </file>
 
-<file path=ppt/slides/slide23.xml><?xml version="1.0" encoding="utf-8"?>
+<file path=ppt/slides/slide15.xml><?xml version="1.0" encoding="utf-8"?>
 <p:sld xmlns:a="http://schemas.openxmlformats.org/drawingml/2006/main" xmlns:r="http://schemas.openxmlformats.org/officeDocument/2006/relationships" xmlns:p="http://schemas.openxmlformats.org/presentationml/2006/main">
   <p:cSld>
     <p:bg>
@@ -10649,7 +7206,7 @@
 </p:sld>
 </file>
 
-<file path=ppt/slides/slide24.xml><?xml version="1.0" encoding="utf-8"?>
+<file path=ppt/slides/slide16.xml><?xml version="1.0" encoding="utf-8"?>
 <p:sld xmlns:a="http://schemas.openxmlformats.org/drawingml/2006/main" xmlns:r="http://schemas.openxmlformats.org/officeDocument/2006/relationships" xmlns:p="http://schemas.openxmlformats.org/presentationml/2006/main">
   <p:cSld>
     <p:bg>
@@ -11142,7 +7699,7 @@
 </p:sld>
 </file>
 
-<file path=ppt/slides/slide25.xml><?xml version="1.0" encoding="utf-8"?>
+<file path=ppt/slides/slide17.xml><?xml version="1.0" encoding="utf-8"?>
 <p:sld xmlns:a="http://schemas.openxmlformats.org/drawingml/2006/main" xmlns:r="http://schemas.openxmlformats.org/officeDocument/2006/relationships" xmlns:p="http://schemas.openxmlformats.org/presentationml/2006/main">
   <p:cSld>
     <p:bg>
@@ -11623,7 +8180,7 @@
 </p:sld>
 </file>
 
-<file path=ppt/slides/slide26.xml><?xml version="1.0" encoding="utf-8"?>
+<file path=ppt/slides/slide18.xml><?xml version="1.0" encoding="utf-8"?>
 <p:sld xmlns:a="http://schemas.openxmlformats.org/drawingml/2006/main" xmlns:r="http://schemas.openxmlformats.org/officeDocument/2006/relationships" xmlns:p="http://schemas.openxmlformats.org/presentationml/2006/main">
   <p:cSld>
     <p:bg>
@@ -12588,13 +9145,9 @@
                     <a:p>
                       <a:r>
                         <a:rPr lang="en-GB" sz="1400" dirty="0"/>
-                        <a:t>Used edge cases like year 9999 and number or installations 11 to </a:t>
+                        <a:t>Used edge cases like year 9999 and number or installations 11 to test robustness</a:t>
                       </a:r>
-                      <a:r>
-                        <a:rPr lang="en-GB" sz="1400"/>
-                        <a:t>test robustness</a:t>
-                      </a:r>
-                      <a:endParaRPr lang="en-GB" sz="1300" b="0">
+                      <a:endParaRPr lang="en-GB" sz="1300" b="0" dirty="0">
                         <a:latin typeface="+mn-lt"/>
                       </a:endParaRPr>
                     </a:p>
@@ -12961,7 +9514,7 @@
 </p:sld>
 </file>
 
-<file path=ppt/slides/slide27.xml><?xml version="1.0" encoding="utf-8"?>
+<file path=ppt/slides/slide19.xml><?xml version="1.0" encoding="utf-8"?>
 <p:sld xmlns:a="http://schemas.openxmlformats.org/drawingml/2006/main" xmlns:r="http://schemas.openxmlformats.org/officeDocument/2006/relationships" xmlns:p="http://schemas.openxmlformats.org/presentationml/2006/main">
   <p:cSld>
     <p:bg>
@@ -14145,7 +10698,7 @@
 </p:sld>
 </file>
 
-<file path=ppt/slides/slide3.xml><?xml version="1.0" encoding="utf-8"?>
+<file path=ppt/slides/slide2.xml><?xml version="1.0" encoding="utf-8"?>
 <p:sld xmlns:a="http://schemas.openxmlformats.org/drawingml/2006/main" xmlns:r="http://schemas.openxmlformats.org/officeDocument/2006/relationships" xmlns:p="http://schemas.openxmlformats.org/presentationml/2006/main">
   <p:cSld>
     <p:spTree>
@@ -14153,7 +10706,7 @@
         <p:cNvPr id="1" name="">
           <a:extLst>
             <a:ext uri="{FF2B5EF4-FFF2-40B4-BE49-F238E27FC236}">
-              <a16:creationId xmlns:a16="http://schemas.microsoft.com/office/drawing/2014/main" id="{765ACFFF-292A-6BC3-B5FE-FAC285B8A0C0}"/>
+              <a16:creationId xmlns:a16="http://schemas.microsoft.com/office/drawing/2014/main" id="{7C813103-ED5F-3EFB-E1C9-3CE0C2F1F12E}"/>
             </a:ext>
           </a:extLst>
         </p:cNvPr>
@@ -14173,7 +10726,1173 @@
           <p:cNvPr id="2" name="Title 1">
             <a:extLst>
               <a:ext uri="{FF2B5EF4-FFF2-40B4-BE49-F238E27FC236}">
-                <a16:creationId xmlns:a16="http://schemas.microsoft.com/office/drawing/2014/main" id="{F99E36E1-6E1A-2365-ACF5-8214C1F8C18F}"/>
+                <a16:creationId xmlns:a16="http://schemas.microsoft.com/office/drawing/2014/main" id="{CB4BE665-C299-3E7F-88AA-69313A02B2BD}"/>
+              </a:ext>
+            </a:extLst>
+          </p:cNvPr>
+          <p:cNvSpPr>
+            <a:spLocks noGrp="1"/>
+          </p:cNvSpPr>
+          <p:nvPr>
+            <p:ph type="title"/>
+          </p:nvPr>
+        </p:nvSpPr>
+        <p:spPr>
+          <a:xfrm>
+            <a:off x="313944" y="473533"/>
+            <a:ext cx="6894576" cy="778764"/>
+          </a:xfrm>
+        </p:spPr>
+        <p:txBody>
+          <a:bodyPr anchor="b">
+            <a:normAutofit fontScale="90000"/>
+          </a:bodyPr>
+          <a:lstStyle/>
+          <a:p>
+            <a:r>
+              <a:rPr lang="en-GB" sz="5400" dirty="0"/>
+              <a:t>Website run through</a:t>
+            </a:r>
+          </a:p>
+        </p:txBody>
+      </p:sp>
+    </p:spTree>
+    <p:extLst>
+      <p:ext uri="{BB962C8B-B14F-4D97-AF65-F5344CB8AC3E}">
+        <p14:creationId xmlns:p14="http://schemas.microsoft.com/office/powerpoint/2010/main" val="1449995653"/>
+      </p:ext>
+    </p:extLst>
+  </p:cSld>
+  <p:clrMapOvr>
+    <a:masterClrMapping/>
+  </p:clrMapOvr>
+</p:sld>
+</file>
+
+<file path=ppt/slides/slide3.xml><?xml version="1.0" encoding="utf-8"?>
+<p:sld xmlns:a="http://schemas.openxmlformats.org/drawingml/2006/main" xmlns:r="http://schemas.openxmlformats.org/officeDocument/2006/relationships" xmlns:p="http://schemas.openxmlformats.org/presentationml/2006/main">
+  <p:cSld>
+    <p:bg>
+      <p:bgPr>
+        <a:solidFill>
+          <a:schemeClr val="bg1"/>
+        </a:solidFill>
+        <a:effectLst/>
+      </p:bgPr>
+    </p:bg>
+    <p:spTree>
+      <p:nvGrpSpPr>
+        <p:cNvPr id="1" name=""/>
+        <p:cNvGrpSpPr/>
+        <p:nvPr/>
+      </p:nvGrpSpPr>
+      <p:grpSpPr>
+        <a:xfrm>
+          <a:off x="0" y="0"/>
+          <a:ext cx="0" cy="0"/>
+          <a:chOff x="0" y="0"/>
+          <a:chExt cx="0" cy="0"/>
+        </a:xfrm>
+      </p:grpSpPr>
+      <p:sp useBgFill="1">
+        <p:nvSpPr>
+          <p:cNvPr id="8" name="Rectangle 7">
+            <a:extLst>
+              <a:ext uri="{FF2B5EF4-FFF2-40B4-BE49-F238E27FC236}">
+                <a16:creationId xmlns:a16="http://schemas.microsoft.com/office/drawing/2014/main" id="{943CAA20-3569-4189-9E48-239A229A86CA}"/>
+              </a:ext>
+              <a:ext uri="{C183D7F6-B498-43B3-948B-1728B52AA6E4}">
+                <adec:decorative xmlns:adec="http://schemas.microsoft.com/office/drawing/2017/decorative" val="1"/>
+              </a:ext>
+            </a:extLst>
+          </p:cNvPr>
+          <p:cNvSpPr>
+            <a:spLocks noGrp="1" noRot="1" noChangeAspect="1" noMove="1" noResize="1" noEditPoints="1" noAdjustHandles="1" noChangeArrowheads="1" noChangeShapeType="1" noTextEdit="1"/>
+          </p:cNvSpPr>
+          <p:nvPr>
+            <p:extLst>
+              <p:ext uri="{386F3935-93C4-4BCD-93E2-E3B085C9AB24}">
+                <p16:designElem xmlns:p16="http://schemas.microsoft.com/office/powerpoint/2015/main" val="1"/>
+              </p:ext>
+            </p:extLst>
+          </p:nvPr>
+        </p:nvSpPr>
+        <p:spPr>
+          <a:xfrm>
+            <a:off x="0" y="0"/>
+            <a:ext cx="12188952" cy="6858000"/>
+          </a:xfrm>
+          <a:prstGeom prst="rect">
+            <a:avLst/>
+          </a:prstGeom>
+          <a:ln>
+            <a:noFill/>
+          </a:ln>
+        </p:spPr>
+        <p:style>
+          <a:lnRef idx="2">
+            <a:schemeClr val="accent1">
+              <a:shade val="50000"/>
+            </a:schemeClr>
+          </a:lnRef>
+          <a:fillRef idx="1">
+            <a:schemeClr val="accent1"/>
+          </a:fillRef>
+          <a:effectRef idx="0">
+            <a:schemeClr val="accent1"/>
+          </a:effectRef>
+          <a:fontRef idx="minor">
+            <a:schemeClr val="lt1"/>
+          </a:fontRef>
+        </p:style>
+        <p:txBody>
+          <a:bodyPr rtlCol="0" anchor="ctr"/>
+          <a:lstStyle/>
+          <a:p>
+            <a:pPr algn="ctr"/>
+            <a:endParaRPr lang="en-US"/>
+          </a:p>
+        </p:txBody>
+      </p:sp>
+      <p:sp>
+        <p:nvSpPr>
+          <p:cNvPr id="2" name="Title 1">
+            <a:extLst>
+              <a:ext uri="{FF2B5EF4-FFF2-40B4-BE49-F238E27FC236}">
+                <a16:creationId xmlns:a16="http://schemas.microsoft.com/office/drawing/2014/main" id="{A01EFF67-C608-A661-E5FC-D997913114A2}"/>
+              </a:ext>
+            </a:extLst>
+          </p:cNvPr>
+          <p:cNvSpPr>
+            <a:spLocks noGrp="1"/>
+          </p:cNvSpPr>
+          <p:nvPr>
+            <p:ph type="ctrTitle"/>
+          </p:nvPr>
+        </p:nvSpPr>
+        <p:spPr>
+          <a:xfrm>
+            <a:off x="838200" y="451381"/>
+            <a:ext cx="10512552" cy="4066540"/>
+          </a:xfrm>
+        </p:spPr>
+        <p:txBody>
+          <a:bodyPr anchor="b">
+            <a:normAutofit/>
+          </a:bodyPr>
+          <a:lstStyle/>
+          <a:p>
+            <a:pPr algn="l"/>
+            <a:r>
+              <a:rPr lang="en-GB" sz="6600"/>
+              <a:t>Functionality</a:t>
+            </a:r>
+            <a:endParaRPr lang="en-GB" sz="6600" dirty="0"/>
+          </a:p>
+        </p:txBody>
+      </p:sp>
+      <p:sp>
+        <p:nvSpPr>
+          <p:cNvPr id="3" name="Subtitle 2">
+            <a:extLst>
+              <a:ext uri="{FF2B5EF4-FFF2-40B4-BE49-F238E27FC236}">
+                <a16:creationId xmlns:a16="http://schemas.microsoft.com/office/drawing/2014/main" id="{58337BB5-8CC9-E68E-BA23-DC96A633E804}"/>
+              </a:ext>
+            </a:extLst>
+          </p:cNvPr>
+          <p:cNvSpPr>
+            <a:spLocks noGrp="1"/>
+          </p:cNvSpPr>
+          <p:nvPr>
+            <p:ph type="subTitle" idx="1"/>
+          </p:nvPr>
+        </p:nvSpPr>
+        <p:spPr>
+          <a:xfrm>
+            <a:off x="838199" y="4983276"/>
+            <a:ext cx="10512552" cy="1126680"/>
+          </a:xfrm>
+        </p:spPr>
+        <p:txBody>
+          <a:bodyPr>
+            <a:normAutofit/>
+          </a:bodyPr>
+          <a:lstStyle/>
+          <a:p>
+            <a:pPr algn="l"/>
+            <a:endParaRPr lang="en-GB"/>
+          </a:p>
+        </p:txBody>
+      </p:sp>
+      <p:sp>
+        <p:nvSpPr>
+          <p:cNvPr id="10" name="sketch line">
+            <a:extLst>
+              <a:ext uri="{FF2B5EF4-FFF2-40B4-BE49-F238E27FC236}">
+                <a16:creationId xmlns:a16="http://schemas.microsoft.com/office/drawing/2014/main" id="{DA542B6D-E775-4832-91DC-2D20F857813A}"/>
+              </a:ext>
+              <a:ext uri="{C183D7F6-B498-43B3-948B-1728B52AA6E4}">
+                <adec:decorative xmlns:adec="http://schemas.microsoft.com/office/drawing/2017/decorative" val="1"/>
+              </a:ext>
+            </a:extLst>
+          </p:cNvPr>
+          <p:cNvSpPr>
+            <a:spLocks noGrp="1" noRot="1" noChangeAspect="1" noMove="1" noResize="1" noEditPoints="1" noAdjustHandles="1" noChangeArrowheads="1" noChangeShapeType="1" noTextEdit="1"/>
+          </p:cNvSpPr>
+          <p:nvPr>
+            <p:extLst>
+              <p:ext uri="{386F3935-93C4-4BCD-93E2-E3B085C9AB24}">
+                <p16:designElem xmlns:p16="http://schemas.microsoft.com/office/powerpoint/2015/main" val="1"/>
+              </p:ext>
+            </p:extLst>
+          </p:nvPr>
+        </p:nvSpPr>
+        <p:spPr>
+          <a:xfrm>
+            <a:off x="838200" y="4718595"/>
+            <a:ext cx="5410200" cy="18288"/>
+          </a:xfrm>
+          <a:custGeom>
+            <a:avLst/>
+            <a:gdLst>
+              <a:gd name="connsiteX0" fmla="*/ 0 w 5410200"/>
+              <a:gd name="connsiteY0" fmla="*/ 0 h 18288"/>
+              <a:gd name="connsiteX1" fmla="*/ 568071 w 5410200"/>
+              <a:gd name="connsiteY1" fmla="*/ 0 h 18288"/>
+              <a:gd name="connsiteX2" fmla="*/ 1298448 w 5410200"/>
+              <a:gd name="connsiteY2" fmla="*/ 0 h 18288"/>
+              <a:gd name="connsiteX3" fmla="*/ 1920621 w 5410200"/>
+              <a:gd name="connsiteY3" fmla="*/ 0 h 18288"/>
+              <a:gd name="connsiteX4" fmla="*/ 2488692 w 5410200"/>
+              <a:gd name="connsiteY4" fmla="*/ 0 h 18288"/>
+              <a:gd name="connsiteX5" fmla="*/ 3219069 w 5410200"/>
+              <a:gd name="connsiteY5" fmla="*/ 0 h 18288"/>
+              <a:gd name="connsiteX6" fmla="*/ 3895344 w 5410200"/>
+              <a:gd name="connsiteY6" fmla="*/ 0 h 18288"/>
+              <a:gd name="connsiteX7" fmla="*/ 4571619 w 5410200"/>
+              <a:gd name="connsiteY7" fmla="*/ 0 h 18288"/>
+              <a:gd name="connsiteX8" fmla="*/ 5410200 w 5410200"/>
+              <a:gd name="connsiteY8" fmla="*/ 0 h 18288"/>
+              <a:gd name="connsiteX9" fmla="*/ 5410200 w 5410200"/>
+              <a:gd name="connsiteY9" fmla="*/ 18288 h 18288"/>
+              <a:gd name="connsiteX10" fmla="*/ 4842129 w 5410200"/>
+              <a:gd name="connsiteY10" fmla="*/ 18288 h 18288"/>
+              <a:gd name="connsiteX11" fmla="*/ 4328160 w 5410200"/>
+              <a:gd name="connsiteY11" fmla="*/ 18288 h 18288"/>
+              <a:gd name="connsiteX12" fmla="*/ 3597783 w 5410200"/>
+              <a:gd name="connsiteY12" fmla="*/ 18288 h 18288"/>
+              <a:gd name="connsiteX13" fmla="*/ 3029712 w 5410200"/>
+              <a:gd name="connsiteY13" fmla="*/ 18288 h 18288"/>
+              <a:gd name="connsiteX14" fmla="*/ 2299335 w 5410200"/>
+              <a:gd name="connsiteY14" fmla="*/ 18288 h 18288"/>
+              <a:gd name="connsiteX15" fmla="*/ 1514856 w 5410200"/>
+              <a:gd name="connsiteY15" fmla="*/ 18288 h 18288"/>
+              <a:gd name="connsiteX16" fmla="*/ 892683 w 5410200"/>
+              <a:gd name="connsiteY16" fmla="*/ 18288 h 18288"/>
+              <a:gd name="connsiteX17" fmla="*/ 0 w 5410200"/>
+              <a:gd name="connsiteY17" fmla="*/ 18288 h 18288"/>
+              <a:gd name="connsiteX18" fmla="*/ 0 w 5410200"/>
+              <a:gd name="connsiteY18" fmla="*/ 0 h 18288"/>
+            </a:gdLst>
+            <a:ahLst/>
+            <a:cxnLst>
+              <a:cxn ang="0">
+                <a:pos x="connsiteX0" y="connsiteY0"/>
+              </a:cxn>
+              <a:cxn ang="0">
+                <a:pos x="connsiteX1" y="connsiteY1"/>
+              </a:cxn>
+              <a:cxn ang="0">
+                <a:pos x="connsiteX2" y="connsiteY2"/>
+              </a:cxn>
+              <a:cxn ang="0">
+                <a:pos x="connsiteX3" y="connsiteY3"/>
+              </a:cxn>
+              <a:cxn ang="0">
+                <a:pos x="connsiteX4" y="connsiteY4"/>
+              </a:cxn>
+              <a:cxn ang="0">
+                <a:pos x="connsiteX5" y="connsiteY5"/>
+              </a:cxn>
+              <a:cxn ang="0">
+                <a:pos x="connsiteX6" y="connsiteY6"/>
+              </a:cxn>
+              <a:cxn ang="0">
+                <a:pos x="connsiteX7" y="connsiteY7"/>
+              </a:cxn>
+              <a:cxn ang="0">
+                <a:pos x="connsiteX8" y="connsiteY8"/>
+              </a:cxn>
+              <a:cxn ang="0">
+                <a:pos x="connsiteX9" y="connsiteY9"/>
+              </a:cxn>
+              <a:cxn ang="0">
+                <a:pos x="connsiteX10" y="connsiteY10"/>
+              </a:cxn>
+              <a:cxn ang="0">
+                <a:pos x="connsiteX11" y="connsiteY11"/>
+              </a:cxn>
+              <a:cxn ang="0">
+                <a:pos x="connsiteX12" y="connsiteY12"/>
+              </a:cxn>
+              <a:cxn ang="0">
+                <a:pos x="connsiteX13" y="connsiteY13"/>
+              </a:cxn>
+              <a:cxn ang="0">
+                <a:pos x="connsiteX14" y="connsiteY14"/>
+              </a:cxn>
+              <a:cxn ang="0">
+                <a:pos x="connsiteX15" y="connsiteY15"/>
+              </a:cxn>
+              <a:cxn ang="0">
+                <a:pos x="connsiteX16" y="connsiteY16"/>
+              </a:cxn>
+              <a:cxn ang="0">
+                <a:pos x="connsiteX17" y="connsiteY17"/>
+              </a:cxn>
+              <a:cxn ang="0">
+                <a:pos x="connsiteX18" y="connsiteY18"/>
+              </a:cxn>
+            </a:cxnLst>
+            <a:rect l="l" t="t" r="r" b="b"/>
+            <a:pathLst>
+              <a:path w="5410200" h="18288" fill="none" extrusionOk="0">
+                <a:moveTo>
+                  <a:pt x="0" y="0"/>
+                </a:moveTo>
+                <a:cubicBezTo>
+                  <a:pt x="163050" y="-18707"/>
+                  <a:pt x="319321" y="-16364"/>
+                  <a:pt x="568071" y="0"/>
+                </a:cubicBezTo>
+                <a:cubicBezTo>
+                  <a:pt x="816821" y="16364"/>
+                  <a:pt x="1013224" y="-7268"/>
+                  <a:pt x="1298448" y="0"/>
+                </a:cubicBezTo>
+                <a:cubicBezTo>
+                  <a:pt x="1583672" y="7268"/>
+                  <a:pt x="1631711" y="-3367"/>
+                  <a:pt x="1920621" y="0"/>
+                </a:cubicBezTo>
+                <a:cubicBezTo>
+                  <a:pt x="2209531" y="3367"/>
+                  <a:pt x="2364420" y="-19184"/>
+                  <a:pt x="2488692" y="0"/>
+                </a:cubicBezTo>
+                <a:cubicBezTo>
+                  <a:pt x="2612964" y="19184"/>
+                  <a:pt x="3023298" y="-34627"/>
+                  <a:pt x="3219069" y="0"/>
+                </a:cubicBezTo>
+                <a:cubicBezTo>
+                  <a:pt x="3414840" y="34627"/>
+                  <a:pt x="3656810" y="24043"/>
+                  <a:pt x="3895344" y="0"/>
+                </a:cubicBezTo>
+                <a:cubicBezTo>
+                  <a:pt x="4133879" y="-24043"/>
+                  <a:pt x="4393984" y="-19577"/>
+                  <a:pt x="4571619" y="0"/>
+                </a:cubicBezTo>
+                <a:cubicBezTo>
+                  <a:pt x="4749255" y="19577"/>
+                  <a:pt x="5179928" y="-6281"/>
+                  <a:pt x="5410200" y="0"/>
+                </a:cubicBezTo>
+                <a:cubicBezTo>
+                  <a:pt x="5410730" y="6954"/>
+                  <a:pt x="5410934" y="12839"/>
+                  <a:pt x="5410200" y="18288"/>
+                </a:cubicBezTo>
+                <a:cubicBezTo>
+                  <a:pt x="5139060" y="6751"/>
+                  <a:pt x="5121593" y="31035"/>
+                  <a:pt x="4842129" y="18288"/>
+                </a:cubicBezTo>
+                <a:cubicBezTo>
+                  <a:pt x="4562665" y="5541"/>
+                  <a:pt x="4448273" y="9487"/>
+                  <a:pt x="4328160" y="18288"/>
+                </a:cubicBezTo>
+                <a:cubicBezTo>
+                  <a:pt x="4208047" y="27089"/>
+                  <a:pt x="3760936" y="22567"/>
+                  <a:pt x="3597783" y="18288"/>
+                </a:cubicBezTo>
+                <a:cubicBezTo>
+                  <a:pt x="3434630" y="14009"/>
+                  <a:pt x="3299718" y="33213"/>
+                  <a:pt x="3029712" y="18288"/>
+                </a:cubicBezTo>
+                <a:cubicBezTo>
+                  <a:pt x="2759706" y="3363"/>
+                  <a:pt x="2640159" y="27394"/>
+                  <a:pt x="2299335" y="18288"/>
+                </a:cubicBezTo>
+                <a:cubicBezTo>
+                  <a:pt x="1958511" y="9182"/>
+                  <a:pt x="1801186" y="28985"/>
+                  <a:pt x="1514856" y="18288"/>
+                </a:cubicBezTo>
+                <a:cubicBezTo>
+                  <a:pt x="1228526" y="7591"/>
+                  <a:pt x="1063509" y="-5305"/>
+                  <a:pt x="892683" y="18288"/>
+                </a:cubicBezTo>
+                <a:cubicBezTo>
+                  <a:pt x="721857" y="41881"/>
+                  <a:pt x="186945" y="-20897"/>
+                  <a:pt x="0" y="18288"/>
+                </a:cubicBezTo>
+                <a:cubicBezTo>
+                  <a:pt x="-570" y="9279"/>
+                  <a:pt x="132" y="5100"/>
+                  <a:pt x="0" y="0"/>
+                </a:cubicBezTo>
+                <a:close/>
+              </a:path>
+              <a:path w="5410200" h="18288" stroke="0" extrusionOk="0">
+                <a:moveTo>
+                  <a:pt x="0" y="0"/>
+                </a:moveTo>
+                <a:cubicBezTo>
+                  <a:pt x="285096" y="-4925"/>
+                  <a:pt x="376456" y="22268"/>
+                  <a:pt x="622173" y="0"/>
+                </a:cubicBezTo>
+                <a:cubicBezTo>
+                  <a:pt x="867890" y="-22268"/>
+                  <a:pt x="1031392" y="7228"/>
+                  <a:pt x="1136142" y="0"/>
+                </a:cubicBezTo>
+                <a:cubicBezTo>
+                  <a:pt x="1240892" y="-7228"/>
+                  <a:pt x="1561853" y="9877"/>
+                  <a:pt x="1920621" y="0"/>
+                </a:cubicBezTo>
+                <a:cubicBezTo>
+                  <a:pt x="2279389" y="-9877"/>
+                  <a:pt x="2367255" y="19546"/>
+                  <a:pt x="2542794" y="0"/>
+                </a:cubicBezTo>
+                <a:cubicBezTo>
+                  <a:pt x="2718333" y="-19546"/>
+                  <a:pt x="2866732" y="-22226"/>
+                  <a:pt x="3164967" y="0"/>
+                </a:cubicBezTo>
+                <a:cubicBezTo>
+                  <a:pt x="3463202" y="22226"/>
+                  <a:pt x="3568055" y="-2765"/>
+                  <a:pt x="3949446" y="0"/>
+                </a:cubicBezTo>
+                <a:cubicBezTo>
+                  <a:pt x="4330837" y="2765"/>
+                  <a:pt x="4287895" y="10557"/>
+                  <a:pt x="4517517" y="0"/>
+                </a:cubicBezTo>
+                <a:cubicBezTo>
+                  <a:pt x="4747139" y="-10557"/>
+                  <a:pt x="5149588" y="8716"/>
+                  <a:pt x="5410200" y="0"/>
+                </a:cubicBezTo>
+                <a:cubicBezTo>
+                  <a:pt x="5409517" y="5414"/>
+                  <a:pt x="5409480" y="12510"/>
+                  <a:pt x="5410200" y="18288"/>
+                </a:cubicBezTo>
+                <a:cubicBezTo>
+                  <a:pt x="5163327" y="41494"/>
+                  <a:pt x="5008749" y="10693"/>
+                  <a:pt x="4842129" y="18288"/>
+                </a:cubicBezTo>
+                <a:cubicBezTo>
+                  <a:pt x="4675509" y="25883"/>
+                  <a:pt x="4433401" y="-615"/>
+                  <a:pt x="4165854" y="18288"/>
+                </a:cubicBezTo>
+                <a:cubicBezTo>
+                  <a:pt x="3898308" y="37191"/>
+                  <a:pt x="3809032" y="-8710"/>
+                  <a:pt x="3543681" y="18288"/>
+                </a:cubicBezTo>
+                <a:cubicBezTo>
+                  <a:pt x="3278330" y="45286"/>
+                  <a:pt x="3073876" y="-15917"/>
+                  <a:pt x="2759202" y="18288"/>
+                </a:cubicBezTo>
+                <a:cubicBezTo>
+                  <a:pt x="2444528" y="52493"/>
+                  <a:pt x="2204144" y="3372"/>
+                  <a:pt x="1974723" y="18288"/>
+                </a:cubicBezTo>
+                <a:cubicBezTo>
+                  <a:pt x="1745302" y="33204"/>
+                  <a:pt x="1602335" y="31490"/>
+                  <a:pt x="1406652" y="18288"/>
+                </a:cubicBezTo>
+                <a:cubicBezTo>
+                  <a:pt x="1210969" y="5086"/>
+                  <a:pt x="923948" y="3161"/>
+                  <a:pt x="730377" y="18288"/>
+                </a:cubicBezTo>
+                <a:cubicBezTo>
+                  <a:pt x="536806" y="33415"/>
+                  <a:pt x="336496" y="-141"/>
+                  <a:pt x="0" y="18288"/>
+                </a:cubicBezTo>
+                <a:cubicBezTo>
+                  <a:pt x="-306" y="11061"/>
+                  <a:pt x="-655" y="7751"/>
+                  <a:pt x="0" y="0"/>
+                </a:cubicBezTo>
+                <a:close/>
+              </a:path>
+            </a:pathLst>
+          </a:custGeom>
+          <a:solidFill>
+            <a:schemeClr val="accent2"/>
+          </a:solidFill>
+          <a:ln w="41275" cap="rnd">
+            <a:solidFill>
+              <a:schemeClr val="accent2"/>
+            </a:solidFill>
+            <a:round/>
+            <a:extLst>
+              <a:ext uri="{C807C97D-BFC1-408E-A445-0C87EB9F89A2}">
+                <ask:lineSketchStyleProps xmlns:ask="http://schemas.microsoft.com/office/drawing/2018/sketchyshapes" sd="1219033472">
+                  <a:prstGeom prst="rect">
+                    <a:avLst/>
+                  </a:prstGeom>
+                  <ask:type>
+                    <ask:lineSketchFreehand/>
+                  </ask:type>
+                </ask:lineSketchStyleProps>
+              </a:ext>
+            </a:extLst>
+          </a:ln>
+        </p:spPr>
+        <p:style>
+          <a:lnRef idx="2">
+            <a:schemeClr val="accent1">
+              <a:shade val="50000"/>
+            </a:schemeClr>
+          </a:lnRef>
+          <a:fillRef idx="1">
+            <a:schemeClr val="accent1"/>
+          </a:fillRef>
+          <a:effectRef idx="0">
+            <a:schemeClr val="accent1"/>
+          </a:effectRef>
+          <a:fontRef idx="minor">
+            <a:schemeClr val="lt1"/>
+          </a:fontRef>
+        </p:style>
+        <p:txBody>
+          <a:bodyPr rtlCol="0" anchor="ctr"/>
+          <a:lstStyle/>
+          <a:p>
+            <a:pPr algn="ctr"/>
+            <a:endParaRPr lang="en-US"/>
+          </a:p>
+        </p:txBody>
+      </p:sp>
+    </p:spTree>
+    <p:extLst>
+      <p:ext uri="{BB962C8B-B14F-4D97-AF65-F5344CB8AC3E}">
+        <p14:creationId xmlns:p14="http://schemas.microsoft.com/office/powerpoint/2010/main" val="2291715726"/>
+      </p:ext>
+    </p:extLst>
+  </p:cSld>
+  <p:clrMapOvr>
+    <a:masterClrMapping/>
+  </p:clrMapOvr>
+</p:sld>
+</file>
+
+<file path=ppt/slides/slide4.xml><?xml version="1.0" encoding="utf-8"?>
+<p:sld xmlns:a="http://schemas.openxmlformats.org/drawingml/2006/main" xmlns:r="http://schemas.openxmlformats.org/officeDocument/2006/relationships" xmlns:p="http://schemas.openxmlformats.org/presentationml/2006/main">
+  <p:cSld>
+    <p:bg>
+      <p:bgPr>
+        <a:solidFill>
+          <a:schemeClr val="bg1"/>
+        </a:solidFill>
+        <a:effectLst/>
+      </p:bgPr>
+    </p:bg>
+    <p:spTree>
+      <p:nvGrpSpPr>
+        <p:cNvPr id="1" name=""/>
+        <p:cNvGrpSpPr/>
+        <p:nvPr/>
+      </p:nvGrpSpPr>
+      <p:grpSpPr>
+        <a:xfrm>
+          <a:off x="0" y="0"/>
+          <a:ext cx="0" cy="0"/>
+          <a:chOff x="0" y="0"/>
+          <a:chExt cx="0" cy="0"/>
+        </a:xfrm>
+      </p:grpSpPr>
+      <p:sp useBgFill="1">
+        <p:nvSpPr>
+          <p:cNvPr id="17" name="Rectangle 16">
+            <a:extLst>
+              <a:ext uri="{FF2B5EF4-FFF2-40B4-BE49-F238E27FC236}">
+                <a16:creationId xmlns:a16="http://schemas.microsoft.com/office/drawing/2014/main" id="{743AA782-23D1-4521-8CAD-47662984AA08}"/>
+              </a:ext>
+              <a:ext uri="{C183D7F6-B498-43B3-948B-1728B52AA6E4}">
+                <adec:decorative xmlns:adec="http://schemas.microsoft.com/office/drawing/2017/decorative" val="1"/>
+              </a:ext>
+            </a:extLst>
+          </p:cNvPr>
+          <p:cNvSpPr>
+            <a:spLocks noGrp="1" noRot="1" noChangeAspect="1" noMove="1" noResize="1" noEditPoints="1" noAdjustHandles="1" noChangeArrowheads="1" noChangeShapeType="1" noTextEdit="1"/>
+          </p:cNvSpPr>
+          <p:nvPr>
+            <p:extLst>
+              <p:ext uri="{386F3935-93C4-4BCD-93E2-E3B085C9AB24}">
+                <p16:designElem xmlns:p16="http://schemas.microsoft.com/office/powerpoint/2015/main" val="1"/>
+              </p:ext>
+            </p:extLst>
+          </p:nvPr>
+        </p:nvSpPr>
+        <p:spPr>
+          <a:xfrm>
+            <a:off x="0" y="0"/>
+            <a:ext cx="12192000" cy="6858000"/>
+          </a:xfrm>
+          <a:prstGeom prst="rect">
+            <a:avLst/>
+          </a:prstGeom>
+          <a:ln>
+            <a:noFill/>
+          </a:ln>
+        </p:spPr>
+        <p:style>
+          <a:lnRef idx="2">
+            <a:schemeClr val="accent1">
+              <a:shade val="50000"/>
+            </a:schemeClr>
+          </a:lnRef>
+          <a:fillRef idx="1">
+            <a:schemeClr val="accent1"/>
+          </a:fillRef>
+          <a:effectRef idx="0">
+            <a:schemeClr val="accent1"/>
+          </a:effectRef>
+          <a:fontRef idx="minor">
+            <a:schemeClr val="lt1"/>
+          </a:fontRef>
+        </p:style>
+        <p:txBody>
+          <a:bodyPr rtlCol="0" anchor="ctr"/>
+          <a:lstStyle/>
+          <a:p>
+            <a:pPr algn="ctr"/>
+            <a:endParaRPr lang="en-US"/>
+          </a:p>
+        </p:txBody>
+      </p:sp>
+      <p:sp>
+        <p:nvSpPr>
+          <p:cNvPr id="2" name="Title 1">
+            <a:extLst>
+              <a:ext uri="{FF2B5EF4-FFF2-40B4-BE49-F238E27FC236}">
+                <a16:creationId xmlns:a16="http://schemas.microsoft.com/office/drawing/2014/main" id="{EA9C18A6-E59B-45E5-1E6A-DB5EC373EDE2}"/>
+              </a:ext>
+            </a:extLst>
+          </p:cNvPr>
+          <p:cNvSpPr>
+            <a:spLocks noGrp="1"/>
+          </p:cNvSpPr>
+          <p:nvPr>
+            <p:ph type="title"/>
+          </p:nvPr>
+        </p:nvSpPr>
+        <p:spPr>
+          <a:xfrm>
+            <a:off x="630936" y="640080"/>
+            <a:ext cx="4818888" cy="1481328"/>
+          </a:xfrm>
+        </p:spPr>
+        <p:txBody>
+          <a:bodyPr anchor="b">
+            <a:normAutofit/>
+          </a:bodyPr>
+          <a:lstStyle/>
+          <a:p>
+            <a:r>
+              <a:rPr lang="en-GB" sz="5000" dirty="0"/>
+              <a:t>Functionality- languages</a:t>
+            </a:r>
+          </a:p>
+        </p:txBody>
+      </p:sp>
+      <p:sp>
+        <p:nvSpPr>
+          <p:cNvPr id="19" name="sketch line">
+            <a:extLst>
+              <a:ext uri="{FF2B5EF4-FFF2-40B4-BE49-F238E27FC236}">
+                <a16:creationId xmlns:a16="http://schemas.microsoft.com/office/drawing/2014/main" id="{71877DBC-BB60-40F0-AC93-2ACDBAAE60CE}"/>
+              </a:ext>
+              <a:ext uri="{C183D7F6-B498-43B3-948B-1728B52AA6E4}">
+                <adec:decorative xmlns:adec="http://schemas.microsoft.com/office/drawing/2017/decorative" val="1"/>
+              </a:ext>
+            </a:extLst>
+          </p:cNvPr>
+          <p:cNvSpPr>
+            <a:spLocks noGrp="1" noRot="1" noChangeAspect="1" noMove="1" noResize="1" noEditPoints="1" noAdjustHandles="1" noChangeArrowheads="1" noChangeShapeType="1" noTextEdit="1"/>
+          </p:cNvSpPr>
+          <p:nvPr>
+            <p:extLst>
+              <p:ext uri="{386F3935-93C4-4BCD-93E2-E3B085C9AB24}">
+                <p16:designElem xmlns:p16="http://schemas.microsoft.com/office/powerpoint/2015/main" val="1"/>
+              </p:ext>
+            </p:extLst>
+          </p:nvPr>
+        </p:nvSpPr>
+        <p:spPr>
+          <a:xfrm>
+            <a:off x="643278" y="2372868"/>
+            <a:ext cx="3255095" cy="18288"/>
+          </a:xfrm>
+          <a:custGeom>
+            <a:avLst/>
+            <a:gdLst>
+              <a:gd name="connsiteX0" fmla="*/ 0 w 3255095"/>
+              <a:gd name="connsiteY0" fmla="*/ 0 h 18288"/>
+              <a:gd name="connsiteX1" fmla="*/ 618468 w 3255095"/>
+              <a:gd name="connsiteY1" fmla="*/ 0 h 18288"/>
+              <a:gd name="connsiteX2" fmla="*/ 1269487 w 3255095"/>
+              <a:gd name="connsiteY2" fmla="*/ 0 h 18288"/>
+              <a:gd name="connsiteX3" fmla="*/ 1953057 w 3255095"/>
+              <a:gd name="connsiteY3" fmla="*/ 0 h 18288"/>
+              <a:gd name="connsiteX4" fmla="*/ 2636627 w 3255095"/>
+              <a:gd name="connsiteY4" fmla="*/ 0 h 18288"/>
+              <a:gd name="connsiteX5" fmla="*/ 3255095 w 3255095"/>
+              <a:gd name="connsiteY5" fmla="*/ 0 h 18288"/>
+              <a:gd name="connsiteX6" fmla="*/ 3255095 w 3255095"/>
+              <a:gd name="connsiteY6" fmla="*/ 18288 h 18288"/>
+              <a:gd name="connsiteX7" fmla="*/ 2538974 w 3255095"/>
+              <a:gd name="connsiteY7" fmla="*/ 18288 h 18288"/>
+              <a:gd name="connsiteX8" fmla="*/ 1822853 w 3255095"/>
+              <a:gd name="connsiteY8" fmla="*/ 18288 h 18288"/>
+              <a:gd name="connsiteX9" fmla="*/ 1171834 w 3255095"/>
+              <a:gd name="connsiteY9" fmla="*/ 18288 h 18288"/>
+              <a:gd name="connsiteX10" fmla="*/ 0 w 3255095"/>
+              <a:gd name="connsiteY10" fmla="*/ 18288 h 18288"/>
+              <a:gd name="connsiteX11" fmla="*/ 0 w 3255095"/>
+              <a:gd name="connsiteY11" fmla="*/ 0 h 18288"/>
+            </a:gdLst>
+            <a:ahLst/>
+            <a:cxnLst>
+              <a:cxn ang="0">
+                <a:pos x="connsiteX0" y="connsiteY0"/>
+              </a:cxn>
+              <a:cxn ang="0">
+                <a:pos x="connsiteX1" y="connsiteY1"/>
+              </a:cxn>
+              <a:cxn ang="0">
+                <a:pos x="connsiteX2" y="connsiteY2"/>
+              </a:cxn>
+              <a:cxn ang="0">
+                <a:pos x="connsiteX3" y="connsiteY3"/>
+              </a:cxn>
+              <a:cxn ang="0">
+                <a:pos x="connsiteX4" y="connsiteY4"/>
+              </a:cxn>
+              <a:cxn ang="0">
+                <a:pos x="connsiteX5" y="connsiteY5"/>
+              </a:cxn>
+              <a:cxn ang="0">
+                <a:pos x="connsiteX6" y="connsiteY6"/>
+              </a:cxn>
+              <a:cxn ang="0">
+                <a:pos x="connsiteX7" y="connsiteY7"/>
+              </a:cxn>
+              <a:cxn ang="0">
+                <a:pos x="connsiteX8" y="connsiteY8"/>
+              </a:cxn>
+              <a:cxn ang="0">
+                <a:pos x="connsiteX9" y="connsiteY9"/>
+              </a:cxn>
+              <a:cxn ang="0">
+                <a:pos x="connsiteX10" y="connsiteY10"/>
+              </a:cxn>
+              <a:cxn ang="0">
+                <a:pos x="connsiteX11" y="connsiteY11"/>
+              </a:cxn>
+            </a:cxnLst>
+            <a:rect l="l" t="t" r="r" b="b"/>
+            <a:pathLst>
+              <a:path w="3255095" h="18288" fill="none" extrusionOk="0">
+                <a:moveTo>
+                  <a:pt x="0" y="0"/>
+                </a:moveTo>
+                <a:cubicBezTo>
+                  <a:pt x="240201" y="-22123"/>
+                  <a:pt x="462021" y="-19623"/>
+                  <a:pt x="618468" y="0"/>
+                </a:cubicBezTo>
+                <a:cubicBezTo>
+                  <a:pt x="774915" y="19623"/>
+                  <a:pt x="974734" y="2035"/>
+                  <a:pt x="1269487" y="0"/>
+                </a:cubicBezTo>
+                <a:cubicBezTo>
+                  <a:pt x="1564240" y="-2035"/>
+                  <a:pt x="1733579" y="10639"/>
+                  <a:pt x="1953057" y="0"/>
+                </a:cubicBezTo>
+                <a:cubicBezTo>
+                  <a:pt x="2172535" y="-10639"/>
+                  <a:pt x="2453962" y="14018"/>
+                  <a:pt x="2636627" y="0"/>
+                </a:cubicBezTo>
+                <a:cubicBezTo>
+                  <a:pt x="2819292" y="-14018"/>
+                  <a:pt x="3121375" y="5399"/>
+                  <a:pt x="3255095" y="0"/>
+                </a:cubicBezTo>
+                <a:cubicBezTo>
+                  <a:pt x="3254386" y="8157"/>
+                  <a:pt x="3254682" y="12125"/>
+                  <a:pt x="3255095" y="18288"/>
+                </a:cubicBezTo>
+                <a:cubicBezTo>
+                  <a:pt x="3088545" y="23203"/>
+                  <a:pt x="2687475" y="7419"/>
+                  <a:pt x="2538974" y="18288"/>
+                </a:cubicBezTo>
+                <a:cubicBezTo>
+                  <a:pt x="2390473" y="29157"/>
+                  <a:pt x="2137381" y="-8959"/>
+                  <a:pt x="1822853" y="18288"/>
+                </a:cubicBezTo>
+                <a:cubicBezTo>
+                  <a:pt x="1508325" y="45535"/>
+                  <a:pt x="1466437" y="20385"/>
+                  <a:pt x="1171834" y="18288"/>
+                </a:cubicBezTo>
+                <a:cubicBezTo>
+                  <a:pt x="877231" y="16191"/>
+                  <a:pt x="561097" y="37643"/>
+                  <a:pt x="0" y="18288"/>
+                </a:cubicBezTo>
+                <a:cubicBezTo>
+                  <a:pt x="-46" y="12483"/>
+                  <a:pt x="-203" y="6491"/>
+                  <a:pt x="0" y="0"/>
+                </a:cubicBezTo>
+                <a:close/>
+              </a:path>
+              <a:path w="3255095" h="18288" stroke="0" extrusionOk="0">
+                <a:moveTo>
+                  <a:pt x="0" y="0"/>
+                </a:moveTo>
+                <a:cubicBezTo>
+                  <a:pt x="291965" y="19429"/>
+                  <a:pt x="363155" y="8568"/>
+                  <a:pt x="618468" y="0"/>
+                </a:cubicBezTo>
+                <a:cubicBezTo>
+                  <a:pt x="873781" y="-8568"/>
+                  <a:pt x="904459" y="-19505"/>
+                  <a:pt x="1171834" y="0"/>
+                </a:cubicBezTo>
+                <a:cubicBezTo>
+                  <a:pt x="1439209" y="19505"/>
+                  <a:pt x="1744369" y="9790"/>
+                  <a:pt x="1887955" y="0"/>
+                </a:cubicBezTo>
+                <a:cubicBezTo>
+                  <a:pt x="2031541" y="-9790"/>
+                  <a:pt x="2346378" y="21240"/>
+                  <a:pt x="2506423" y="0"/>
+                </a:cubicBezTo>
+                <a:cubicBezTo>
+                  <a:pt x="2666468" y="-21240"/>
+                  <a:pt x="2990257" y="30414"/>
+                  <a:pt x="3255095" y="0"/>
+                </a:cubicBezTo>
+                <a:cubicBezTo>
+                  <a:pt x="3254831" y="4493"/>
+                  <a:pt x="3255479" y="9472"/>
+                  <a:pt x="3255095" y="18288"/>
+                </a:cubicBezTo>
+                <a:cubicBezTo>
+                  <a:pt x="3120743" y="16690"/>
+                  <a:pt x="2759628" y="42462"/>
+                  <a:pt x="2604076" y="18288"/>
+                </a:cubicBezTo>
+                <a:cubicBezTo>
+                  <a:pt x="2448524" y="-5886"/>
+                  <a:pt x="2184336" y="19599"/>
+                  <a:pt x="1887955" y="18288"/>
+                </a:cubicBezTo>
+                <a:cubicBezTo>
+                  <a:pt x="1591574" y="16977"/>
+                  <a:pt x="1548845" y="6870"/>
+                  <a:pt x="1334589" y="18288"/>
+                </a:cubicBezTo>
+                <a:cubicBezTo>
+                  <a:pt x="1120333" y="29706"/>
+                  <a:pt x="996014" y="9662"/>
+                  <a:pt x="683570" y="18288"/>
+                </a:cubicBezTo>
+                <a:cubicBezTo>
+                  <a:pt x="371126" y="26914"/>
+                  <a:pt x="198687" y="16167"/>
+                  <a:pt x="0" y="18288"/>
+                </a:cubicBezTo>
+                <a:cubicBezTo>
+                  <a:pt x="843" y="9577"/>
+                  <a:pt x="371" y="6900"/>
+                  <a:pt x="0" y="0"/>
+                </a:cubicBezTo>
+                <a:close/>
+              </a:path>
+            </a:pathLst>
+          </a:custGeom>
+          <a:solidFill>
+            <a:schemeClr val="accent2"/>
+          </a:solidFill>
+          <a:ln w="38100" cap="rnd">
+            <a:solidFill>
+              <a:schemeClr val="accent2"/>
+            </a:solidFill>
+            <a:round/>
+            <a:extLst>
+              <a:ext uri="{C807C97D-BFC1-408E-A445-0C87EB9F89A2}">
+                <ask:lineSketchStyleProps xmlns:ask="http://schemas.microsoft.com/office/drawing/2018/sketchyshapes" sd="1219033472">
+                  <a:prstGeom prst="rect">
+                    <a:avLst/>
+                  </a:prstGeom>
+                  <ask:type>
+                    <ask:lineSketchFreehand/>
+                  </ask:type>
+                </ask:lineSketchStyleProps>
+              </a:ext>
+            </a:extLst>
+          </a:ln>
+        </p:spPr>
+        <p:style>
+          <a:lnRef idx="2">
+            <a:schemeClr val="accent1">
+              <a:shade val="50000"/>
+            </a:schemeClr>
+          </a:lnRef>
+          <a:fillRef idx="1">
+            <a:schemeClr val="accent1"/>
+          </a:fillRef>
+          <a:effectRef idx="0">
+            <a:schemeClr val="accent1"/>
+          </a:effectRef>
+          <a:fontRef idx="minor">
+            <a:schemeClr val="lt1"/>
+          </a:fontRef>
+        </p:style>
+        <p:txBody>
+          <a:bodyPr rtlCol="0" anchor="ctr"/>
+          <a:lstStyle/>
+          <a:p>
+            <a:pPr algn="ctr"/>
+            <a:endParaRPr lang="en-US"/>
+          </a:p>
+        </p:txBody>
+      </p:sp>
+      <p:sp>
+        <p:nvSpPr>
+          <p:cNvPr id="3" name="Content Placeholder 2">
+            <a:extLst>
+              <a:ext uri="{FF2B5EF4-FFF2-40B4-BE49-F238E27FC236}">
+                <a16:creationId xmlns:a16="http://schemas.microsoft.com/office/drawing/2014/main" id="{E4A01276-0890-3F4A-437A-85C3D6C51386}"/>
+              </a:ext>
+            </a:extLst>
+          </p:cNvPr>
+          <p:cNvSpPr>
+            <a:spLocks noGrp="1"/>
+          </p:cNvSpPr>
+          <p:nvPr>
+            <p:ph idx="1"/>
+          </p:nvPr>
+        </p:nvSpPr>
+        <p:spPr>
+          <a:xfrm>
+            <a:off x="630936" y="2660904"/>
+            <a:ext cx="4818888" cy="3547872"/>
+          </a:xfrm>
+        </p:spPr>
+        <p:txBody>
+          <a:bodyPr anchor="t">
+            <a:normAutofit/>
+          </a:bodyPr>
+          <a:lstStyle/>
+          <a:p>
+            <a:r>
+              <a:rPr lang="en-GB" sz="2200" dirty="0"/>
+              <a:t>Use of more than 1 coding language:</a:t>
+            </a:r>
+          </a:p>
+          <a:p>
+            <a:pPr lvl="1"/>
+            <a:r>
+              <a:rPr lang="en-GB" sz="2200" dirty="0"/>
+              <a:t>Used python for the backend data handling of the systems and SQLite 3 for creation of the database </a:t>
+            </a:r>
+            <a:r>
+              <a:rPr lang="en-GB" sz="2200" b="1" dirty="0"/>
+              <a:t>(example to the right)</a:t>
+            </a:r>
+          </a:p>
+          <a:p>
+            <a:pPr lvl="1"/>
+            <a:endParaRPr lang="en-GB" sz="2200" dirty="0"/>
+          </a:p>
+        </p:txBody>
+      </p:sp>
+      <p:pic>
+        <p:nvPicPr>
+          <p:cNvPr id="5" name="Picture 4">
+            <a:extLst>
+              <a:ext uri="{FF2B5EF4-FFF2-40B4-BE49-F238E27FC236}">
+                <a16:creationId xmlns:a16="http://schemas.microsoft.com/office/drawing/2014/main" id="{ED2218CC-AF9C-9FBD-7823-57911EFB90F7}"/>
+              </a:ext>
+            </a:extLst>
+          </p:cNvPr>
+          <p:cNvPicPr>
+            <a:picLocks noChangeAspect="1"/>
+          </p:cNvPicPr>
+          <p:nvPr/>
+        </p:nvPicPr>
+        <p:blipFill>
+          <a:blip r:embed="rId2"/>
+          <a:stretch>
+            <a:fillRect/>
+          </a:stretch>
+        </p:blipFill>
+        <p:spPr>
+          <a:xfrm>
+            <a:off x="5513853" y="917936"/>
+            <a:ext cx="6548314" cy="5290840"/>
+          </a:xfrm>
+          <a:prstGeom prst="rect">
+            <a:avLst/>
+          </a:prstGeom>
+        </p:spPr>
+      </p:pic>
+    </p:spTree>
+    <p:extLst>
+      <p:ext uri="{BB962C8B-B14F-4D97-AF65-F5344CB8AC3E}">
+        <p14:creationId xmlns:p14="http://schemas.microsoft.com/office/powerpoint/2010/main" val="3683785424"/>
+      </p:ext>
+    </p:extLst>
+  </p:cSld>
+  <p:clrMapOvr>
+    <a:masterClrMapping/>
+  </p:clrMapOvr>
+</p:sld>
+</file>
+
+<file path=ppt/slides/slide5.xml><?xml version="1.0" encoding="utf-8"?>
+<p:sld xmlns:a="http://schemas.openxmlformats.org/drawingml/2006/main" xmlns:r="http://schemas.openxmlformats.org/officeDocument/2006/relationships" xmlns:p="http://schemas.openxmlformats.org/presentationml/2006/main">
+  <p:cSld>
+    <p:bg>
+      <p:bgPr>
+        <a:solidFill>
+          <a:schemeClr val="bg1"/>
+        </a:solidFill>
+        <a:effectLst/>
+      </p:bgPr>
+    </p:bg>
+    <p:spTree>
+      <p:nvGrpSpPr>
+        <p:cNvPr id="1" name="">
+          <a:extLst>
+            <a:ext uri="{FF2B5EF4-FFF2-40B4-BE49-F238E27FC236}">
+              <a16:creationId xmlns:a16="http://schemas.microsoft.com/office/drawing/2014/main" id="{3BCA0FE0-3E87-DF80-81AA-B58DD9EBEE8B}"/>
+            </a:ext>
+          </a:extLst>
+        </p:cNvPr>
+        <p:cNvGrpSpPr/>
+        <p:nvPr/>
+      </p:nvGrpSpPr>
+      <p:grpSpPr>
+        <a:xfrm>
+          <a:off x="0" y="0"/>
+          <a:ext cx="0" cy="0"/>
+          <a:chOff x="0" y="0"/>
+          <a:chExt cx="0" cy="0"/>
+        </a:xfrm>
+      </p:grpSpPr>
+      <p:sp useBgFill="1">
+        <p:nvSpPr>
+          <p:cNvPr id="13" name="Rectangle 12">
+            <a:extLst>
+              <a:ext uri="{FF2B5EF4-FFF2-40B4-BE49-F238E27FC236}">
+                <a16:creationId xmlns:a16="http://schemas.microsoft.com/office/drawing/2014/main" id="{352BEC0E-22F8-46D0-9632-375DB541B06C}"/>
+              </a:ext>
+              <a:ext uri="{C183D7F6-B498-43B3-948B-1728B52AA6E4}">
+                <adec:decorative xmlns:adec="http://schemas.microsoft.com/office/drawing/2017/decorative" val="1"/>
+              </a:ext>
+            </a:extLst>
+          </p:cNvPr>
+          <p:cNvSpPr>
+            <a:spLocks noGrp="1" noRot="1" noChangeAspect="1" noMove="1" noResize="1" noEditPoints="1" noAdjustHandles="1" noChangeArrowheads="1" noChangeShapeType="1" noTextEdit="1"/>
+          </p:cNvSpPr>
+          <p:nvPr>
+            <p:extLst>
+              <p:ext uri="{386F3935-93C4-4BCD-93E2-E3B085C9AB24}">
+                <p16:designElem xmlns:p16="http://schemas.microsoft.com/office/powerpoint/2015/main" val="1"/>
+              </p:ext>
+            </p:extLst>
+          </p:nvPr>
+        </p:nvSpPr>
+        <p:spPr>
+          <a:xfrm>
+            <a:off x="0" y="0"/>
+            <a:ext cx="12188952" cy="6858000"/>
+          </a:xfrm>
+          <a:prstGeom prst="rect">
+            <a:avLst/>
+          </a:prstGeom>
+          <a:ln>
+            <a:noFill/>
+          </a:ln>
+        </p:spPr>
+        <p:style>
+          <a:lnRef idx="2">
+            <a:schemeClr val="accent1">
+              <a:shade val="50000"/>
+            </a:schemeClr>
+          </a:lnRef>
+          <a:fillRef idx="1">
+            <a:schemeClr val="accent1"/>
+          </a:fillRef>
+          <a:effectRef idx="0">
+            <a:schemeClr val="accent1"/>
+          </a:effectRef>
+          <a:fontRef idx="minor">
+            <a:schemeClr val="lt1"/>
+          </a:fontRef>
+        </p:style>
+        <p:txBody>
+          <a:bodyPr rtlCol="0" anchor="ctr"/>
+          <a:lstStyle/>
+          <a:p>
+            <a:pPr algn="ctr"/>
+            <a:endParaRPr lang="en-US"/>
+          </a:p>
+        </p:txBody>
+      </p:sp>
+      <p:sp>
+        <p:nvSpPr>
+          <p:cNvPr id="2" name="Title 1">
+            <a:extLst>
+              <a:ext uri="{FF2B5EF4-FFF2-40B4-BE49-F238E27FC236}">
+                <a16:creationId xmlns:a16="http://schemas.microsoft.com/office/drawing/2014/main" id="{411D0D81-BB80-A4CD-A652-EE88E71CFAB3}"/>
               </a:ext>
             </a:extLst>
           </p:cNvPr>
@@ -14198,8 +11917,351 @@
           <a:p>
             <a:r>
               <a:rPr lang="en-GB" sz="5400"/>
-              <a:t>Organised into functions/classes</a:t>
+              <a:t>Functionality- user accounts</a:t>
             </a:r>
+          </a:p>
+        </p:txBody>
+      </p:sp>
+      <p:sp>
+        <p:nvSpPr>
+          <p:cNvPr id="15" name="sketch line">
+            <a:extLst>
+              <a:ext uri="{FF2B5EF4-FFF2-40B4-BE49-F238E27FC236}">
+                <a16:creationId xmlns:a16="http://schemas.microsoft.com/office/drawing/2014/main" id="{3FCFB1DE-0B7E-48CC-BA90-B2AB0889F9D6}"/>
+              </a:ext>
+              <a:ext uri="{C183D7F6-B498-43B3-948B-1728B52AA6E4}">
+                <adec:decorative xmlns:adec="http://schemas.microsoft.com/office/drawing/2017/decorative" val="1"/>
+              </a:ext>
+            </a:extLst>
+          </p:cNvPr>
+          <p:cNvSpPr>
+            <a:spLocks noGrp="1" noRot="1" noChangeAspect="1" noMove="1" noResize="1" noEditPoints="1" noAdjustHandles="1" noChangeArrowheads="1" noChangeShapeType="1" noTextEdit="1"/>
+          </p:cNvSpPr>
+          <p:nvPr>
+            <p:extLst>
+              <p:ext uri="{386F3935-93C4-4BCD-93E2-E3B085C9AB24}">
+                <p16:designElem xmlns:p16="http://schemas.microsoft.com/office/powerpoint/2015/main" val="1"/>
+              </p:ext>
+            </p:extLst>
+          </p:nvPr>
+        </p:nvSpPr>
+        <p:spPr>
+          <a:xfrm>
+            <a:off x="758952" y="2395728"/>
+            <a:ext cx="4243589" cy="18288"/>
+          </a:xfrm>
+          <a:custGeom>
+            <a:avLst/>
+            <a:gdLst>
+              <a:gd name="connsiteX0" fmla="*/ 0 w 4243589"/>
+              <a:gd name="connsiteY0" fmla="*/ 0 h 18288"/>
+              <a:gd name="connsiteX1" fmla="*/ 478919 w 4243589"/>
+              <a:gd name="connsiteY1" fmla="*/ 0 h 18288"/>
+              <a:gd name="connsiteX2" fmla="*/ 957839 w 4243589"/>
+              <a:gd name="connsiteY2" fmla="*/ 0 h 18288"/>
+              <a:gd name="connsiteX3" fmla="*/ 1521630 w 4243589"/>
+              <a:gd name="connsiteY3" fmla="*/ 0 h 18288"/>
+              <a:gd name="connsiteX4" fmla="*/ 2212729 w 4243589"/>
+              <a:gd name="connsiteY4" fmla="*/ 0 h 18288"/>
+              <a:gd name="connsiteX5" fmla="*/ 2734084 w 4243589"/>
+              <a:gd name="connsiteY5" fmla="*/ 0 h 18288"/>
+              <a:gd name="connsiteX6" fmla="*/ 3255439 w 4243589"/>
+              <a:gd name="connsiteY6" fmla="*/ 0 h 18288"/>
+              <a:gd name="connsiteX7" fmla="*/ 4243589 w 4243589"/>
+              <a:gd name="connsiteY7" fmla="*/ 0 h 18288"/>
+              <a:gd name="connsiteX8" fmla="*/ 4243589 w 4243589"/>
+              <a:gd name="connsiteY8" fmla="*/ 18288 h 18288"/>
+              <a:gd name="connsiteX9" fmla="*/ 3594926 w 4243589"/>
+              <a:gd name="connsiteY9" fmla="*/ 18288 h 18288"/>
+              <a:gd name="connsiteX10" fmla="*/ 3073571 w 4243589"/>
+              <a:gd name="connsiteY10" fmla="*/ 18288 h 18288"/>
+              <a:gd name="connsiteX11" fmla="*/ 2552216 w 4243589"/>
+              <a:gd name="connsiteY11" fmla="*/ 18288 h 18288"/>
+              <a:gd name="connsiteX12" fmla="*/ 1903553 w 4243589"/>
+              <a:gd name="connsiteY12" fmla="*/ 18288 h 18288"/>
+              <a:gd name="connsiteX13" fmla="*/ 1212454 w 4243589"/>
+              <a:gd name="connsiteY13" fmla="*/ 18288 h 18288"/>
+              <a:gd name="connsiteX14" fmla="*/ 733535 w 4243589"/>
+              <a:gd name="connsiteY14" fmla="*/ 18288 h 18288"/>
+              <a:gd name="connsiteX15" fmla="*/ 0 w 4243589"/>
+              <a:gd name="connsiteY15" fmla="*/ 18288 h 18288"/>
+              <a:gd name="connsiteX16" fmla="*/ 0 w 4243589"/>
+              <a:gd name="connsiteY16" fmla="*/ 0 h 18288"/>
+            </a:gdLst>
+            <a:ahLst/>
+            <a:cxnLst>
+              <a:cxn ang="0">
+                <a:pos x="connsiteX0" y="connsiteY0"/>
+              </a:cxn>
+              <a:cxn ang="0">
+                <a:pos x="connsiteX1" y="connsiteY1"/>
+              </a:cxn>
+              <a:cxn ang="0">
+                <a:pos x="connsiteX2" y="connsiteY2"/>
+              </a:cxn>
+              <a:cxn ang="0">
+                <a:pos x="connsiteX3" y="connsiteY3"/>
+              </a:cxn>
+              <a:cxn ang="0">
+                <a:pos x="connsiteX4" y="connsiteY4"/>
+              </a:cxn>
+              <a:cxn ang="0">
+                <a:pos x="connsiteX5" y="connsiteY5"/>
+              </a:cxn>
+              <a:cxn ang="0">
+                <a:pos x="connsiteX6" y="connsiteY6"/>
+              </a:cxn>
+              <a:cxn ang="0">
+                <a:pos x="connsiteX7" y="connsiteY7"/>
+              </a:cxn>
+              <a:cxn ang="0">
+                <a:pos x="connsiteX8" y="connsiteY8"/>
+              </a:cxn>
+              <a:cxn ang="0">
+                <a:pos x="connsiteX9" y="connsiteY9"/>
+              </a:cxn>
+              <a:cxn ang="0">
+                <a:pos x="connsiteX10" y="connsiteY10"/>
+              </a:cxn>
+              <a:cxn ang="0">
+                <a:pos x="connsiteX11" y="connsiteY11"/>
+              </a:cxn>
+              <a:cxn ang="0">
+                <a:pos x="connsiteX12" y="connsiteY12"/>
+              </a:cxn>
+              <a:cxn ang="0">
+                <a:pos x="connsiteX13" y="connsiteY13"/>
+              </a:cxn>
+              <a:cxn ang="0">
+                <a:pos x="connsiteX14" y="connsiteY14"/>
+              </a:cxn>
+              <a:cxn ang="0">
+                <a:pos x="connsiteX15" y="connsiteY15"/>
+              </a:cxn>
+              <a:cxn ang="0">
+                <a:pos x="connsiteX16" y="connsiteY16"/>
+              </a:cxn>
+            </a:cxnLst>
+            <a:rect l="l" t="t" r="r" b="b"/>
+            <a:pathLst>
+              <a:path w="4243589" h="18288" fill="none" extrusionOk="0">
+                <a:moveTo>
+                  <a:pt x="0" y="0"/>
+                </a:moveTo>
+                <a:cubicBezTo>
+                  <a:pt x="213395" y="-21006"/>
+                  <a:pt x="307421" y="-18116"/>
+                  <a:pt x="478919" y="0"/>
+                </a:cubicBezTo>
+                <a:cubicBezTo>
+                  <a:pt x="650417" y="18116"/>
+                  <a:pt x="831092" y="-21237"/>
+                  <a:pt x="957839" y="0"/>
+                </a:cubicBezTo>
+                <a:cubicBezTo>
+                  <a:pt x="1084586" y="21237"/>
+                  <a:pt x="1301682" y="25124"/>
+                  <a:pt x="1521630" y="0"/>
+                </a:cubicBezTo>
+                <a:cubicBezTo>
+                  <a:pt x="1741578" y="-25124"/>
+                  <a:pt x="1970269" y="-29139"/>
+                  <a:pt x="2212729" y="0"/>
+                </a:cubicBezTo>
+                <a:cubicBezTo>
+                  <a:pt x="2455189" y="29139"/>
+                  <a:pt x="2558847" y="-4796"/>
+                  <a:pt x="2734084" y="0"/>
+                </a:cubicBezTo>
+                <a:cubicBezTo>
+                  <a:pt x="2909321" y="4796"/>
+                  <a:pt x="3097217" y="-13409"/>
+                  <a:pt x="3255439" y="0"/>
+                </a:cubicBezTo>
+                <a:cubicBezTo>
+                  <a:pt x="3413662" y="13409"/>
+                  <a:pt x="3979999" y="-10121"/>
+                  <a:pt x="4243589" y="0"/>
+                </a:cubicBezTo>
+                <a:cubicBezTo>
+                  <a:pt x="4244484" y="8974"/>
+                  <a:pt x="4243043" y="9359"/>
+                  <a:pt x="4243589" y="18288"/>
+                </a:cubicBezTo>
+                <a:cubicBezTo>
+                  <a:pt x="4058777" y="31246"/>
+                  <a:pt x="3910348" y="3158"/>
+                  <a:pt x="3594926" y="18288"/>
+                </a:cubicBezTo>
+                <a:cubicBezTo>
+                  <a:pt x="3279504" y="33418"/>
+                  <a:pt x="3319955" y="-3977"/>
+                  <a:pt x="3073571" y="18288"/>
+                </a:cubicBezTo>
+                <a:cubicBezTo>
+                  <a:pt x="2827187" y="40553"/>
+                  <a:pt x="2767387" y="1863"/>
+                  <a:pt x="2552216" y="18288"/>
+                </a:cubicBezTo>
+                <a:cubicBezTo>
+                  <a:pt x="2337046" y="34713"/>
+                  <a:pt x="2181871" y="19527"/>
+                  <a:pt x="1903553" y="18288"/>
+                </a:cubicBezTo>
+                <a:cubicBezTo>
+                  <a:pt x="1625235" y="17049"/>
+                  <a:pt x="1557672" y="24174"/>
+                  <a:pt x="1212454" y="18288"/>
+                </a:cubicBezTo>
+                <a:cubicBezTo>
+                  <a:pt x="867236" y="12402"/>
+                  <a:pt x="874382" y="15627"/>
+                  <a:pt x="733535" y="18288"/>
+                </a:cubicBezTo>
+                <a:cubicBezTo>
+                  <a:pt x="592688" y="20949"/>
+                  <a:pt x="183477" y="14753"/>
+                  <a:pt x="0" y="18288"/>
+                </a:cubicBezTo>
+                <a:cubicBezTo>
+                  <a:pt x="-229" y="14222"/>
+                  <a:pt x="509" y="5816"/>
+                  <a:pt x="0" y="0"/>
+                </a:cubicBezTo>
+                <a:close/>
+              </a:path>
+              <a:path w="4243589" h="18288" stroke="0" extrusionOk="0">
+                <a:moveTo>
+                  <a:pt x="0" y="0"/>
+                </a:moveTo>
+                <a:cubicBezTo>
+                  <a:pt x="143690" y="16630"/>
+                  <a:pt x="266667" y="14847"/>
+                  <a:pt x="521355" y="0"/>
+                </a:cubicBezTo>
+                <a:cubicBezTo>
+                  <a:pt x="776043" y="-14847"/>
+                  <a:pt x="814491" y="-17363"/>
+                  <a:pt x="1000275" y="0"/>
+                </a:cubicBezTo>
+                <a:cubicBezTo>
+                  <a:pt x="1186059" y="17363"/>
+                  <a:pt x="1352504" y="-23507"/>
+                  <a:pt x="1521630" y="0"/>
+                </a:cubicBezTo>
+                <a:cubicBezTo>
+                  <a:pt x="1690756" y="23507"/>
+                  <a:pt x="1889525" y="5871"/>
+                  <a:pt x="2127857" y="0"/>
+                </a:cubicBezTo>
+                <a:cubicBezTo>
+                  <a:pt x="2366189" y="-5871"/>
+                  <a:pt x="2620628" y="-27997"/>
+                  <a:pt x="2776520" y="0"/>
+                </a:cubicBezTo>
+                <a:cubicBezTo>
+                  <a:pt x="2932412" y="27997"/>
+                  <a:pt x="3131683" y="-25073"/>
+                  <a:pt x="3467618" y="0"/>
+                </a:cubicBezTo>
+                <a:cubicBezTo>
+                  <a:pt x="3803553" y="25073"/>
+                  <a:pt x="4017371" y="3071"/>
+                  <a:pt x="4243589" y="0"/>
+                </a:cubicBezTo>
+                <a:cubicBezTo>
+                  <a:pt x="4243134" y="6162"/>
+                  <a:pt x="4243492" y="11775"/>
+                  <a:pt x="4243589" y="18288"/>
+                </a:cubicBezTo>
+                <a:cubicBezTo>
+                  <a:pt x="4017834" y="-5779"/>
+                  <a:pt x="3834586" y="13376"/>
+                  <a:pt x="3594926" y="18288"/>
+                </a:cubicBezTo>
+                <a:cubicBezTo>
+                  <a:pt x="3355266" y="23200"/>
+                  <a:pt x="3204179" y="2869"/>
+                  <a:pt x="2903827" y="18288"/>
+                </a:cubicBezTo>
+                <a:cubicBezTo>
+                  <a:pt x="2603475" y="33707"/>
+                  <a:pt x="2526187" y="46187"/>
+                  <a:pt x="2212729" y="18288"/>
+                </a:cubicBezTo>
+                <a:cubicBezTo>
+                  <a:pt x="1899271" y="-9611"/>
+                  <a:pt x="1966289" y="29692"/>
+                  <a:pt x="1733809" y="18288"/>
+                </a:cubicBezTo>
+                <a:cubicBezTo>
+                  <a:pt x="1501329" y="6884"/>
+                  <a:pt x="1343612" y="12492"/>
+                  <a:pt x="1085146" y="18288"/>
+                </a:cubicBezTo>
+                <a:cubicBezTo>
+                  <a:pt x="826680" y="24084"/>
+                  <a:pt x="778184" y="35607"/>
+                  <a:pt x="521355" y="18288"/>
+                </a:cubicBezTo>
+                <a:cubicBezTo>
+                  <a:pt x="264526" y="969"/>
+                  <a:pt x="120277" y="4268"/>
+                  <a:pt x="0" y="18288"/>
+                </a:cubicBezTo>
+                <a:cubicBezTo>
+                  <a:pt x="766" y="10800"/>
+                  <a:pt x="-457" y="8180"/>
+                  <a:pt x="0" y="0"/>
+                </a:cubicBezTo>
+                <a:close/>
+              </a:path>
+            </a:pathLst>
+          </a:custGeom>
+          <a:solidFill>
+            <a:schemeClr val="accent2"/>
+          </a:solidFill>
+          <a:ln w="41275" cap="rnd">
+            <a:solidFill>
+              <a:schemeClr val="accent2"/>
+            </a:solidFill>
+            <a:round/>
+            <a:extLst>
+              <a:ext uri="{C807C97D-BFC1-408E-A445-0C87EB9F89A2}">
+                <ask:lineSketchStyleProps xmlns:ask="http://schemas.microsoft.com/office/drawing/2018/sketchyshapes" sd="2727557108">
+                  <a:prstGeom prst="rect">
+                    <a:avLst/>
+                  </a:prstGeom>
+                  <ask:type>
+                    <ask:lineSketchFreehand/>
+                  </ask:type>
+                </ask:lineSketchStyleProps>
+              </a:ext>
+            </a:extLst>
+          </a:ln>
+        </p:spPr>
+        <p:style>
+          <a:lnRef idx="2">
+            <a:schemeClr val="accent1">
+              <a:shade val="50000"/>
+            </a:schemeClr>
+          </a:lnRef>
+          <a:fillRef idx="1">
+            <a:schemeClr val="accent1"/>
+          </a:fillRef>
+          <a:effectRef idx="0">
+            <a:schemeClr val="accent1"/>
+          </a:effectRef>
+          <a:fontRef idx="minor">
+            <a:schemeClr val="lt1"/>
+          </a:fontRef>
+        </p:style>
+        <p:txBody>
+          <a:bodyPr rtlCol="0" anchor="ctr"/>
+          <a:lstStyle/>
+          <a:p>
+            <a:pPr algn="ctr"/>
+            <a:endParaRPr lang="en-US"/>
           </a:p>
         </p:txBody>
       </p:sp>
@@ -14208,7 +12270,7 @@
           <p:cNvPr id="3" name="Content Placeholder 2">
             <a:extLst>
               <a:ext uri="{FF2B5EF4-FFF2-40B4-BE49-F238E27FC236}">
-                <a16:creationId xmlns:a16="http://schemas.microsoft.com/office/drawing/2014/main" id="{E32EEE8F-3C5A-4228-01E3-B433CA80F54A}"/>
+                <a16:creationId xmlns:a16="http://schemas.microsoft.com/office/drawing/2014/main" id="{DA9126C6-6F92-F09C-57AD-DFF627A73D44}"/>
               </a:ext>
             </a:extLst>
           </p:cNvPr>
@@ -14222,7 +12284,7 @@
         <p:spPr>
           <a:xfrm>
             <a:off x="640080" y="2706624"/>
-            <a:ext cx="4554220" cy="3483864"/>
+            <a:ext cx="6894576" cy="3483864"/>
           </a:xfrm>
         </p:spPr>
         <p:txBody>
@@ -14233,11 +12295,28 @@
           <a:p>
             <a:r>
               <a:rPr lang="en-GB" sz="2200" dirty="0"/>
-              <a:t>Each core feature is organised and named into a individual class and whether they are functional or nonfunctional </a:t>
+              <a:t>A functional user account creation and login system:</a:t>
             </a:r>
+          </a:p>
+          <a:p>
+            <a:pPr lvl="1"/>
             <a:r>
-              <a:rPr lang="en-GB" sz="2200" b="1" dirty="0"/>
-              <a:t>( example on the right)</a:t>
+              <a:rPr lang="en-GB" sz="2200" dirty="0"/>
+              <a:t>Implemented a system for users to enter details into a html form that is sent to a  backend that encrypts and saves the user newly created account</a:t>
+            </a:r>
+          </a:p>
+          <a:p>
+            <a:pPr lvl="1"/>
+            <a:r>
+              <a:rPr lang="en-GB" sz="2200" dirty="0"/>
+              <a:t>Created a system that was able to allow users to log into the accounts using python</a:t>
+            </a:r>
+          </a:p>
+          <a:p>
+            <a:pPr lvl="1"/>
+            <a:r>
+              <a:rPr lang="en-GB" sz="2200" dirty="0"/>
+              <a:t>(code snippets on the next slide with annotation)</a:t>
             </a:r>
           </a:p>
         </p:txBody>
@@ -14247,7 +12326,7 @@
           <p:cNvPr id="8" name="Picture 7">
             <a:extLst>
               <a:ext uri="{FF2B5EF4-FFF2-40B4-BE49-F238E27FC236}">
-                <a16:creationId xmlns:a16="http://schemas.microsoft.com/office/drawing/2014/main" id="{9B0BBEF1-4732-0A92-4374-CACA69197E41}"/>
+                <a16:creationId xmlns:a16="http://schemas.microsoft.com/office/drawing/2014/main" id="{F1951334-046D-211F-5B3C-6BA8D4DCF574}"/>
               </a:ext>
             </a:extLst>
           </p:cNvPr>
@@ -14264,8 +12343,8 @@
         </p:blipFill>
         <p:spPr>
           <a:xfrm>
-            <a:off x="6260456" y="329184"/>
-            <a:ext cx="5617600" cy="2668359"/>
+            <a:off x="8571847" y="329183"/>
+            <a:ext cx="2598201" cy="3429969"/>
           </a:xfrm>
           <a:prstGeom prst="rect">
             <a:avLst/>
@@ -14277,7 +12356,7 @@
           <p:cNvPr id="6" name="Picture 5">
             <a:extLst>
               <a:ext uri="{FF2B5EF4-FFF2-40B4-BE49-F238E27FC236}">
-                <a16:creationId xmlns:a16="http://schemas.microsoft.com/office/drawing/2014/main" id="{E6C8F879-1118-ABF1-5D1E-99E71A567817}"/>
+                <a16:creationId xmlns:a16="http://schemas.microsoft.com/office/drawing/2014/main" id="{5E97F700-6F59-10D4-A076-F8E75B048C78}"/>
               </a:ext>
             </a:extLst>
           </p:cNvPr>
@@ -14288,13 +12367,14 @@
         </p:nvPicPr>
         <p:blipFill>
           <a:blip r:embed="rId3"/>
-          <a:srcRect r="19618"/>
-          <a:stretch/>
+          <a:stretch>
+            <a:fillRect/>
+          </a:stretch>
         </p:blipFill>
         <p:spPr>
           <a:xfrm>
-            <a:off x="6260456" y="3326726"/>
-            <a:ext cx="5571116" cy="2668359"/>
+            <a:off x="8688611" y="4079193"/>
+            <a:ext cx="2346385" cy="2176272"/>
           </a:xfrm>
           <a:prstGeom prst="rect">
             <a:avLst/>
@@ -14304,7 +12384,7 @@
     </p:spTree>
     <p:extLst>
       <p:ext uri="{BB962C8B-B14F-4D97-AF65-F5344CB8AC3E}">
-        <p14:creationId xmlns:p14="http://schemas.microsoft.com/office/powerpoint/2010/main" val="2197718875"/>
+        <p14:creationId xmlns:p14="http://schemas.microsoft.com/office/powerpoint/2010/main" val="3098818615"/>
       </p:ext>
     </p:extLst>
   </p:cSld>
@@ -14314,7 +12394,196 @@
 </p:sld>
 </file>
 
-<file path=ppt/slides/slide4.xml><?xml version="1.0" encoding="utf-8"?>
+<file path=ppt/slides/slide6.xml><?xml version="1.0" encoding="utf-8"?>
+<p:sld xmlns:a="http://schemas.openxmlformats.org/drawingml/2006/main" xmlns:r="http://schemas.openxmlformats.org/officeDocument/2006/relationships" xmlns:p="http://schemas.openxmlformats.org/presentationml/2006/main">
+  <p:cSld>
+    <p:spTree>
+      <p:nvGrpSpPr>
+        <p:cNvPr id="1" name=""/>
+        <p:cNvGrpSpPr/>
+        <p:nvPr/>
+      </p:nvGrpSpPr>
+      <p:grpSpPr>
+        <a:xfrm>
+          <a:off x="0" y="0"/>
+          <a:ext cx="0" cy="0"/>
+          <a:chOff x="0" y="0"/>
+          <a:chExt cx="0" cy="0"/>
+        </a:xfrm>
+      </p:grpSpPr>
+      <p:sp>
+        <p:nvSpPr>
+          <p:cNvPr id="3" name="Content Placeholder 2">
+            <a:extLst>
+              <a:ext uri="{FF2B5EF4-FFF2-40B4-BE49-F238E27FC236}">
+                <a16:creationId xmlns:a16="http://schemas.microsoft.com/office/drawing/2014/main" id="{E48F44F5-9149-7384-52C8-91FC27F6E673}"/>
+              </a:ext>
+            </a:extLst>
+          </p:cNvPr>
+          <p:cNvSpPr>
+            <a:spLocks noGrp="1"/>
+          </p:cNvSpPr>
+          <p:nvPr>
+            <p:ph idx="1"/>
+          </p:nvPr>
+        </p:nvSpPr>
+        <p:spPr>
+          <a:xfrm>
+            <a:off x="3498939" y="656570"/>
+            <a:ext cx="3343275" cy="5544251"/>
+          </a:xfrm>
+        </p:spPr>
+        <p:txBody>
+          <a:bodyPr>
+            <a:normAutofit/>
+          </a:bodyPr>
+          <a:lstStyle/>
+          <a:p>
+            <a:pPr marL="0" indent="0">
+              <a:buNone/>
+            </a:pPr>
+            <a:r>
+              <a:rPr lang="en-GB" sz="1600" dirty="0"/>
+              <a:t>After the user sends in their data from the front end  (on the left) the data is sent the /register function(seen on the right ) which first checks the presence and validity of the inputted data.</a:t>
+            </a:r>
+          </a:p>
+          <a:p>
+            <a:pPr marL="0" indent="0">
+              <a:buNone/>
+            </a:pPr>
+            <a:r>
+              <a:rPr lang="en-GB" sz="1600" dirty="0"/>
+              <a:t> After the validation of the user's data is confirmed the user’s password is hashed by the werkzeug.security library into 220-character hash  to protect the users data, after that a connection to the database is made in which the function checks that the users </a:t>
+            </a:r>
+            <a:r>
+              <a:rPr lang="en-GB" sz="1600" dirty="0" err="1"/>
+              <a:t>inputed</a:t>
+            </a:r>
+            <a:r>
+              <a:rPr lang="en-GB" sz="1600" dirty="0"/>
+              <a:t> username and email don’t match a pre-existing one.</a:t>
+            </a:r>
+          </a:p>
+          <a:p>
+            <a:pPr marL="0" indent="0">
+              <a:buNone/>
+            </a:pPr>
+            <a:r>
+              <a:rPr lang="en-GB" sz="1600" dirty="0"/>
+              <a:t>If that check is past then the users details are sent to the database, a final check makes sure that the information has been sent correctly and then the users are redirected back to the home page</a:t>
+            </a:r>
+          </a:p>
+        </p:txBody>
+      </p:sp>
+      <p:pic>
+        <p:nvPicPr>
+          <p:cNvPr id="4" name="Picture 3">
+            <a:extLst>
+              <a:ext uri="{FF2B5EF4-FFF2-40B4-BE49-F238E27FC236}">
+                <a16:creationId xmlns:a16="http://schemas.microsoft.com/office/drawing/2014/main" id="{6315EDF7-B062-892C-573A-CB7E0797F093}"/>
+              </a:ext>
+            </a:extLst>
+          </p:cNvPr>
+          <p:cNvPicPr>
+            <a:picLocks noChangeAspect="1"/>
+          </p:cNvPicPr>
+          <p:nvPr/>
+        </p:nvPicPr>
+        <p:blipFill>
+          <a:blip r:embed="rId2"/>
+          <a:stretch>
+            <a:fillRect/>
+          </a:stretch>
+        </p:blipFill>
+        <p:spPr>
+          <a:xfrm>
+            <a:off x="7181851" y="243258"/>
+            <a:ext cx="4826398" cy="6371484"/>
+          </a:xfrm>
+          <a:prstGeom prst="rect">
+            <a:avLst/>
+          </a:prstGeom>
+        </p:spPr>
+      </p:pic>
+      <p:pic>
+        <p:nvPicPr>
+          <p:cNvPr id="6" name="Picture 5">
+            <a:extLst>
+              <a:ext uri="{FF2B5EF4-FFF2-40B4-BE49-F238E27FC236}">
+                <a16:creationId xmlns:a16="http://schemas.microsoft.com/office/drawing/2014/main" id="{7710C290-3283-66F4-0C7D-BED7AE04D5BB}"/>
+              </a:ext>
+            </a:extLst>
+          </p:cNvPr>
+          <p:cNvPicPr>
+            <a:picLocks noChangeAspect="1"/>
+          </p:cNvPicPr>
+          <p:nvPr/>
+        </p:nvPicPr>
+        <p:blipFill>
+          <a:blip r:embed="rId3"/>
+          <a:stretch>
+            <a:fillRect/>
+          </a:stretch>
+        </p:blipFill>
+        <p:spPr>
+          <a:xfrm>
+            <a:off x="0" y="906979"/>
+            <a:ext cx="3447051" cy="4133850"/>
+          </a:xfrm>
+          <a:prstGeom prst="rect">
+            <a:avLst/>
+          </a:prstGeom>
+        </p:spPr>
+      </p:pic>
+      <p:sp>
+        <p:nvSpPr>
+          <p:cNvPr id="7" name="TextBox 6">
+            <a:extLst>
+              <a:ext uri="{FF2B5EF4-FFF2-40B4-BE49-F238E27FC236}">
+                <a16:creationId xmlns:a16="http://schemas.microsoft.com/office/drawing/2014/main" id="{970D024F-CF3D-BBCC-A5DF-246DD865675A}"/>
+              </a:ext>
+            </a:extLst>
+          </p:cNvPr>
+          <p:cNvSpPr txBox="1"/>
+          <p:nvPr/>
+        </p:nvSpPr>
+        <p:spPr>
+          <a:xfrm>
+            <a:off x="285750" y="133350"/>
+            <a:ext cx="3500938" cy="523220"/>
+          </a:xfrm>
+          <a:prstGeom prst="rect">
+            <a:avLst/>
+          </a:prstGeom>
+          <a:noFill/>
+        </p:spPr>
+        <p:txBody>
+          <a:bodyPr wrap="square" rtlCol="0">
+            <a:spAutoFit/>
+          </a:bodyPr>
+          <a:lstStyle/>
+          <a:p>
+            <a:r>
+              <a:rPr lang="en-GB" sz="2800" u="sng" dirty="0"/>
+              <a:t>Registration</a:t>
+            </a:r>
+          </a:p>
+        </p:txBody>
+      </p:sp>
+    </p:spTree>
+    <p:extLst>
+      <p:ext uri="{BB962C8B-B14F-4D97-AF65-F5344CB8AC3E}">
+        <p14:creationId xmlns:p14="http://schemas.microsoft.com/office/powerpoint/2010/main" val="2334595281"/>
+      </p:ext>
+    </p:extLst>
+  </p:cSld>
+  <p:clrMapOvr>
+    <a:masterClrMapping/>
+  </p:clrMapOvr>
+</p:sld>
+</file>
+
+<file path=ppt/slides/slide7.xml><?xml version="1.0" encoding="utf-8"?>
 <p:sld xmlns:a="http://schemas.openxmlformats.org/drawingml/2006/main" xmlns:r="http://schemas.openxmlformats.org/officeDocument/2006/relationships" xmlns:p="http://schemas.openxmlformats.org/presentationml/2006/main">
   <p:cSld>
     <p:spTree>
@@ -14322,7 +12591,7 @@
         <p:cNvPr id="1" name="">
           <a:extLst>
             <a:ext uri="{FF2B5EF4-FFF2-40B4-BE49-F238E27FC236}">
-              <a16:creationId xmlns:a16="http://schemas.microsoft.com/office/drawing/2014/main" id="{7EC43E51-26B7-2E10-3E6C-0C6DA0DC35C8}"/>
+              <a16:creationId xmlns:a16="http://schemas.microsoft.com/office/drawing/2014/main" id="{8D022FE6-A73B-DBE2-9AE3-0A40E9FF824A}"/>
             </a:ext>
           </a:extLst>
         </p:cNvPr>
@@ -14339,10 +12608,273 @@
       </p:grpSpPr>
       <p:sp>
         <p:nvSpPr>
+          <p:cNvPr id="3" name="Content Placeholder 2">
+            <a:extLst>
+              <a:ext uri="{FF2B5EF4-FFF2-40B4-BE49-F238E27FC236}">
+                <a16:creationId xmlns:a16="http://schemas.microsoft.com/office/drawing/2014/main" id="{E33CAC1D-897B-FEC3-37B6-B9F5FB42E4EE}"/>
+              </a:ext>
+            </a:extLst>
+          </p:cNvPr>
+          <p:cNvSpPr>
+            <a:spLocks noGrp="1"/>
+          </p:cNvSpPr>
+          <p:nvPr>
+            <p:ph idx="1"/>
+          </p:nvPr>
+        </p:nvSpPr>
+        <p:spPr>
+          <a:xfrm>
+            <a:off x="3498939" y="656570"/>
+            <a:ext cx="3343275" cy="5544251"/>
+          </a:xfrm>
+        </p:spPr>
+        <p:txBody>
+          <a:bodyPr>
+            <a:normAutofit/>
+          </a:bodyPr>
+          <a:lstStyle/>
+          <a:p>
+            <a:pPr marL="0" indent="0">
+              <a:buNone/>
+            </a:pPr>
+            <a:r>
+              <a:rPr lang="en-GB" sz="1600" dirty="0"/>
+              <a:t>When the user inputs their account information in their data is sent form the front end  (on the left) to  the /login function(seen on the right ) which first checks the presence and validity of the inputted data.</a:t>
+            </a:r>
+          </a:p>
+          <a:p>
+            <a:pPr marL="0" indent="0">
+              <a:buNone/>
+            </a:pPr>
+            <a:r>
+              <a:rPr lang="en-GB" sz="1600" dirty="0"/>
+              <a:t> After the validation of the user's data a connection is made to the database in which the function checks that the users inputted details match a pre-existing one in the database.</a:t>
+            </a:r>
+          </a:p>
+          <a:p>
+            <a:pPr marL="0" indent="0">
+              <a:buNone/>
+            </a:pPr>
+            <a:r>
+              <a:rPr lang="en-GB" sz="1600" dirty="0"/>
+              <a:t>For debugging purposes, I had implemented a debug message that sends in the terminal that fetches the username for who just tried to login to make sure that the communication was successful.</a:t>
+            </a:r>
+          </a:p>
+          <a:p>
+            <a:pPr marL="0" indent="0">
+              <a:buNone/>
+            </a:pPr>
+            <a:r>
+              <a:rPr lang="en-GB" sz="1600" dirty="0"/>
+              <a:t>Then there is a check against the data in the database against the users' inputted details, if they pass this final check the user Is redirected to their profile.</a:t>
+            </a:r>
+          </a:p>
+        </p:txBody>
+      </p:sp>
+      <p:sp>
+        <p:nvSpPr>
+          <p:cNvPr id="7" name="TextBox 6">
+            <a:extLst>
+              <a:ext uri="{FF2B5EF4-FFF2-40B4-BE49-F238E27FC236}">
+                <a16:creationId xmlns:a16="http://schemas.microsoft.com/office/drawing/2014/main" id="{6D50F58C-FB20-FB9E-43D9-85D6A4798DAB}"/>
+              </a:ext>
+            </a:extLst>
+          </p:cNvPr>
+          <p:cNvSpPr txBox="1"/>
+          <p:nvPr/>
+        </p:nvSpPr>
+        <p:spPr>
+          <a:xfrm>
+            <a:off x="285750" y="133350"/>
+            <a:ext cx="3500938" cy="523220"/>
+          </a:xfrm>
+          <a:prstGeom prst="rect">
+            <a:avLst/>
+          </a:prstGeom>
+          <a:noFill/>
+        </p:spPr>
+        <p:txBody>
+          <a:bodyPr wrap="square" rtlCol="0">
+            <a:spAutoFit/>
+          </a:bodyPr>
+          <a:lstStyle/>
+          <a:p>
+            <a:r>
+              <a:rPr lang="en-GB" sz="2800" u="sng" dirty="0"/>
+              <a:t>Login</a:t>
+            </a:r>
+          </a:p>
+        </p:txBody>
+      </p:sp>
+      <p:pic>
+        <p:nvPicPr>
+          <p:cNvPr id="2" name="Picture 1">
+            <a:extLst>
+              <a:ext uri="{FF2B5EF4-FFF2-40B4-BE49-F238E27FC236}">
+                <a16:creationId xmlns:a16="http://schemas.microsoft.com/office/drawing/2014/main" id="{D3210642-62A4-7BAD-2220-173080DFC7FD}"/>
+              </a:ext>
+            </a:extLst>
+          </p:cNvPr>
+          <p:cNvPicPr>
+            <a:picLocks noChangeAspect="1"/>
+          </p:cNvPicPr>
+          <p:nvPr/>
+        </p:nvPicPr>
+        <p:blipFill>
+          <a:blip r:embed="rId2"/>
+          <a:stretch>
+            <a:fillRect/>
+          </a:stretch>
+        </p:blipFill>
+        <p:spPr>
+          <a:xfrm>
+            <a:off x="6999877" y="656570"/>
+            <a:ext cx="5049248" cy="5060119"/>
+          </a:xfrm>
+          <a:prstGeom prst="rect">
+            <a:avLst/>
+          </a:prstGeom>
+        </p:spPr>
+      </p:pic>
+      <p:pic>
+        <p:nvPicPr>
+          <p:cNvPr id="8" name="Picture 7">
+            <a:extLst>
+              <a:ext uri="{FF2B5EF4-FFF2-40B4-BE49-F238E27FC236}">
+                <a16:creationId xmlns:a16="http://schemas.microsoft.com/office/drawing/2014/main" id="{5F87AA19-FC34-6FC9-DEF8-880DEF52070F}"/>
+              </a:ext>
+            </a:extLst>
+          </p:cNvPr>
+          <p:cNvPicPr>
+            <a:picLocks noChangeAspect="1"/>
+          </p:cNvPicPr>
+          <p:nvPr/>
+        </p:nvPicPr>
+        <p:blipFill>
+          <a:blip r:embed="rId3"/>
+          <a:srcRect l="5328" r="3607"/>
+          <a:stretch/>
+        </p:blipFill>
+        <p:spPr>
+          <a:xfrm>
+            <a:off x="285750" y="1150165"/>
+            <a:ext cx="2971800" cy="2834677"/>
+          </a:xfrm>
+          <a:prstGeom prst="rect">
+            <a:avLst/>
+          </a:prstGeom>
+        </p:spPr>
+      </p:pic>
+    </p:spTree>
+    <p:extLst>
+      <p:ext uri="{BB962C8B-B14F-4D97-AF65-F5344CB8AC3E}">
+        <p14:creationId xmlns:p14="http://schemas.microsoft.com/office/powerpoint/2010/main" val="1940113368"/>
+      </p:ext>
+    </p:extLst>
+  </p:cSld>
+  <p:clrMapOvr>
+    <a:masterClrMapping/>
+  </p:clrMapOvr>
+</p:sld>
+</file>
+
+<file path=ppt/slides/slide8.xml><?xml version="1.0" encoding="utf-8"?>
+<p:sld xmlns:a="http://schemas.openxmlformats.org/drawingml/2006/main" xmlns:r="http://schemas.openxmlformats.org/officeDocument/2006/relationships" xmlns:p="http://schemas.openxmlformats.org/presentationml/2006/main">
+  <p:cSld>
+    <p:bg>
+      <p:bgPr>
+        <a:solidFill>
+          <a:schemeClr val="bg1"/>
+        </a:solidFill>
+        <a:effectLst/>
+      </p:bgPr>
+    </p:bg>
+    <p:spTree>
+      <p:nvGrpSpPr>
+        <p:cNvPr id="1" name="">
+          <a:extLst>
+            <a:ext uri="{FF2B5EF4-FFF2-40B4-BE49-F238E27FC236}">
+              <a16:creationId xmlns:a16="http://schemas.microsoft.com/office/drawing/2014/main" id="{F9558F44-77FF-BA35-F4B8-67CB1056AEB4}"/>
+            </a:ext>
+          </a:extLst>
+        </p:cNvPr>
+        <p:cNvGrpSpPr/>
+        <p:nvPr/>
+      </p:nvGrpSpPr>
+      <p:grpSpPr>
+        <a:xfrm>
+          <a:off x="0" y="0"/>
+          <a:ext cx="0" cy="0"/>
+          <a:chOff x="0" y="0"/>
+          <a:chExt cx="0" cy="0"/>
+        </a:xfrm>
+      </p:grpSpPr>
+      <p:sp useBgFill="1">
+        <p:nvSpPr>
+          <p:cNvPr id="17" name="Rectangle 16">
+            <a:extLst>
+              <a:ext uri="{FF2B5EF4-FFF2-40B4-BE49-F238E27FC236}">
+                <a16:creationId xmlns:a16="http://schemas.microsoft.com/office/drawing/2014/main" id="{352BEC0E-22F8-46D0-9632-375DB541B06C}"/>
+              </a:ext>
+              <a:ext uri="{C183D7F6-B498-43B3-948B-1728B52AA6E4}">
+                <adec:decorative xmlns:adec="http://schemas.microsoft.com/office/drawing/2017/decorative" val="1"/>
+              </a:ext>
+            </a:extLst>
+          </p:cNvPr>
+          <p:cNvSpPr>
+            <a:spLocks noGrp="1" noRot="1" noChangeAspect="1" noMove="1" noResize="1" noEditPoints="1" noAdjustHandles="1" noChangeArrowheads="1" noChangeShapeType="1" noTextEdit="1"/>
+          </p:cNvSpPr>
+          <p:nvPr>
+            <p:extLst>
+              <p:ext uri="{386F3935-93C4-4BCD-93E2-E3B085C9AB24}">
+                <p16:designElem xmlns:p16="http://schemas.microsoft.com/office/powerpoint/2015/main" val="1"/>
+              </p:ext>
+            </p:extLst>
+          </p:nvPr>
+        </p:nvSpPr>
+        <p:spPr>
+          <a:xfrm>
+            <a:off x="0" y="0"/>
+            <a:ext cx="12188952" cy="6858000"/>
+          </a:xfrm>
+          <a:prstGeom prst="rect">
+            <a:avLst/>
+          </a:prstGeom>
+          <a:ln>
+            <a:noFill/>
+          </a:ln>
+        </p:spPr>
+        <p:style>
+          <a:lnRef idx="2">
+            <a:schemeClr val="accent1">
+              <a:shade val="50000"/>
+            </a:schemeClr>
+          </a:lnRef>
+          <a:fillRef idx="1">
+            <a:schemeClr val="accent1"/>
+          </a:fillRef>
+          <a:effectRef idx="0">
+            <a:schemeClr val="accent1"/>
+          </a:effectRef>
+          <a:fontRef idx="minor">
+            <a:schemeClr val="lt1"/>
+          </a:fontRef>
+        </p:style>
+        <p:txBody>
+          <a:bodyPr rtlCol="0" anchor="ctr"/>
+          <a:lstStyle/>
+          <a:p>
+            <a:pPr algn="ctr"/>
+            <a:endParaRPr lang="en-US"/>
+          </a:p>
+        </p:txBody>
+      </p:sp>
+      <p:sp>
+        <p:nvSpPr>
           <p:cNvPr id="2" name="Title 1">
             <a:extLst>
               <a:ext uri="{FF2B5EF4-FFF2-40B4-BE49-F238E27FC236}">
-                <a16:creationId xmlns:a16="http://schemas.microsoft.com/office/drawing/2014/main" id="{789E94C3-E78B-1305-F091-792F8EA13519}"/>
+                <a16:creationId xmlns:a16="http://schemas.microsoft.com/office/drawing/2014/main" id="{426DD5AE-8FD0-30A0-8449-55191F0B9A06}"/>
               </a:ext>
             </a:extLst>
           </p:cNvPr>
@@ -14366,9 +12898,352 @@
           <a:lstStyle/>
           <a:p>
             <a:r>
-              <a:rPr lang="en-GB" sz="5400"/>
-              <a:t>Organised into functions/classes</a:t>
+              <a:rPr lang="en-GB" sz="5400" dirty="0"/>
+              <a:t>Functionality- organised code</a:t>
             </a:r>
+          </a:p>
+        </p:txBody>
+      </p:sp>
+      <p:sp>
+        <p:nvSpPr>
+          <p:cNvPr id="19" name="sketch line">
+            <a:extLst>
+              <a:ext uri="{FF2B5EF4-FFF2-40B4-BE49-F238E27FC236}">
+                <a16:creationId xmlns:a16="http://schemas.microsoft.com/office/drawing/2014/main" id="{3FCFB1DE-0B7E-48CC-BA90-B2AB0889F9D6}"/>
+              </a:ext>
+              <a:ext uri="{C183D7F6-B498-43B3-948B-1728B52AA6E4}">
+                <adec:decorative xmlns:adec="http://schemas.microsoft.com/office/drawing/2017/decorative" val="1"/>
+              </a:ext>
+            </a:extLst>
+          </p:cNvPr>
+          <p:cNvSpPr>
+            <a:spLocks noGrp="1" noRot="1" noChangeAspect="1" noMove="1" noResize="1" noEditPoints="1" noAdjustHandles="1" noChangeArrowheads="1" noChangeShapeType="1" noTextEdit="1"/>
+          </p:cNvSpPr>
+          <p:nvPr>
+            <p:extLst>
+              <p:ext uri="{386F3935-93C4-4BCD-93E2-E3B085C9AB24}">
+                <p16:designElem xmlns:p16="http://schemas.microsoft.com/office/powerpoint/2015/main" val="1"/>
+              </p:ext>
+            </p:extLst>
+          </p:nvPr>
+        </p:nvSpPr>
+        <p:spPr>
+          <a:xfrm>
+            <a:off x="758952" y="2395728"/>
+            <a:ext cx="4243589" cy="18288"/>
+          </a:xfrm>
+          <a:custGeom>
+            <a:avLst/>
+            <a:gdLst>
+              <a:gd name="connsiteX0" fmla="*/ 0 w 4243589"/>
+              <a:gd name="connsiteY0" fmla="*/ 0 h 18288"/>
+              <a:gd name="connsiteX1" fmla="*/ 478919 w 4243589"/>
+              <a:gd name="connsiteY1" fmla="*/ 0 h 18288"/>
+              <a:gd name="connsiteX2" fmla="*/ 957839 w 4243589"/>
+              <a:gd name="connsiteY2" fmla="*/ 0 h 18288"/>
+              <a:gd name="connsiteX3" fmla="*/ 1521630 w 4243589"/>
+              <a:gd name="connsiteY3" fmla="*/ 0 h 18288"/>
+              <a:gd name="connsiteX4" fmla="*/ 2212729 w 4243589"/>
+              <a:gd name="connsiteY4" fmla="*/ 0 h 18288"/>
+              <a:gd name="connsiteX5" fmla="*/ 2734084 w 4243589"/>
+              <a:gd name="connsiteY5" fmla="*/ 0 h 18288"/>
+              <a:gd name="connsiteX6" fmla="*/ 3255439 w 4243589"/>
+              <a:gd name="connsiteY6" fmla="*/ 0 h 18288"/>
+              <a:gd name="connsiteX7" fmla="*/ 4243589 w 4243589"/>
+              <a:gd name="connsiteY7" fmla="*/ 0 h 18288"/>
+              <a:gd name="connsiteX8" fmla="*/ 4243589 w 4243589"/>
+              <a:gd name="connsiteY8" fmla="*/ 18288 h 18288"/>
+              <a:gd name="connsiteX9" fmla="*/ 3594926 w 4243589"/>
+              <a:gd name="connsiteY9" fmla="*/ 18288 h 18288"/>
+              <a:gd name="connsiteX10" fmla="*/ 3073571 w 4243589"/>
+              <a:gd name="connsiteY10" fmla="*/ 18288 h 18288"/>
+              <a:gd name="connsiteX11" fmla="*/ 2552216 w 4243589"/>
+              <a:gd name="connsiteY11" fmla="*/ 18288 h 18288"/>
+              <a:gd name="connsiteX12" fmla="*/ 1903553 w 4243589"/>
+              <a:gd name="connsiteY12" fmla="*/ 18288 h 18288"/>
+              <a:gd name="connsiteX13" fmla="*/ 1212454 w 4243589"/>
+              <a:gd name="connsiteY13" fmla="*/ 18288 h 18288"/>
+              <a:gd name="connsiteX14" fmla="*/ 733535 w 4243589"/>
+              <a:gd name="connsiteY14" fmla="*/ 18288 h 18288"/>
+              <a:gd name="connsiteX15" fmla="*/ 0 w 4243589"/>
+              <a:gd name="connsiteY15" fmla="*/ 18288 h 18288"/>
+              <a:gd name="connsiteX16" fmla="*/ 0 w 4243589"/>
+              <a:gd name="connsiteY16" fmla="*/ 0 h 18288"/>
+            </a:gdLst>
+            <a:ahLst/>
+            <a:cxnLst>
+              <a:cxn ang="0">
+                <a:pos x="connsiteX0" y="connsiteY0"/>
+              </a:cxn>
+              <a:cxn ang="0">
+                <a:pos x="connsiteX1" y="connsiteY1"/>
+              </a:cxn>
+              <a:cxn ang="0">
+                <a:pos x="connsiteX2" y="connsiteY2"/>
+              </a:cxn>
+              <a:cxn ang="0">
+                <a:pos x="connsiteX3" y="connsiteY3"/>
+              </a:cxn>
+              <a:cxn ang="0">
+                <a:pos x="connsiteX4" y="connsiteY4"/>
+              </a:cxn>
+              <a:cxn ang="0">
+                <a:pos x="connsiteX5" y="connsiteY5"/>
+              </a:cxn>
+              <a:cxn ang="0">
+                <a:pos x="connsiteX6" y="connsiteY6"/>
+              </a:cxn>
+              <a:cxn ang="0">
+                <a:pos x="connsiteX7" y="connsiteY7"/>
+              </a:cxn>
+              <a:cxn ang="0">
+                <a:pos x="connsiteX8" y="connsiteY8"/>
+              </a:cxn>
+              <a:cxn ang="0">
+                <a:pos x="connsiteX9" y="connsiteY9"/>
+              </a:cxn>
+              <a:cxn ang="0">
+                <a:pos x="connsiteX10" y="connsiteY10"/>
+              </a:cxn>
+              <a:cxn ang="0">
+                <a:pos x="connsiteX11" y="connsiteY11"/>
+              </a:cxn>
+              <a:cxn ang="0">
+                <a:pos x="connsiteX12" y="connsiteY12"/>
+              </a:cxn>
+              <a:cxn ang="0">
+                <a:pos x="connsiteX13" y="connsiteY13"/>
+              </a:cxn>
+              <a:cxn ang="0">
+                <a:pos x="connsiteX14" y="connsiteY14"/>
+              </a:cxn>
+              <a:cxn ang="0">
+                <a:pos x="connsiteX15" y="connsiteY15"/>
+              </a:cxn>
+              <a:cxn ang="0">
+                <a:pos x="connsiteX16" y="connsiteY16"/>
+              </a:cxn>
+            </a:cxnLst>
+            <a:rect l="l" t="t" r="r" b="b"/>
+            <a:pathLst>
+              <a:path w="4243589" h="18288" fill="none" extrusionOk="0">
+                <a:moveTo>
+                  <a:pt x="0" y="0"/>
+                </a:moveTo>
+                <a:cubicBezTo>
+                  <a:pt x="213395" y="-21006"/>
+                  <a:pt x="307421" y="-18116"/>
+                  <a:pt x="478919" y="0"/>
+                </a:cubicBezTo>
+                <a:cubicBezTo>
+                  <a:pt x="650417" y="18116"/>
+                  <a:pt x="831092" y="-21237"/>
+                  <a:pt x="957839" y="0"/>
+                </a:cubicBezTo>
+                <a:cubicBezTo>
+                  <a:pt x="1084586" y="21237"/>
+                  <a:pt x="1301682" y="25124"/>
+                  <a:pt x="1521630" y="0"/>
+                </a:cubicBezTo>
+                <a:cubicBezTo>
+                  <a:pt x="1741578" y="-25124"/>
+                  <a:pt x="1970269" y="-29139"/>
+                  <a:pt x="2212729" y="0"/>
+                </a:cubicBezTo>
+                <a:cubicBezTo>
+                  <a:pt x="2455189" y="29139"/>
+                  <a:pt x="2558847" y="-4796"/>
+                  <a:pt x="2734084" y="0"/>
+                </a:cubicBezTo>
+                <a:cubicBezTo>
+                  <a:pt x="2909321" y="4796"/>
+                  <a:pt x="3097217" y="-13409"/>
+                  <a:pt x="3255439" y="0"/>
+                </a:cubicBezTo>
+                <a:cubicBezTo>
+                  <a:pt x="3413662" y="13409"/>
+                  <a:pt x="3979999" y="-10121"/>
+                  <a:pt x="4243589" y="0"/>
+                </a:cubicBezTo>
+                <a:cubicBezTo>
+                  <a:pt x="4244484" y="8974"/>
+                  <a:pt x="4243043" y="9359"/>
+                  <a:pt x="4243589" y="18288"/>
+                </a:cubicBezTo>
+                <a:cubicBezTo>
+                  <a:pt x="4058777" y="31246"/>
+                  <a:pt x="3910348" y="3158"/>
+                  <a:pt x="3594926" y="18288"/>
+                </a:cubicBezTo>
+                <a:cubicBezTo>
+                  <a:pt x="3279504" y="33418"/>
+                  <a:pt x="3319955" y="-3977"/>
+                  <a:pt x="3073571" y="18288"/>
+                </a:cubicBezTo>
+                <a:cubicBezTo>
+                  <a:pt x="2827187" y="40553"/>
+                  <a:pt x="2767387" y="1863"/>
+                  <a:pt x="2552216" y="18288"/>
+                </a:cubicBezTo>
+                <a:cubicBezTo>
+                  <a:pt x="2337046" y="34713"/>
+                  <a:pt x="2181871" y="19527"/>
+                  <a:pt x="1903553" y="18288"/>
+                </a:cubicBezTo>
+                <a:cubicBezTo>
+                  <a:pt x="1625235" y="17049"/>
+                  <a:pt x="1557672" y="24174"/>
+                  <a:pt x="1212454" y="18288"/>
+                </a:cubicBezTo>
+                <a:cubicBezTo>
+                  <a:pt x="867236" y="12402"/>
+                  <a:pt x="874382" y="15627"/>
+                  <a:pt x="733535" y="18288"/>
+                </a:cubicBezTo>
+                <a:cubicBezTo>
+                  <a:pt x="592688" y="20949"/>
+                  <a:pt x="183477" y="14753"/>
+                  <a:pt x="0" y="18288"/>
+                </a:cubicBezTo>
+                <a:cubicBezTo>
+                  <a:pt x="-229" y="14222"/>
+                  <a:pt x="509" y="5816"/>
+                  <a:pt x="0" y="0"/>
+                </a:cubicBezTo>
+                <a:close/>
+              </a:path>
+              <a:path w="4243589" h="18288" stroke="0" extrusionOk="0">
+                <a:moveTo>
+                  <a:pt x="0" y="0"/>
+                </a:moveTo>
+                <a:cubicBezTo>
+                  <a:pt x="143690" y="16630"/>
+                  <a:pt x="266667" y="14847"/>
+                  <a:pt x="521355" y="0"/>
+                </a:cubicBezTo>
+                <a:cubicBezTo>
+                  <a:pt x="776043" y="-14847"/>
+                  <a:pt x="814491" y="-17363"/>
+                  <a:pt x="1000275" y="0"/>
+                </a:cubicBezTo>
+                <a:cubicBezTo>
+                  <a:pt x="1186059" y="17363"/>
+                  <a:pt x="1352504" y="-23507"/>
+                  <a:pt x="1521630" y="0"/>
+                </a:cubicBezTo>
+                <a:cubicBezTo>
+                  <a:pt x="1690756" y="23507"/>
+                  <a:pt x="1889525" y="5871"/>
+                  <a:pt x="2127857" y="0"/>
+                </a:cubicBezTo>
+                <a:cubicBezTo>
+                  <a:pt x="2366189" y="-5871"/>
+                  <a:pt x="2620628" y="-27997"/>
+                  <a:pt x="2776520" y="0"/>
+                </a:cubicBezTo>
+                <a:cubicBezTo>
+                  <a:pt x="2932412" y="27997"/>
+                  <a:pt x="3131683" y="-25073"/>
+                  <a:pt x="3467618" y="0"/>
+                </a:cubicBezTo>
+                <a:cubicBezTo>
+                  <a:pt x="3803553" y="25073"/>
+                  <a:pt x="4017371" y="3071"/>
+                  <a:pt x="4243589" y="0"/>
+                </a:cubicBezTo>
+                <a:cubicBezTo>
+                  <a:pt x="4243134" y="6162"/>
+                  <a:pt x="4243492" y="11775"/>
+                  <a:pt x="4243589" y="18288"/>
+                </a:cubicBezTo>
+                <a:cubicBezTo>
+                  <a:pt x="4017834" y="-5779"/>
+                  <a:pt x="3834586" y="13376"/>
+                  <a:pt x="3594926" y="18288"/>
+                </a:cubicBezTo>
+                <a:cubicBezTo>
+                  <a:pt x="3355266" y="23200"/>
+                  <a:pt x="3204179" y="2869"/>
+                  <a:pt x="2903827" y="18288"/>
+                </a:cubicBezTo>
+                <a:cubicBezTo>
+                  <a:pt x="2603475" y="33707"/>
+                  <a:pt x="2526187" y="46187"/>
+                  <a:pt x="2212729" y="18288"/>
+                </a:cubicBezTo>
+                <a:cubicBezTo>
+                  <a:pt x="1899271" y="-9611"/>
+                  <a:pt x="1966289" y="29692"/>
+                  <a:pt x="1733809" y="18288"/>
+                </a:cubicBezTo>
+                <a:cubicBezTo>
+                  <a:pt x="1501329" y="6884"/>
+                  <a:pt x="1343612" y="12492"/>
+                  <a:pt x="1085146" y="18288"/>
+                </a:cubicBezTo>
+                <a:cubicBezTo>
+                  <a:pt x="826680" y="24084"/>
+                  <a:pt x="778184" y="35607"/>
+                  <a:pt x="521355" y="18288"/>
+                </a:cubicBezTo>
+                <a:cubicBezTo>
+                  <a:pt x="264526" y="969"/>
+                  <a:pt x="120277" y="4268"/>
+                  <a:pt x="0" y="18288"/>
+                </a:cubicBezTo>
+                <a:cubicBezTo>
+                  <a:pt x="766" y="10800"/>
+                  <a:pt x="-457" y="8180"/>
+                  <a:pt x="0" y="0"/>
+                </a:cubicBezTo>
+                <a:close/>
+              </a:path>
+            </a:pathLst>
+          </a:custGeom>
+          <a:solidFill>
+            <a:schemeClr val="accent2"/>
+          </a:solidFill>
+          <a:ln w="41275" cap="rnd">
+            <a:solidFill>
+              <a:schemeClr val="accent2"/>
+            </a:solidFill>
+            <a:round/>
+            <a:extLst>
+              <a:ext uri="{C807C97D-BFC1-408E-A445-0C87EB9F89A2}">
+                <ask:lineSketchStyleProps xmlns:ask="http://schemas.microsoft.com/office/drawing/2018/sketchyshapes" sd="2727557108">
+                  <a:prstGeom prst="rect">
+                    <a:avLst/>
+                  </a:prstGeom>
+                  <ask:type>
+                    <ask:lineSketchFreehand/>
+                  </ask:type>
+                </ask:lineSketchStyleProps>
+              </a:ext>
+            </a:extLst>
+          </a:ln>
+        </p:spPr>
+        <p:style>
+          <a:lnRef idx="2">
+            <a:schemeClr val="accent1">
+              <a:shade val="50000"/>
+            </a:schemeClr>
+          </a:lnRef>
+          <a:fillRef idx="1">
+            <a:schemeClr val="accent1"/>
+          </a:fillRef>
+          <a:effectRef idx="0">
+            <a:schemeClr val="accent1"/>
+          </a:effectRef>
+          <a:fontRef idx="minor">
+            <a:schemeClr val="lt1"/>
+          </a:fontRef>
+        </p:style>
+        <p:txBody>
+          <a:bodyPr rtlCol="0" anchor="ctr"/>
+          <a:lstStyle/>
+          <a:p>
+            <a:pPr algn="ctr"/>
+            <a:endParaRPr lang="en-US"/>
           </a:p>
         </p:txBody>
       </p:sp>
@@ -14377,7 +13252,7 @@
           <p:cNvPr id="3" name="Content Placeholder 2">
             <a:extLst>
               <a:ext uri="{FF2B5EF4-FFF2-40B4-BE49-F238E27FC236}">
-                <a16:creationId xmlns:a16="http://schemas.microsoft.com/office/drawing/2014/main" id="{3B4FB561-FBAF-75CD-66DE-3CF3EBCDB7B0}"/>
+                <a16:creationId xmlns:a16="http://schemas.microsoft.com/office/drawing/2014/main" id="{643EA902-C72C-662E-F56E-3D8E0DF9F48E}"/>
               </a:ext>
             </a:extLst>
           </p:cNvPr>
@@ -14391,7 +13266,7 @@
         <p:spPr>
           <a:xfrm>
             <a:off x="640080" y="2706624"/>
-            <a:ext cx="4554220" cy="3483864"/>
+            <a:ext cx="6894576" cy="3483864"/>
           </a:xfrm>
         </p:spPr>
         <p:txBody>
@@ -14401,13 +13276,26 @@
           <a:lstStyle/>
           <a:p>
             <a:r>
-              <a:rPr lang="en-GB" sz="2200" dirty="0"/>
-              <a:t>Each core feature is organised and named into a individual class and whether they are functional or nonfunctional </a:t>
+              <a:rPr lang="en-GB" dirty="0"/>
+              <a:t>Neatly organised code: separated Back-end and front-end logic for clarity.(</a:t>
             </a:r>
             <a:r>
-              <a:rPr lang="en-GB" sz="2200" b="1" dirty="0"/>
-              <a:t>( example on the right)</a:t>
+              <a:rPr lang="en-GB" b="1" dirty="0"/>
+              <a:t>shown on the right)</a:t>
             </a:r>
+          </a:p>
+          <a:p>
+            <a:endParaRPr lang="en-GB" sz="2200" b="1" dirty="0"/>
+          </a:p>
+          <a:p>
+            <a:pPr marL="0" indent="0">
+              <a:buNone/>
+            </a:pPr>
+            <a:endParaRPr lang="en-GB" sz="2200" dirty="0"/>
+          </a:p>
+          <a:p>
+            <a:pPr lvl="1"/>
+            <a:endParaRPr lang="en-GB" sz="2200" dirty="0"/>
           </a:p>
         </p:txBody>
       </p:sp>
@@ -14416,7 +13304,7 @@
           <p:cNvPr id="8" name="Picture 7">
             <a:extLst>
               <a:ext uri="{FF2B5EF4-FFF2-40B4-BE49-F238E27FC236}">
-                <a16:creationId xmlns:a16="http://schemas.microsoft.com/office/drawing/2014/main" id="{10FA2DC9-B646-C201-D7C5-42187BDE4504}"/>
+                <a16:creationId xmlns:a16="http://schemas.microsoft.com/office/drawing/2014/main" id="{88DE4DA1-AA8F-4923-6EC7-53CFB3C9EC5A}"/>
               </a:ext>
             </a:extLst>
           </p:cNvPr>
@@ -14433,8 +13321,8 @@
         </p:blipFill>
         <p:spPr>
           <a:xfrm>
-            <a:off x="6260456" y="329184"/>
-            <a:ext cx="5617600" cy="2668359"/>
+            <a:off x="7863840" y="393321"/>
+            <a:ext cx="4014216" cy="3301692"/>
           </a:xfrm>
           <a:prstGeom prst="rect">
             <a:avLst/>
@@ -14446,7 +13334,7 @@
           <p:cNvPr id="6" name="Picture 5">
             <a:extLst>
               <a:ext uri="{FF2B5EF4-FFF2-40B4-BE49-F238E27FC236}">
-                <a16:creationId xmlns:a16="http://schemas.microsoft.com/office/drawing/2014/main" id="{5170862E-5B7E-08B9-E0D1-129BBFC90E4A}"/>
+                <a16:creationId xmlns:a16="http://schemas.microsoft.com/office/drawing/2014/main" id="{7050DB3F-AD9D-F8F6-2A48-5D11AFF81B8A}"/>
               </a:ext>
             </a:extLst>
           </p:cNvPr>
@@ -14457,13 +13345,14 @@
         </p:nvPicPr>
         <p:blipFill>
           <a:blip r:embed="rId3"/>
-          <a:srcRect r="19618"/>
-          <a:stretch/>
+          <a:stretch>
+            <a:fillRect/>
+          </a:stretch>
         </p:blipFill>
         <p:spPr>
           <a:xfrm>
-            <a:off x="6260456" y="3326726"/>
-            <a:ext cx="5571116" cy="2668359"/>
+            <a:off x="7863840" y="4373139"/>
+            <a:ext cx="3995928" cy="1588380"/>
           </a:xfrm>
           <a:prstGeom prst="rect">
             <a:avLst/>
@@ -14473,7 +13362,7 @@
     </p:spTree>
     <p:extLst>
       <p:ext uri="{BB962C8B-B14F-4D97-AF65-F5344CB8AC3E}">
-        <p14:creationId xmlns:p14="http://schemas.microsoft.com/office/powerpoint/2010/main" val="2549562312"/>
+        <p14:creationId xmlns:p14="http://schemas.microsoft.com/office/powerpoint/2010/main" val="1654054917"/>
       </p:ext>
     </p:extLst>
   </p:cSld>
@@ -14483,15 +13372,23 @@
 </p:sld>
 </file>
 
-<file path=ppt/slides/slide5.xml><?xml version="1.0" encoding="utf-8"?>
+<file path=ppt/slides/slide9.xml><?xml version="1.0" encoding="utf-8"?>
 <p:sld xmlns:a="http://schemas.openxmlformats.org/drawingml/2006/main" xmlns:r="http://schemas.openxmlformats.org/officeDocument/2006/relationships" xmlns:p="http://schemas.openxmlformats.org/presentationml/2006/main">
   <p:cSld>
+    <p:bg>
+      <p:bgPr>
+        <a:solidFill>
+          <a:schemeClr val="bg1"/>
+        </a:solidFill>
+        <a:effectLst/>
+      </p:bgPr>
+    </p:bg>
     <p:spTree>
       <p:nvGrpSpPr>
         <p:cNvPr id="1" name="">
           <a:extLst>
             <a:ext uri="{FF2B5EF4-FFF2-40B4-BE49-F238E27FC236}">
-              <a16:creationId xmlns:a16="http://schemas.microsoft.com/office/drawing/2014/main" id="{77CBEE0E-30A6-0BE2-42C9-79FE273410FC}"/>
+              <a16:creationId xmlns:a16="http://schemas.microsoft.com/office/drawing/2014/main" id="{791DD22C-ABB5-28E6-66AA-D9FB7BBA0860}"/>
             </a:ext>
           </a:extLst>
         </p:cNvPr>
@@ -14506,12 +13403,72 @@
           <a:chExt cx="0" cy="0"/>
         </a:xfrm>
       </p:grpSpPr>
+      <p:sp useBgFill="1">
+        <p:nvSpPr>
+          <p:cNvPr id="26" name="Rectangle 25">
+            <a:extLst>
+              <a:ext uri="{FF2B5EF4-FFF2-40B4-BE49-F238E27FC236}">
+                <a16:creationId xmlns:a16="http://schemas.microsoft.com/office/drawing/2014/main" id="{352BEC0E-22F8-46D0-9632-375DB541B06C}"/>
+              </a:ext>
+              <a:ext uri="{C183D7F6-B498-43B3-948B-1728B52AA6E4}">
+                <adec:decorative xmlns:adec="http://schemas.microsoft.com/office/drawing/2017/decorative" val="1"/>
+              </a:ext>
+            </a:extLst>
+          </p:cNvPr>
+          <p:cNvSpPr>
+            <a:spLocks noGrp="1" noRot="1" noChangeAspect="1" noMove="1" noResize="1" noEditPoints="1" noAdjustHandles="1" noChangeArrowheads="1" noChangeShapeType="1" noTextEdit="1"/>
+          </p:cNvSpPr>
+          <p:nvPr>
+            <p:extLst>
+              <p:ext uri="{386F3935-93C4-4BCD-93E2-E3B085C9AB24}">
+                <p16:designElem xmlns:p16="http://schemas.microsoft.com/office/powerpoint/2015/main" val="1"/>
+              </p:ext>
+            </p:extLst>
+          </p:nvPr>
+        </p:nvSpPr>
+        <p:spPr>
+          <a:xfrm>
+            <a:off x="0" y="0"/>
+            <a:ext cx="12188952" cy="6858000"/>
+          </a:xfrm>
+          <a:prstGeom prst="rect">
+            <a:avLst/>
+          </a:prstGeom>
+          <a:ln>
+            <a:noFill/>
+          </a:ln>
+        </p:spPr>
+        <p:style>
+          <a:lnRef idx="2">
+            <a:schemeClr val="accent1">
+              <a:shade val="50000"/>
+            </a:schemeClr>
+          </a:lnRef>
+          <a:fillRef idx="1">
+            <a:schemeClr val="accent1"/>
+          </a:fillRef>
+          <a:effectRef idx="0">
+            <a:schemeClr val="accent1"/>
+          </a:effectRef>
+          <a:fontRef idx="minor">
+            <a:schemeClr val="lt1"/>
+          </a:fontRef>
+        </p:style>
+        <p:txBody>
+          <a:bodyPr rtlCol="0" anchor="ctr"/>
+          <a:lstStyle/>
+          <a:p>
+            <a:pPr algn="ctr"/>
+            <a:endParaRPr lang="en-US"/>
+          </a:p>
+        </p:txBody>
+      </p:sp>
       <p:sp>
         <p:nvSpPr>
           <p:cNvPr id="2" name="Title 1">
             <a:extLst>
               <a:ext uri="{FF2B5EF4-FFF2-40B4-BE49-F238E27FC236}">
-                <a16:creationId xmlns:a16="http://schemas.microsoft.com/office/drawing/2014/main" id="{1495219E-4D21-E33E-3347-7C40760A9913}"/>
+                <a16:creationId xmlns:a16="http://schemas.microsoft.com/office/drawing/2014/main" id="{1B841E5B-52FA-E506-F325-CC3C660C985C}"/>
               </a:ext>
             </a:extLst>
           </p:cNvPr>
@@ -14536,8 +13493,351 @@
           <a:p>
             <a:r>
               <a:rPr lang="en-GB" sz="5400"/>
-              <a:t>Organised into functions/classes</a:t>
+              <a:t>Functionality- Comprehensive APIs</a:t>
             </a:r>
+          </a:p>
+        </p:txBody>
+      </p:sp>
+      <p:sp>
+        <p:nvSpPr>
+          <p:cNvPr id="27" name="sketch line">
+            <a:extLst>
+              <a:ext uri="{FF2B5EF4-FFF2-40B4-BE49-F238E27FC236}">
+                <a16:creationId xmlns:a16="http://schemas.microsoft.com/office/drawing/2014/main" id="{3FCFB1DE-0B7E-48CC-BA90-B2AB0889F9D6}"/>
+              </a:ext>
+              <a:ext uri="{C183D7F6-B498-43B3-948B-1728B52AA6E4}">
+                <adec:decorative xmlns:adec="http://schemas.microsoft.com/office/drawing/2017/decorative" val="1"/>
+              </a:ext>
+            </a:extLst>
+          </p:cNvPr>
+          <p:cNvSpPr>
+            <a:spLocks noGrp="1" noRot="1" noChangeAspect="1" noMove="1" noResize="1" noEditPoints="1" noAdjustHandles="1" noChangeArrowheads="1" noChangeShapeType="1" noTextEdit="1"/>
+          </p:cNvSpPr>
+          <p:nvPr>
+            <p:extLst>
+              <p:ext uri="{386F3935-93C4-4BCD-93E2-E3B085C9AB24}">
+                <p16:designElem xmlns:p16="http://schemas.microsoft.com/office/powerpoint/2015/main" val="1"/>
+              </p:ext>
+            </p:extLst>
+          </p:nvPr>
+        </p:nvSpPr>
+        <p:spPr>
+          <a:xfrm>
+            <a:off x="758952" y="2395728"/>
+            <a:ext cx="4243589" cy="18288"/>
+          </a:xfrm>
+          <a:custGeom>
+            <a:avLst/>
+            <a:gdLst>
+              <a:gd name="connsiteX0" fmla="*/ 0 w 4243589"/>
+              <a:gd name="connsiteY0" fmla="*/ 0 h 18288"/>
+              <a:gd name="connsiteX1" fmla="*/ 478919 w 4243589"/>
+              <a:gd name="connsiteY1" fmla="*/ 0 h 18288"/>
+              <a:gd name="connsiteX2" fmla="*/ 957839 w 4243589"/>
+              <a:gd name="connsiteY2" fmla="*/ 0 h 18288"/>
+              <a:gd name="connsiteX3" fmla="*/ 1521630 w 4243589"/>
+              <a:gd name="connsiteY3" fmla="*/ 0 h 18288"/>
+              <a:gd name="connsiteX4" fmla="*/ 2212729 w 4243589"/>
+              <a:gd name="connsiteY4" fmla="*/ 0 h 18288"/>
+              <a:gd name="connsiteX5" fmla="*/ 2734084 w 4243589"/>
+              <a:gd name="connsiteY5" fmla="*/ 0 h 18288"/>
+              <a:gd name="connsiteX6" fmla="*/ 3255439 w 4243589"/>
+              <a:gd name="connsiteY6" fmla="*/ 0 h 18288"/>
+              <a:gd name="connsiteX7" fmla="*/ 4243589 w 4243589"/>
+              <a:gd name="connsiteY7" fmla="*/ 0 h 18288"/>
+              <a:gd name="connsiteX8" fmla="*/ 4243589 w 4243589"/>
+              <a:gd name="connsiteY8" fmla="*/ 18288 h 18288"/>
+              <a:gd name="connsiteX9" fmla="*/ 3594926 w 4243589"/>
+              <a:gd name="connsiteY9" fmla="*/ 18288 h 18288"/>
+              <a:gd name="connsiteX10" fmla="*/ 3073571 w 4243589"/>
+              <a:gd name="connsiteY10" fmla="*/ 18288 h 18288"/>
+              <a:gd name="connsiteX11" fmla="*/ 2552216 w 4243589"/>
+              <a:gd name="connsiteY11" fmla="*/ 18288 h 18288"/>
+              <a:gd name="connsiteX12" fmla="*/ 1903553 w 4243589"/>
+              <a:gd name="connsiteY12" fmla="*/ 18288 h 18288"/>
+              <a:gd name="connsiteX13" fmla="*/ 1212454 w 4243589"/>
+              <a:gd name="connsiteY13" fmla="*/ 18288 h 18288"/>
+              <a:gd name="connsiteX14" fmla="*/ 733535 w 4243589"/>
+              <a:gd name="connsiteY14" fmla="*/ 18288 h 18288"/>
+              <a:gd name="connsiteX15" fmla="*/ 0 w 4243589"/>
+              <a:gd name="connsiteY15" fmla="*/ 18288 h 18288"/>
+              <a:gd name="connsiteX16" fmla="*/ 0 w 4243589"/>
+              <a:gd name="connsiteY16" fmla="*/ 0 h 18288"/>
+            </a:gdLst>
+            <a:ahLst/>
+            <a:cxnLst>
+              <a:cxn ang="0">
+                <a:pos x="connsiteX0" y="connsiteY0"/>
+              </a:cxn>
+              <a:cxn ang="0">
+                <a:pos x="connsiteX1" y="connsiteY1"/>
+              </a:cxn>
+              <a:cxn ang="0">
+                <a:pos x="connsiteX2" y="connsiteY2"/>
+              </a:cxn>
+              <a:cxn ang="0">
+                <a:pos x="connsiteX3" y="connsiteY3"/>
+              </a:cxn>
+              <a:cxn ang="0">
+                <a:pos x="connsiteX4" y="connsiteY4"/>
+              </a:cxn>
+              <a:cxn ang="0">
+                <a:pos x="connsiteX5" y="connsiteY5"/>
+              </a:cxn>
+              <a:cxn ang="0">
+                <a:pos x="connsiteX6" y="connsiteY6"/>
+              </a:cxn>
+              <a:cxn ang="0">
+                <a:pos x="connsiteX7" y="connsiteY7"/>
+              </a:cxn>
+              <a:cxn ang="0">
+                <a:pos x="connsiteX8" y="connsiteY8"/>
+              </a:cxn>
+              <a:cxn ang="0">
+                <a:pos x="connsiteX9" y="connsiteY9"/>
+              </a:cxn>
+              <a:cxn ang="0">
+                <a:pos x="connsiteX10" y="connsiteY10"/>
+              </a:cxn>
+              <a:cxn ang="0">
+                <a:pos x="connsiteX11" y="connsiteY11"/>
+              </a:cxn>
+              <a:cxn ang="0">
+                <a:pos x="connsiteX12" y="connsiteY12"/>
+              </a:cxn>
+              <a:cxn ang="0">
+                <a:pos x="connsiteX13" y="connsiteY13"/>
+              </a:cxn>
+              <a:cxn ang="0">
+                <a:pos x="connsiteX14" y="connsiteY14"/>
+              </a:cxn>
+              <a:cxn ang="0">
+                <a:pos x="connsiteX15" y="connsiteY15"/>
+              </a:cxn>
+              <a:cxn ang="0">
+                <a:pos x="connsiteX16" y="connsiteY16"/>
+              </a:cxn>
+            </a:cxnLst>
+            <a:rect l="l" t="t" r="r" b="b"/>
+            <a:pathLst>
+              <a:path w="4243589" h="18288" fill="none" extrusionOk="0">
+                <a:moveTo>
+                  <a:pt x="0" y="0"/>
+                </a:moveTo>
+                <a:cubicBezTo>
+                  <a:pt x="213395" y="-21006"/>
+                  <a:pt x="307421" y="-18116"/>
+                  <a:pt x="478919" y="0"/>
+                </a:cubicBezTo>
+                <a:cubicBezTo>
+                  <a:pt x="650417" y="18116"/>
+                  <a:pt x="831092" y="-21237"/>
+                  <a:pt x="957839" y="0"/>
+                </a:cubicBezTo>
+                <a:cubicBezTo>
+                  <a:pt x="1084586" y="21237"/>
+                  <a:pt x="1301682" y="25124"/>
+                  <a:pt x="1521630" y="0"/>
+                </a:cubicBezTo>
+                <a:cubicBezTo>
+                  <a:pt x="1741578" y="-25124"/>
+                  <a:pt x="1970269" y="-29139"/>
+                  <a:pt x="2212729" y="0"/>
+                </a:cubicBezTo>
+                <a:cubicBezTo>
+                  <a:pt x="2455189" y="29139"/>
+                  <a:pt x="2558847" y="-4796"/>
+                  <a:pt x="2734084" y="0"/>
+                </a:cubicBezTo>
+                <a:cubicBezTo>
+                  <a:pt x="2909321" y="4796"/>
+                  <a:pt x="3097217" y="-13409"/>
+                  <a:pt x="3255439" y="0"/>
+                </a:cubicBezTo>
+                <a:cubicBezTo>
+                  <a:pt x="3413662" y="13409"/>
+                  <a:pt x="3979999" y="-10121"/>
+                  <a:pt x="4243589" y="0"/>
+                </a:cubicBezTo>
+                <a:cubicBezTo>
+                  <a:pt x="4244484" y="8974"/>
+                  <a:pt x="4243043" y="9359"/>
+                  <a:pt x="4243589" y="18288"/>
+                </a:cubicBezTo>
+                <a:cubicBezTo>
+                  <a:pt x="4058777" y="31246"/>
+                  <a:pt x="3910348" y="3158"/>
+                  <a:pt x="3594926" y="18288"/>
+                </a:cubicBezTo>
+                <a:cubicBezTo>
+                  <a:pt x="3279504" y="33418"/>
+                  <a:pt x="3319955" y="-3977"/>
+                  <a:pt x="3073571" y="18288"/>
+                </a:cubicBezTo>
+                <a:cubicBezTo>
+                  <a:pt x="2827187" y="40553"/>
+                  <a:pt x="2767387" y="1863"/>
+                  <a:pt x="2552216" y="18288"/>
+                </a:cubicBezTo>
+                <a:cubicBezTo>
+                  <a:pt x="2337046" y="34713"/>
+                  <a:pt x="2181871" y="19527"/>
+                  <a:pt x="1903553" y="18288"/>
+                </a:cubicBezTo>
+                <a:cubicBezTo>
+                  <a:pt x="1625235" y="17049"/>
+                  <a:pt x="1557672" y="24174"/>
+                  <a:pt x="1212454" y="18288"/>
+                </a:cubicBezTo>
+                <a:cubicBezTo>
+                  <a:pt x="867236" y="12402"/>
+                  <a:pt x="874382" y="15627"/>
+                  <a:pt x="733535" y="18288"/>
+                </a:cubicBezTo>
+                <a:cubicBezTo>
+                  <a:pt x="592688" y="20949"/>
+                  <a:pt x="183477" y="14753"/>
+                  <a:pt x="0" y="18288"/>
+                </a:cubicBezTo>
+                <a:cubicBezTo>
+                  <a:pt x="-229" y="14222"/>
+                  <a:pt x="509" y="5816"/>
+                  <a:pt x="0" y="0"/>
+                </a:cubicBezTo>
+                <a:close/>
+              </a:path>
+              <a:path w="4243589" h="18288" stroke="0" extrusionOk="0">
+                <a:moveTo>
+                  <a:pt x="0" y="0"/>
+                </a:moveTo>
+                <a:cubicBezTo>
+                  <a:pt x="143690" y="16630"/>
+                  <a:pt x="266667" y="14847"/>
+                  <a:pt x="521355" y="0"/>
+                </a:cubicBezTo>
+                <a:cubicBezTo>
+                  <a:pt x="776043" y="-14847"/>
+                  <a:pt x="814491" y="-17363"/>
+                  <a:pt x="1000275" y="0"/>
+                </a:cubicBezTo>
+                <a:cubicBezTo>
+                  <a:pt x="1186059" y="17363"/>
+                  <a:pt x="1352504" y="-23507"/>
+                  <a:pt x="1521630" y="0"/>
+                </a:cubicBezTo>
+                <a:cubicBezTo>
+                  <a:pt x="1690756" y="23507"/>
+                  <a:pt x="1889525" y="5871"/>
+                  <a:pt x="2127857" y="0"/>
+                </a:cubicBezTo>
+                <a:cubicBezTo>
+                  <a:pt x="2366189" y="-5871"/>
+                  <a:pt x="2620628" y="-27997"/>
+                  <a:pt x="2776520" y="0"/>
+                </a:cubicBezTo>
+                <a:cubicBezTo>
+                  <a:pt x="2932412" y="27997"/>
+                  <a:pt x="3131683" y="-25073"/>
+                  <a:pt x="3467618" y="0"/>
+                </a:cubicBezTo>
+                <a:cubicBezTo>
+                  <a:pt x="3803553" y="25073"/>
+                  <a:pt x="4017371" y="3071"/>
+                  <a:pt x="4243589" y="0"/>
+                </a:cubicBezTo>
+                <a:cubicBezTo>
+                  <a:pt x="4243134" y="6162"/>
+                  <a:pt x="4243492" y="11775"/>
+                  <a:pt x="4243589" y="18288"/>
+                </a:cubicBezTo>
+                <a:cubicBezTo>
+                  <a:pt x="4017834" y="-5779"/>
+                  <a:pt x="3834586" y="13376"/>
+                  <a:pt x="3594926" y="18288"/>
+                </a:cubicBezTo>
+                <a:cubicBezTo>
+                  <a:pt x="3355266" y="23200"/>
+                  <a:pt x="3204179" y="2869"/>
+                  <a:pt x="2903827" y="18288"/>
+                </a:cubicBezTo>
+                <a:cubicBezTo>
+                  <a:pt x="2603475" y="33707"/>
+                  <a:pt x="2526187" y="46187"/>
+                  <a:pt x="2212729" y="18288"/>
+                </a:cubicBezTo>
+                <a:cubicBezTo>
+                  <a:pt x="1899271" y="-9611"/>
+                  <a:pt x="1966289" y="29692"/>
+                  <a:pt x="1733809" y="18288"/>
+                </a:cubicBezTo>
+                <a:cubicBezTo>
+                  <a:pt x="1501329" y="6884"/>
+                  <a:pt x="1343612" y="12492"/>
+                  <a:pt x="1085146" y="18288"/>
+                </a:cubicBezTo>
+                <a:cubicBezTo>
+                  <a:pt x="826680" y="24084"/>
+                  <a:pt x="778184" y="35607"/>
+                  <a:pt x="521355" y="18288"/>
+                </a:cubicBezTo>
+                <a:cubicBezTo>
+                  <a:pt x="264526" y="969"/>
+                  <a:pt x="120277" y="4268"/>
+                  <a:pt x="0" y="18288"/>
+                </a:cubicBezTo>
+                <a:cubicBezTo>
+                  <a:pt x="766" y="10800"/>
+                  <a:pt x="-457" y="8180"/>
+                  <a:pt x="0" y="0"/>
+                </a:cubicBezTo>
+                <a:close/>
+              </a:path>
+            </a:pathLst>
+          </a:custGeom>
+          <a:solidFill>
+            <a:schemeClr val="accent2"/>
+          </a:solidFill>
+          <a:ln w="41275" cap="rnd">
+            <a:solidFill>
+              <a:schemeClr val="accent2"/>
+            </a:solidFill>
+            <a:round/>
+            <a:extLst>
+              <a:ext uri="{C807C97D-BFC1-408E-A445-0C87EB9F89A2}">
+                <ask:lineSketchStyleProps xmlns:ask="http://schemas.microsoft.com/office/drawing/2018/sketchyshapes" sd="2727557108">
+                  <a:prstGeom prst="rect">
+                    <a:avLst/>
+                  </a:prstGeom>
+                  <ask:type>
+                    <ask:lineSketchFreehand/>
+                  </ask:type>
+                </ask:lineSketchStyleProps>
+              </a:ext>
+            </a:extLst>
+          </a:ln>
+        </p:spPr>
+        <p:style>
+          <a:lnRef idx="2">
+            <a:schemeClr val="accent1">
+              <a:shade val="50000"/>
+            </a:schemeClr>
+          </a:lnRef>
+          <a:fillRef idx="1">
+            <a:schemeClr val="accent1"/>
+          </a:fillRef>
+          <a:effectRef idx="0">
+            <a:schemeClr val="accent1"/>
+          </a:effectRef>
+          <a:fontRef idx="minor">
+            <a:schemeClr val="lt1"/>
+          </a:fontRef>
+        </p:style>
+        <p:txBody>
+          <a:bodyPr rtlCol="0" anchor="ctr"/>
+          <a:lstStyle/>
+          <a:p>
+            <a:pPr algn="ctr"/>
+            <a:endParaRPr lang="en-US"/>
           </a:p>
         </p:txBody>
       </p:sp>
@@ -14546,7 +13846,7 @@
           <p:cNvPr id="3" name="Content Placeholder 2">
             <a:extLst>
               <a:ext uri="{FF2B5EF4-FFF2-40B4-BE49-F238E27FC236}">
-                <a16:creationId xmlns:a16="http://schemas.microsoft.com/office/drawing/2014/main" id="{A52B0BE4-6B20-D627-EDF3-273222A1FD8B}"/>
+                <a16:creationId xmlns:a16="http://schemas.microsoft.com/office/drawing/2014/main" id="{765ADE50-96FC-02E2-9EB9-232B259EAF84}"/>
               </a:ext>
             </a:extLst>
           </p:cNvPr>
@@ -14560,7 +13860,7 @@
         <p:spPr>
           <a:xfrm>
             <a:off x="640080" y="2706624"/>
-            <a:ext cx="4554220" cy="3483864"/>
+            <a:ext cx="6894576" cy="3483864"/>
           </a:xfrm>
         </p:spPr>
         <p:txBody>
@@ -14571,21 +13871,24 @@
           <a:p>
             <a:r>
               <a:rPr lang="en-GB" sz="2200" dirty="0"/>
-              <a:t>Each core feature is organised and named into a individual class and whether they are functional or nonfunctional </a:t>
+              <a:t>Gemini chatbot Api:</a:t>
             </a:r>
+          </a:p>
+          <a:p>
+            <a:pPr lvl="1"/>
             <a:r>
-              <a:rPr lang="en-GB" sz="2200" b="1" dirty="0"/>
-              <a:t>( example on the right)</a:t>
+              <a:rPr lang="en-GB" sz="2200" dirty="0"/>
+              <a:t>Used googles Gemini chatbot to answer any questions that a user may have on eco –friendly practices or information</a:t>
             </a:r>
           </a:p>
         </p:txBody>
       </p:sp>
       <p:pic>
         <p:nvPicPr>
-          <p:cNvPr id="8" name="Picture 7">
-            <a:extLst>
-              <a:ext uri="{FF2B5EF4-FFF2-40B4-BE49-F238E27FC236}">
-                <a16:creationId xmlns:a16="http://schemas.microsoft.com/office/drawing/2014/main" id="{85572CAF-F288-95E6-3AAE-265FCDEFD6A8}"/>
+          <p:cNvPr id="11" name="Picture 10">
+            <a:extLst>
+              <a:ext uri="{FF2B5EF4-FFF2-40B4-BE49-F238E27FC236}">
+                <a16:creationId xmlns:a16="http://schemas.microsoft.com/office/drawing/2014/main" id="{C1C625DD-1F71-3E6C-58ED-F0A07ACCA5DD}"/>
               </a:ext>
             </a:extLst>
           </p:cNvPr>
@@ -14602,8 +13905,8 @@
         </p:blipFill>
         <p:spPr>
           <a:xfrm>
-            <a:off x="6260456" y="329184"/>
-            <a:ext cx="5617600" cy="2668359"/>
+            <a:off x="7641164" y="1002283"/>
+            <a:ext cx="4414644" cy="5659800"/>
           </a:xfrm>
           <a:prstGeom prst="rect">
             <a:avLst/>
@@ -14615,7 +13918,7 @@
           <p:cNvPr id="6" name="Picture 5">
             <a:extLst>
               <a:ext uri="{FF2B5EF4-FFF2-40B4-BE49-F238E27FC236}">
-                <a16:creationId xmlns:a16="http://schemas.microsoft.com/office/drawing/2014/main" id="{D30E24B2-2329-37DB-93ED-2762CD3D8717}"/>
+                <a16:creationId xmlns:a16="http://schemas.microsoft.com/office/drawing/2014/main" id="{354B977D-7CD9-42F8-8E0C-0FBAA1E1C32B}"/>
               </a:ext>
             </a:extLst>
           </p:cNvPr>
@@ -14626,13 +13929,14 @@
         </p:nvPicPr>
         <p:blipFill>
           <a:blip r:embed="rId3"/>
-          <a:srcRect r="19618"/>
-          <a:stretch/>
+          <a:stretch>
+            <a:fillRect/>
+          </a:stretch>
         </p:blipFill>
         <p:spPr>
           <a:xfrm>
-            <a:off x="6260456" y="3326726"/>
-            <a:ext cx="5571116" cy="2668359"/>
+            <a:off x="303784" y="4245356"/>
+            <a:ext cx="7204236" cy="2539492"/>
           </a:xfrm>
           <a:prstGeom prst="rect">
             <a:avLst/>
@@ -14642,683 +13946,7 @@
     </p:spTree>
     <p:extLst>
       <p:ext uri="{BB962C8B-B14F-4D97-AF65-F5344CB8AC3E}">
-        <p14:creationId xmlns:p14="http://schemas.microsoft.com/office/powerpoint/2010/main" val="4005010835"/>
-      </p:ext>
-    </p:extLst>
-  </p:cSld>
-  <p:clrMapOvr>
-    <a:masterClrMapping/>
-  </p:clrMapOvr>
-</p:sld>
-</file>
-
-<file path=ppt/slides/slide6.xml><?xml version="1.0" encoding="utf-8"?>
-<p:sld xmlns:a="http://schemas.openxmlformats.org/drawingml/2006/main" xmlns:r="http://schemas.openxmlformats.org/officeDocument/2006/relationships" xmlns:p="http://schemas.openxmlformats.org/presentationml/2006/main">
-  <p:cSld>
-    <p:spTree>
-      <p:nvGrpSpPr>
-        <p:cNvPr id="1" name="">
-          <a:extLst>
-            <a:ext uri="{FF2B5EF4-FFF2-40B4-BE49-F238E27FC236}">
-              <a16:creationId xmlns:a16="http://schemas.microsoft.com/office/drawing/2014/main" id="{F5B467DC-340A-2641-9440-010B641FA09B}"/>
-            </a:ext>
-          </a:extLst>
-        </p:cNvPr>
-        <p:cNvGrpSpPr/>
-        <p:nvPr/>
-      </p:nvGrpSpPr>
-      <p:grpSpPr>
-        <a:xfrm>
-          <a:off x="0" y="0"/>
-          <a:ext cx="0" cy="0"/>
-          <a:chOff x="0" y="0"/>
-          <a:chExt cx="0" cy="0"/>
-        </a:xfrm>
-      </p:grpSpPr>
-      <p:sp>
-        <p:nvSpPr>
-          <p:cNvPr id="2" name="Title 1">
-            <a:extLst>
-              <a:ext uri="{FF2B5EF4-FFF2-40B4-BE49-F238E27FC236}">
-                <a16:creationId xmlns:a16="http://schemas.microsoft.com/office/drawing/2014/main" id="{1EFD5FCB-F331-28F9-8DAD-B508977F4FAA}"/>
-              </a:ext>
-            </a:extLst>
-          </p:cNvPr>
-          <p:cNvSpPr>
-            <a:spLocks noGrp="1"/>
-          </p:cNvSpPr>
-          <p:nvPr>
-            <p:ph type="title"/>
-          </p:nvPr>
-        </p:nvSpPr>
-        <p:spPr>
-          <a:xfrm>
-            <a:off x="640080" y="329184"/>
-            <a:ext cx="6894576" cy="1783080"/>
-          </a:xfrm>
-        </p:spPr>
-        <p:txBody>
-          <a:bodyPr anchor="b">
-            <a:normAutofit/>
-          </a:bodyPr>
-          <a:lstStyle/>
-          <a:p>
-            <a:r>
-              <a:rPr lang="en-GB" sz="5400"/>
-              <a:t>Organised into functions/classes</a:t>
-            </a:r>
-          </a:p>
-        </p:txBody>
-      </p:sp>
-      <p:sp>
-        <p:nvSpPr>
-          <p:cNvPr id="3" name="Content Placeholder 2">
-            <a:extLst>
-              <a:ext uri="{FF2B5EF4-FFF2-40B4-BE49-F238E27FC236}">
-                <a16:creationId xmlns:a16="http://schemas.microsoft.com/office/drawing/2014/main" id="{C14D1A6D-2AED-A238-ED77-30FC8EFDD06C}"/>
-              </a:ext>
-            </a:extLst>
-          </p:cNvPr>
-          <p:cNvSpPr>
-            <a:spLocks noGrp="1"/>
-          </p:cNvSpPr>
-          <p:nvPr>
-            <p:ph idx="1"/>
-          </p:nvPr>
-        </p:nvSpPr>
-        <p:spPr>
-          <a:xfrm>
-            <a:off x="640080" y="2706624"/>
-            <a:ext cx="4554220" cy="3483864"/>
-          </a:xfrm>
-        </p:spPr>
-        <p:txBody>
-          <a:bodyPr>
-            <a:normAutofit/>
-          </a:bodyPr>
-          <a:lstStyle/>
-          <a:p>
-            <a:r>
-              <a:rPr lang="en-GB" sz="2200" dirty="0"/>
-              <a:t>Each core feature is organised and named into a individual class and whether they are functional or nonfunctional </a:t>
-            </a:r>
-            <a:r>
-              <a:rPr lang="en-GB" sz="2200" b="1" dirty="0"/>
-              <a:t>( example on the right)</a:t>
-            </a:r>
-          </a:p>
-        </p:txBody>
-      </p:sp>
-      <p:pic>
-        <p:nvPicPr>
-          <p:cNvPr id="8" name="Picture 7">
-            <a:extLst>
-              <a:ext uri="{FF2B5EF4-FFF2-40B4-BE49-F238E27FC236}">
-                <a16:creationId xmlns:a16="http://schemas.microsoft.com/office/drawing/2014/main" id="{444A90A4-A6D0-962B-574F-3936C339B4E8}"/>
-              </a:ext>
-            </a:extLst>
-          </p:cNvPr>
-          <p:cNvPicPr>
-            <a:picLocks noChangeAspect="1"/>
-          </p:cNvPicPr>
-          <p:nvPr/>
-        </p:nvPicPr>
-        <p:blipFill>
-          <a:blip r:embed="rId2"/>
-          <a:stretch>
-            <a:fillRect/>
-          </a:stretch>
-        </p:blipFill>
-        <p:spPr>
-          <a:xfrm>
-            <a:off x="6260456" y="329184"/>
-            <a:ext cx="5617600" cy="2668359"/>
-          </a:xfrm>
-          <a:prstGeom prst="rect">
-            <a:avLst/>
-          </a:prstGeom>
-        </p:spPr>
-      </p:pic>
-      <p:pic>
-        <p:nvPicPr>
-          <p:cNvPr id="6" name="Picture 5">
-            <a:extLst>
-              <a:ext uri="{FF2B5EF4-FFF2-40B4-BE49-F238E27FC236}">
-                <a16:creationId xmlns:a16="http://schemas.microsoft.com/office/drawing/2014/main" id="{DE0A4251-3A8C-8552-E47B-D466E56452F9}"/>
-              </a:ext>
-            </a:extLst>
-          </p:cNvPr>
-          <p:cNvPicPr>
-            <a:picLocks noChangeAspect="1"/>
-          </p:cNvPicPr>
-          <p:nvPr/>
-        </p:nvPicPr>
-        <p:blipFill>
-          <a:blip r:embed="rId3"/>
-          <a:srcRect r="19618"/>
-          <a:stretch/>
-        </p:blipFill>
-        <p:spPr>
-          <a:xfrm>
-            <a:off x="6260456" y="3326726"/>
-            <a:ext cx="5571116" cy="2668359"/>
-          </a:xfrm>
-          <a:prstGeom prst="rect">
-            <a:avLst/>
-          </a:prstGeom>
-        </p:spPr>
-      </p:pic>
-    </p:spTree>
-    <p:extLst>
-      <p:ext uri="{BB962C8B-B14F-4D97-AF65-F5344CB8AC3E}">
-        <p14:creationId xmlns:p14="http://schemas.microsoft.com/office/powerpoint/2010/main" val="2545714237"/>
-      </p:ext>
-    </p:extLst>
-  </p:cSld>
-  <p:clrMapOvr>
-    <a:masterClrMapping/>
-  </p:clrMapOvr>
-</p:sld>
-</file>
-
-<file path=ppt/slides/slide7.xml><?xml version="1.0" encoding="utf-8"?>
-<p:sld xmlns:a="http://schemas.openxmlformats.org/drawingml/2006/main" xmlns:r="http://schemas.openxmlformats.org/officeDocument/2006/relationships" xmlns:p="http://schemas.openxmlformats.org/presentationml/2006/main">
-  <p:cSld>
-    <p:spTree>
-      <p:nvGrpSpPr>
-        <p:cNvPr id="1" name="">
-          <a:extLst>
-            <a:ext uri="{FF2B5EF4-FFF2-40B4-BE49-F238E27FC236}">
-              <a16:creationId xmlns:a16="http://schemas.microsoft.com/office/drawing/2014/main" id="{6B6A0362-32AD-E0E5-192E-4DA8AACC9FD6}"/>
-            </a:ext>
-          </a:extLst>
-        </p:cNvPr>
-        <p:cNvGrpSpPr/>
-        <p:nvPr/>
-      </p:nvGrpSpPr>
-      <p:grpSpPr>
-        <a:xfrm>
-          <a:off x="0" y="0"/>
-          <a:ext cx="0" cy="0"/>
-          <a:chOff x="0" y="0"/>
-          <a:chExt cx="0" cy="0"/>
-        </a:xfrm>
-      </p:grpSpPr>
-      <p:sp>
-        <p:nvSpPr>
-          <p:cNvPr id="2" name="Title 1">
-            <a:extLst>
-              <a:ext uri="{FF2B5EF4-FFF2-40B4-BE49-F238E27FC236}">
-                <a16:creationId xmlns:a16="http://schemas.microsoft.com/office/drawing/2014/main" id="{2F999061-2048-5979-F573-8DE7D7447E92}"/>
-              </a:ext>
-            </a:extLst>
-          </p:cNvPr>
-          <p:cNvSpPr>
-            <a:spLocks noGrp="1"/>
-          </p:cNvSpPr>
-          <p:nvPr>
-            <p:ph type="title"/>
-          </p:nvPr>
-        </p:nvSpPr>
-        <p:spPr>
-          <a:xfrm>
-            <a:off x="640080" y="329184"/>
-            <a:ext cx="6894576" cy="1783080"/>
-          </a:xfrm>
-        </p:spPr>
-        <p:txBody>
-          <a:bodyPr anchor="b">
-            <a:normAutofit/>
-          </a:bodyPr>
-          <a:lstStyle/>
-          <a:p>
-            <a:r>
-              <a:rPr lang="en-GB" sz="5400"/>
-              <a:t>Organised into functions/classes</a:t>
-            </a:r>
-          </a:p>
-        </p:txBody>
-      </p:sp>
-      <p:sp>
-        <p:nvSpPr>
-          <p:cNvPr id="3" name="Content Placeholder 2">
-            <a:extLst>
-              <a:ext uri="{FF2B5EF4-FFF2-40B4-BE49-F238E27FC236}">
-                <a16:creationId xmlns:a16="http://schemas.microsoft.com/office/drawing/2014/main" id="{EAFD9603-55A5-CD69-A803-9A4667FC24E7}"/>
-              </a:ext>
-            </a:extLst>
-          </p:cNvPr>
-          <p:cNvSpPr>
-            <a:spLocks noGrp="1"/>
-          </p:cNvSpPr>
-          <p:nvPr>
-            <p:ph idx="1"/>
-          </p:nvPr>
-        </p:nvSpPr>
-        <p:spPr>
-          <a:xfrm>
-            <a:off x="640080" y="2706624"/>
-            <a:ext cx="4554220" cy="3483864"/>
-          </a:xfrm>
-        </p:spPr>
-        <p:txBody>
-          <a:bodyPr>
-            <a:normAutofit/>
-          </a:bodyPr>
-          <a:lstStyle/>
-          <a:p>
-            <a:r>
-              <a:rPr lang="en-GB" sz="2200" dirty="0"/>
-              <a:t>Each core feature is organised and named into a individual class and whether they are functional or nonfunctional </a:t>
-            </a:r>
-            <a:r>
-              <a:rPr lang="en-GB" sz="2200" b="1" dirty="0"/>
-              <a:t>( example on the right)</a:t>
-            </a:r>
-          </a:p>
-        </p:txBody>
-      </p:sp>
-      <p:pic>
-        <p:nvPicPr>
-          <p:cNvPr id="8" name="Picture 7">
-            <a:extLst>
-              <a:ext uri="{FF2B5EF4-FFF2-40B4-BE49-F238E27FC236}">
-                <a16:creationId xmlns:a16="http://schemas.microsoft.com/office/drawing/2014/main" id="{18E6835C-138F-BC79-B0C7-6E5F067F7FA7}"/>
-              </a:ext>
-            </a:extLst>
-          </p:cNvPr>
-          <p:cNvPicPr>
-            <a:picLocks noChangeAspect="1"/>
-          </p:cNvPicPr>
-          <p:nvPr/>
-        </p:nvPicPr>
-        <p:blipFill>
-          <a:blip r:embed="rId2"/>
-          <a:stretch>
-            <a:fillRect/>
-          </a:stretch>
-        </p:blipFill>
-        <p:spPr>
-          <a:xfrm>
-            <a:off x="6260456" y="329184"/>
-            <a:ext cx="5617600" cy="2668359"/>
-          </a:xfrm>
-          <a:prstGeom prst="rect">
-            <a:avLst/>
-          </a:prstGeom>
-        </p:spPr>
-      </p:pic>
-      <p:pic>
-        <p:nvPicPr>
-          <p:cNvPr id="6" name="Picture 5">
-            <a:extLst>
-              <a:ext uri="{FF2B5EF4-FFF2-40B4-BE49-F238E27FC236}">
-                <a16:creationId xmlns:a16="http://schemas.microsoft.com/office/drawing/2014/main" id="{5713F4ED-E922-76C9-8D73-E1B1B18679D1}"/>
-              </a:ext>
-            </a:extLst>
-          </p:cNvPr>
-          <p:cNvPicPr>
-            <a:picLocks noChangeAspect="1"/>
-          </p:cNvPicPr>
-          <p:nvPr/>
-        </p:nvPicPr>
-        <p:blipFill>
-          <a:blip r:embed="rId3"/>
-          <a:srcRect r="19618"/>
-          <a:stretch/>
-        </p:blipFill>
-        <p:spPr>
-          <a:xfrm>
-            <a:off x="6260456" y="3326726"/>
-            <a:ext cx="5571116" cy="2668359"/>
-          </a:xfrm>
-          <a:prstGeom prst="rect">
-            <a:avLst/>
-          </a:prstGeom>
-        </p:spPr>
-      </p:pic>
-    </p:spTree>
-    <p:extLst>
-      <p:ext uri="{BB962C8B-B14F-4D97-AF65-F5344CB8AC3E}">
-        <p14:creationId xmlns:p14="http://schemas.microsoft.com/office/powerpoint/2010/main" val="1742600967"/>
-      </p:ext>
-    </p:extLst>
-  </p:cSld>
-  <p:clrMapOvr>
-    <a:masterClrMapping/>
-  </p:clrMapOvr>
-</p:sld>
-</file>
-
-<file path=ppt/slides/slide8.xml><?xml version="1.0" encoding="utf-8"?>
-<p:sld xmlns:a="http://schemas.openxmlformats.org/drawingml/2006/main" xmlns:r="http://schemas.openxmlformats.org/officeDocument/2006/relationships" xmlns:p="http://schemas.openxmlformats.org/presentationml/2006/main">
-  <p:cSld>
-    <p:spTree>
-      <p:nvGrpSpPr>
-        <p:cNvPr id="1" name="">
-          <a:extLst>
-            <a:ext uri="{FF2B5EF4-FFF2-40B4-BE49-F238E27FC236}">
-              <a16:creationId xmlns:a16="http://schemas.microsoft.com/office/drawing/2014/main" id="{9E3FB31D-D85C-288D-3E72-D79A7EB6ED07}"/>
-            </a:ext>
-          </a:extLst>
-        </p:cNvPr>
-        <p:cNvGrpSpPr/>
-        <p:nvPr/>
-      </p:nvGrpSpPr>
-      <p:grpSpPr>
-        <a:xfrm>
-          <a:off x="0" y="0"/>
-          <a:ext cx="0" cy="0"/>
-          <a:chOff x="0" y="0"/>
-          <a:chExt cx="0" cy="0"/>
-        </a:xfrm>
-      </p:grpSpPr>
-      <p:sp>
-        <p:nvSpPr>
-          <p:cNvPr id="2" name="Title 1">
-            <a:extLst>
-              <a:ext uri="{FF2B5EF4-FFF2-40B4-BE49-F238E27FC236}">
-                <a16:creationId xmlns:a16="http://schemas.microsoft.com/office/drawing/2014/main" id="{C44AD4B7-9D83-511F-CDA8-1F2BD0ACC398}"/>
-              </a:ext>
-            </a:extLst>
-          </p:cNvPr>
-          <p:cNvSpPr>
-            <a:spLocks noGrp="1"/>
-          </p:cNvSpPr>
-          <p:nvPr>
-            <p:ph type="title"/>
-          </p:nvPr>
-        </p:nvSpPr>
-        <p:spPr>
-          <a:xfrm>
-            <a:off x="640080" y="329184"/>
-            <a:ext cx="6894576" cy="1783080"/>
-          </a:xfrm>
-        </p:spPr>
-        <p:txBody>
-          <a:bodyPr anchor="b">
-            <a:normAutofit/>
-          </a:bodyPr>
-          <a:lstStyle/>
-          <a:p>
-            <a:r>
-              <a:rPr lang="en-GB" sz="5400"/>
-              <a:t>Organised into functions/classes</a:t>
-            </a:r>
-          </a:p>
-        </p:txBody>
-      </p:sp>
-      <p:sp>
-        <p:nvSpPr>
-          <p:cNvPr id="3" name="Content Placeholder 2">
-            <a:extLst>
-              <a:ext uri="{FF2B5EF4-FFF2-40B4-BE49-F238E27FC236}">
-                <a16:creationId xmlns:a16="http://schemas.microsoft.com/office/drawing/2014/main" id="{54B80E61-8BF4-8F83-7009-8513FCF3D87E}"/>
-              </a:ext>
-            </a:extLst>
-          </p:cNvPr>
-          <p:cNvSpPr>
-            <a:spLocks noGrp="1"/>
-          </p:cNvSpPr>
-          <p:nvPr>
-            <p:ph idx="1"/>
-          </p:nvPr>
-        </p:nvSpPr>
-        <p:spPr>
-          <a:xfrm>
-            <a:off x="640080" y="2706624"/>
-            <a:ext cx="4554220" cy="3483864"/>
-          </a:xfrm>
-        </p:spPr>
-        <p:txBody>
-          <a:bodyPr>
-            <a:normAutofit/>
-          </a:bodyPr>
-          <a:lstStyle/>
-          <a:p>
-            <a:r>
-              <a:rPr lang="en-GB" sz="2200" dirty="0"/>
-              <a:t>Each core feature is organised and named into a individual class and whether they are functional or nonfunctional </a:t>
-            </a:r>
-            <a:r>
-              <a:rPr lang="en-GB" sz="2200" b="1" dirty="0"/>
-              <a:t>( example on the right)</a:t>
-            </a:r>
-          </a:p>
-        </p:txBody>
-      </p:sp>
-      <p:pic>
-        <p:nvPicPr>
-          <p:cNvPr id="8" name="Picture 7">
-            <a:extLst>
-              <a:ext uri="{FF2B5EF4-FFF2-40B4-BE49-F238E27FC236}">
-                <a16:creationId xmlns:a16="http://schemas.microsoft.com/office/drawing/2014/main" id="{51BAD674-EAD9-DBBB-A470-6F4783F843E8}"/>
-              </a:ext>
-            </a:extLst>
-          </p:cNvPr>
-          <p:cNvPicPr>
-            <a:picLocks noChangeAspect="1"/>
-          </p:cNvPicPr>
-          <p:nvPr/>
-        </p:nvPicPr>
-        <p:blipFill>
-          <a:blip r:embed="rId2"/>
-          <a:stretch>
-            <a:fillRect/>
-          </a:stretch>
-        </p:blipFill>
-        <p:spPr>
-          <a:xfrm>
-            <a:off x="6260456" y="329184"/>
-            <a:ext cx="5617600" cy="2668359"/>
-          </a:xfrm>
-          <a:prstGeom prst="rect">
-            <a:avLst/>
-          </a:prstGeom>
-        </p:spPr>
-      </p:pic>
-      <p:pic>
-        <p:nvPicPr>
-          <p:cNvPr id="6" name="Picture 5">
-            <a:extLst>
-              <a:ext uri="{FF2B5EF4-FFF2-40B4-BE49-F238E27FC236}">
-                <a16:creationId xmlns:a16="http://schemas.microsoft.com/office/drawing/2014/main" id="{D2BAACB2-A4D0-E58A-EFD3-1351777A0323}"/>
-              </a:ext>
-            </a:extLst>
-          </p:cNvPr>
-          <p:cNvPicPr>
-            <a:picLocks noChangeAspect="1"/>
-          </p:cNvPicPr>
-          <p:nvPr/>
-        </p:nvPicPr>
-        <p:blipFill>
-          <a:blip r:embed="rId3"/>
-          <a:srcRect r="19618"/>
-          <a:stretch/>
-        </p:blipFill>
-        <p:spPr>
-          <a:xfrm>
-            <a:off x="6260456" y="3326726"/>
-            <a:ext cx="5571116" cy="2668359"/>
-          </a:xfrm>
-          <a:prstGeom prst="rect">
-            <a:avLst/>
-          </a:prstGeom>
-        </p:spPr>
-      </p:pic>
-    </p:spTree>
-    <p:extLst>
-      <p:ext uri="{BB962C8B-B14F-4D97-AF65-F5344CB8AC3E}">
-        <p14:creationId xmlns:p14="http://schemas.microsoft.com/office/powerpoint/2010/main" val="1352431123"/>
-      </p:ext>
-    </p:extLst>
-  </p:cSld>
-  <p:clrMapOvr>
-    <a:masterClrMapping/>
-  </p:clrMapOvr>
-</p:sld>
-</file>
-
-<file path=ppt/slides/slide9.xml><?xml version="1.0" encoding="utf-8"?>
-<p:sld xmlns:a="http://schemas.openxmlformats.org/drawingml/2006/main" xmlns:r="http://schemas.openxmlformats.org/officeDocument/2006/relationships" xmlns:p="http://schemas.openxmlformats.org/presentationml/2006/main">
-  <p:cSld>
-    <p:spTree>
-      <p:nvGrpSpPr>
-        <p:cNvPr id="1" name="">
-          <a:extLst>
-            <a:ext uri="{FF2B5EF4-FFF2-40B4-BE49-F238E27FC236}">
-              <a16:creationId xmlns:a16="http://schemas.microsoft.com/office/drawing/2014/main" id="{213976BE-D5E6-B30A-834B-364AFBD885DD}"/>
-            </a:ext>
-          </a:extLst>
-        </p:cNvPr>
-        <p:cNvGrpSpPr/>
-        <p:nvPr/>
-      </p:nvGrpSpPr>
-      <p:grpSpPr>
-        <a:xfrm>
-          <a:off x="0" y="0"/>
-          <a:ext cx="0" cy="0"/>
-          <a:chOff x="0" y="0"/>
-          <a:chExt cx="0" cy="0"/>
-        </a:xfrm>
-      </p:grpSpPr>
-      <p:sp>
-        <p:nvSpPr>
-          <p:cNvPr id="2" name="Title 1">
-            <a:extLst>
-              <a:ext uri="{FF2B5EF4-FFF2-40B4-BE49-F238E27FC236}">
-                <a16:creationId xmlns:a16="http://schemas.microsoft.com/office/drawing/2014/main" id="{E0AF6013-7A2F-9F7C-3998-46CE728B4D6A}"/>
-              </a:ext>
-            </a:extLst>
-          </p:cNvPr>
-          <p:cNvSpPr>
-            <a:spLocks noGrp="1"/>
-          </p:cNvSpPr>
-          <p:nvPr>
-            <p:ph type="title"/>
-          </p:nvPr>
-        </p:nvSpPr>
-        <p:spPr>
-          <a:xfrm>
-            <a:off x="640080" y="329184"/>
-            <a:ext cx="6894576" cy="1783080"/>
-          </a:xfrm>
-        </p:spPr>
-        <p:txBody>
-          <a:bodyPr anchor="b">
-            <a:normAutofit/>
-          </a:bodyPr>
-          <a:lstStyle/>
-          <a:p>
-            <a:r>
-              <a:rPr lang="en-GB" sz="5400"/>
-              <a:t>Organised into functions/classes</a:t>
-            </a:r>
-          </a:p>
-        </p:txBody>
-      </p:sp>
-      <p:sp>
-        <p:nvSpPr>
-          <p:cNvPr id="3" name="Content Placeholder 2">
-            <a:extLst>
-              <a:ext uri="{FF2B5EF4-FFF2-40B4-BE49-F238E27FC236}">
-                <a16:creationId xmlns:a16="http://schemas.microsoft.com/office/drawing/2014/main" id="{6B0A1DB0-D43C-986F-69B7-0AA3061280D6}"/>
-              </a:ext>
-            </a:extLst>
-          </p:cNvPr>
-          <p:cNvSpPr>
-            <a:spLocks noGrp="1"/>
-          </p:cNvSpPr>
-          <p:nvPr>
-            <p:ph idx="1"/>
-          </p:nvPr>
-        </p:nvSpPr>
-        <p:spPr>
-          <a:xfrm>
-            <a:off x="640080" y="2706624"/>
-            <a:ext cx="4554220" cy="3483864"/>
-          </a:xfrm>
-        </p:spPr>
-        <p:txBody>
-          <a:bodyPr>
-            <a:normAutofit/>
-          </a:bodyPr>
-          <a:lstStyle/>
-          <a:p>
-            <a:r>
-              <a:rPr lang="en-GB" sz="2200" dirty="0"/>
-              <a:t>Each core feature is organised and named into a individual class and whether they are functional or nonfunctional </a:t>
-            </a:r>
-            <a:r>
-              <a:rPr lang="en-GB" sz="2200" b="1" dirty="0"/>
-              <a:t>( example on the right)</a:t>
-            </a:r>
-          </a:p>
-        </p:txBody>
-      </p:sp>
-      <p:pic>
-        <p:nvPicPr>
-          <p:cNvPr id="8" name="Picture 7">
-            <a:extLst>
-              <a:ext uri="{FF2B5EF4-FFF2-40B4-BE49-F238E27FC236}">
-                <a16:creationId xmlns:a16="http://schemas.microsoft.com/office/drawing/2014/main" id="{F095A990-BBC2-E7C6-F13C-CCCA1076A764}"/>
-              </a:ext>
-            </a:extLst>
-          </p:cNvPr>
-          <p:cNvPicPr>
-            <a:picLocks noChangeAspect="1"/>
-          </p:cNvPicPr>
-          <p:nvPr/>
-        </p:nvPicPr>
-        <p:blipFill>
-          <a:blip r:embed="rId2"/>
-          <a:stretch>
-            <a:fillRect/>
-          </a:stretch>
-        </p:blipFill>
-        <p:spPr>
-          <a:xfrm>
-            <a:off x="6260456" y="329184"/>
-            <a:ext cx="5617600" cy="2668359"/>
-          </a:xfrm>
-          <a:prstGeom prst="rect">
-            <a:avLst/>
-          </a:prstGeom>
-        </p:spPr>
-      </p:pic>
-      <p:pic>
-        <p:nvPicPr>
-          <p:cNvPr id="6" name="Picture 5">
-            <a:extLst>
-              <a:ext uri="{FF2B5EF4-FFF2-40B4-BE49-F238E27FC236}">
-                <a16:creationId xmlns:a16="http://schemas.microsoft.com/office/drawing/2014/main" id="{C8CF961E-23C8-AE59-7608-38B1A9C23D42}"/>
-              </a:ext>
-            </a:extLst>
-          </p:cNvPr>
-          <p:cNvPicPr>
-            <a:picLocks noChangeAspect="1"/>
-          </p:cNvPicPr>
-          <p:nvPr/>
-        </p:nvPicPr>
-        <p:blipFill>
-          <a:blip r:embed="rId3"/>
-          <a:srcRect r="19618"/>
-          <a:stretch/>
-        </p:blipFill>
-        <p:spPr>
-          <a:xfrm>
-            <a:off x="6260456" y="3326726"/>
-            <a:ext cx="5571116" cy="2668359"/>
-          </a:xfrm>
-          <a:prstGeom prst="rect">
-            <a:avLst/>
-          </a:prstGeom>
-        </p:spPr>
-      </p:pic>
-    </p:spTree>
-    <p:extLst>
-      <p:ext uri="{BB962C8B-B14F-4D97-AF65-F5344CB8AC3E}">
-        <p14:creationId xmlns:p14="http://schemas.microsoft.com/office/powerpoint/2010/main" val="3705655162"/>
+        <p14:creationId xmlns:p14="http://schemas.microsoft.com/office/powerpoint/2010/main" val="3248953183"/>
       </p:ext>
     </p:extLst>
   </p:cSld>
